--- a/decks/Valletta_DOI_OSSTP_RFI_Summary.pptx
+++ b/decks/Valletta_DOI_OSSTP_RFI_Summary.pptx
@@ -1233,14 +1233,53 @@
       </p:grpSpPr>
       <p:sp>
         <p:nvSpPr>
-          <p:cNvPr id="2" name="Shape 0"/>
+          <p:cNvPr id="2" name="Text 0"/>
+          <p:cNvSpPr txBox="1"/>
+          <p:nvPr/>
+        </p:nvSpPr>
+        <p:spPr>
+          <a:xfrm>
+            <a:off x="6949440" y="0"/>
+            <a:ext cx="5486400" cy="6858000"/>
+          </a:xfrm>
+          <a:prstGeom prst="rect">
+            <a:avLst/>
+          </a:prstGeom>
+          <a:noFill/>
+          <a:ln/>
+        </p:spPr>
+        <p:txBody>
+          <a:bodyPr wrap="square" lIns="0" tIns="0" rIns="0" bIns="0" rtlCol="0" anchor="t"/>
+          <a:lstStyle/>
+          <a:p>
+            <a:pPr algn="r" indent="0" marL="0">
+              <a:buNone/>
+            </a:pPr>
+            <a:r>
+              <a:rPr lang="en-US" sz="36000" b="1" dirty="0">
+                <a:solidFill>
+                  <a:srgbClr val="141414"/>
+                </a:solidFill>
+                <a:latin typeface="Bookman Old Style" pitchFamily="34" charset="0"/>
+                <a:ea typeface="Bookman Old Style" pitchFamily="34" charset="-122"/>
+                <a:cs typeface="Bookman Old Style" pitchFamily="34" charset="-120"/>
+              </a:rPr>
+              <a:t>01</a:t>
+            </a:r>
+            <a:endParaRPr lang="en-US" sz="36000" dirty="0"/>
+          </a:p>
+        </p:txBody>
+      </p:sp>
+      <p:sp>
+        <p:nvSpPr>
+          <p:cNvPr id="3" name="Shape 1"/>
           <p:cNvSpPr/>
           <p:nvPr/>
         </p:nvSpPr>
         <p:spPr>
           <a:xfrm>
-            <a:off x="457200" y="457200"/>
-            <a:ext cx="365760" cy="25603"/>
+            <a:off x="457200" y="384048"/>
+            <a:ext cx="310896" cy="29261"/>
           </a:xfrm>
           <a:prstGeom prst="rect">
             <a:avLst/>
@@ -1253,14 +1292,14 @@
       </p:sp>
       <p:sp>
         <p:nvSpPr>
-          <p:cNvPr id="3" name="Shape 1"/>
+          <p:cNvPr id="4" name="Shape 2"/>
           <p:cNvSpPr/>
           <p:nvPr/>
         </p:nvSpPr>
         <p:spPr>
           <a:xfrm>
-            <a:off x="457200" y="457200"/>
-            <a:ext cx="25603" cy="365760"/>
+            <a:off x="457200" y="384048"/>
+            <a:ext cx="29261" cy="310896"/>
           </a:xfrm>
           <a:prstGeom prst="rect">
             <a:avLst/>
@@ -1273,14 +1312,14 @@
       </p:sp>
       <p:sp>
         <p:nvSpPr>
-          <p:cNvPr id="4" name="Text 2"/>
+          <p:cNvPr id="5" name="Text 3"/>
           <p:cNvSpPr txBox="1"/>
           <p:nvPr/>
         </p:nvSpPr>
         <p:spPr>
           <a:xfrm>
-            <a:off x="6245352" y="411480"/>
-            <a:ext cx="5486400" cy="274320"/>
+            <a:off x="896112" y="329184"/>
+            <a:ext cx="2926080" cy="292608"/>
           </a:xfrm>
           <a:prstGeom prst="rect">
             <a:avLst/>
@@ -1292,34 +1331,34 @@
           <a:bodyPr wrap="square" lIns="0" tIns="0" rIns="0" bIns="0" rtlCol="0" anchor="ctr"/>
           <a:lstStyle/>
           <a:p>
-            <a:pPr algn="r" indent="0" marL="0">
-              <a:buNone/>
-            </a:pPr>
-            <a:r>
-              <a:rPr lang="en-US" sz="1000" b="1" spc="150" kern="0" dirty="0">
-                <a:solidFill>
-                  <a:srgbClr val="D8D9DB"/>
+            <a:pPr indent="0" marL="0">
+              <a:buNone/>
+            </a:pPr>
+            <a:r>
+              <a:rPr lang="en-US" sz="1500" b="1" spc="200" kern="0" dirty="0">
+                <a:solidFill>
+                  <a:srgbClr val="FFFFFF"/>
                 </a:solidFill>
                 <a:latin typeface="Arial" pitchFamily="34" charset="0"/>
                 <a:ea typeface="Arial" pitchFamily="34" charset="-122"/>
                 <a:cs typeface="Arial" pitchFamily="34" charset="-120"/>
               </a:rPr>
-              <a:t>VALLETTA INDUSTRIES, INC.</a:t>
-            </a:r>
-            <a:endParaRPr lang="en-US" sz="1000" dirty="0"/>
-          </a:p>
-        </p:txBody>
-      </p:sp>
-      <p:sp>
-        <p:nvSpPr>
-          <p:cNvPr id="5" name="Text 3"/>
+              <a:t>VALLETTA</a:t>
+            </a:r>
+            <a:endParaRPr lang="en-US" sz="1500" dirty="0"/>
+          </a:p>
+        </p:txBody>
+      </p:sp>
+      <p:sp>
+        <p:nvSpPr>
+          <p:cNvPr id="6" name="Text 4"/>
           <p:cNvSpPr txBox="1"/>
           <p:nvPr/>
         </p:nvSpPr>
         <p:spPr>
           <a:xfrm>
-            <a:off x="457200" y="1600200"/>
-            <a:ext cx="9144000" cy="320040"/>
+            <a:off x="896112" y="603504"/>
+            <a:ext cx="2926080" cy="219456"/>
           </a:xfrm>
           <a:prstGeom prst="rect">
             <a:avLst/>
@@ -1331,18 +1370,97 @@
           <a:bodyPr wrap="square" lIns="0" tIns="0" rIns="0" bIns="0" rtlCol="0" anchor="ctr"/>
           <a:lstStyle/>
           <a:p>
-            <a:pPr algn="l" indent="0" marL="0">
-              <a:buNone/>
-            </a:pPr>
-            <a:r>
-              <a:rPr lang="en-US" sz="1100" b="1" spc="150" kern="0" dirty="0">
-                <a:solidFill>
-                  <a:srgbClr val="D8D9DB"/>
+            <a:pPr indent="0" marL="0">
+              <a:buNone/>
+            </a:pPr>
+            <a:r>
+              <a:rPr lang="en-US" sz="750" b="1" spc="200" kern="0" dirty="0">
+                <a:solidFill>
+                  <a:srgbClr val="5B5F66"/>
                 </a:solidFill>
                 <a:latin typeface="Arial" pitchFamily="34" charset="0"/>
                 <a:ea typeface="Arial" pitchFamily="34" charset="-122"/>
                 <a:cs typeface="Arial" pitchFamily="34" charset="-120"/>
               </a:rPr>
+              <a:t>INDUSTRIES, INC.</a:t>
+            </a:r>
+            <a:endParaRPr lang="en-US" sz="750" dirty="0"/>
+          </a:p>
+        </p:txBody>
+      </p:sp>
+      <p:sp>
+        <p:nvSpPr>
+          <p:cNvPr id="7" name="Shape 5"/>
+          <p:cNvSpPr/>
+          <p:nvPr/>
+        </p:nvSpPr>
+        <p:spPr>
+          <a:xfrm>
+            <a:off x="457200" y="1371600"/>
+            <a:ext cx="502920" cy="45720"/>
+          </a:xfrm>
+          <a:prstGeom prst="rect">
+            <a:avLst/>
+          </a:prstGeom>
+          <a:solidFill>
+            <a:srgbClr val="FF002B"/>
+          </a:solidFill>
+          <a:ln/>
+        </p:spPr>
+      </p:sp>
+      <p:sp>
+        <p:nvSpPr>
+          <p:cNvPr id="8" name="Shape 6"/>
+          <p:cNvSpPr/>
+          <p:nvPr/>
+        </p:nvSpPr>
+        <p:spPr>
+          <a:xfrm>
+            <a:off x="457200" y="1371600"/>
+            <a:ext cx="45720" cy="502920"/>
+          </a:xfrm>
+          <a:prstGeom prst="rect">
+            <a:avLst/>
+          </a:prstGeom>
+          <a:solidFill>
+            <a:srgbClr val="FF002B"/>
+          </a:solidFill>
+          <a:ln/>
+        </p:spPr>
+      </p:sp>
+      <p:sp>
+        <p:nvSpPr>
+          <p:cNvPr id="9" name="Text 7"/>
+          <p:cNvSpPr txBox="1"/>
+          <p:nvPr/>
+        </p:nvSpPr>
+        <p:spPr>
+          <a:xfrm>
+            <a:off x="777240" y="1481328"/>
+            <a:ext cx="10058400" cy="320040"/>
+          </a:xfrm>
+          <a:prstGeom prst="rect">
+            <a:avLst/>
+          </a:prstGeom>
+          <a:noFill/>
+          <a:ln/>
+        </p:spPr>
+        <p:txBody>
+          <a:bodyPr wrap="square" lIns="0" tIns="0" rIns="0" bIns="0" rtlCol="0" anchor="ctr"/>
+          <a:lstStyle/>
+          <a:p>
+            <a:pPr algn="l" indent="0" marL="0">
+              <a:buNone/>
+            </a:pPr>
+            <a:r>
+              <a:rPr lang="en-US" sz="1100" b="1" spc="150" kern="0" dirty="0">
+                <a:solidFill>
+                  <a:srgbClr val="D8D9DB"/>
+                </a:solidFill>
+                <a:latin typeface="Arial" pitchFamily="34" charset="0"/>
+                <a:ea typeface="Arial" pitchFamily="34" charset="-122"/>
+                <a:cs typeface="Arial" pitchFamily="34" charset="-120"/>
+              </a:rPr>
               <a:t>RESPONSE TO REQUEST FOR INFORMATION</a:t>
             </a:r>
             <a:endParaRPr lang="en-US" sz="1100" dirty="0"/>
@@ -1351,14 +1469,14 @@
       </p:sp>
       <p:sp>
         <p:nvSpPr>
-          <p:cNvPr id="6" name="Text 4"/>
+          <p:cNvPr id="10" name="Text 8"/>
           <p:cNvSpPr txBox="1"/>
           <p:nvPr/>
         </p:nvSpPr>
         <p:spPr>
           <a:xfrm>
-            <a:off x="457200" y="1965960"/>
-            <a:ext cx="11274552" cy="1600200"/>
+            <a:off x="777240" y="1828800"/>
+            <a:ext cx="10607040" cy="1600200"/>
           </a:xfrm>
           <a:prstGeom prst="rect">
             <a:avLst/>
@@ -1377,7 +1495,7 @@
               <a:buNone/>
             </a:pPr>
             <a:r>
-              <a:rPr lang="en-US" sz="4200" b="1" dirty="0">
+              <a:rPr lang="en-US" sz="4000" b="1" dirty="0">
                 <a:solidFill>
                   <a:srgbClr val="FFFFFF"/>
                 </a:solidFill>
@@ -1387,7 +1505,7 @@
               </a:rPr>
               <a:t>OFFICER SAFETY AND SURVIVAL</a:t>
             </a:r>
-            <a:endParaRPr lang="en-US" sz="4200" dirty="0"/>
+            <a:endParaRPr lang="en-US" sz="4000" dirty="0"/>
           </a:p>
           <a:p>
             <a:pPr algn="l" indent="0" marL="0">
@@ -1397,7 +1515,7 @@
               <a:buNone/>
             </a:pPr>
             <a:r>
-              <a:rPr lang="en-US" sz="4200" b="1" dirty="0">
+              <a:rPr lang="en-US" sz="4000" b="1" dirty="0">
                 <a:solidFill>
                   <a:srgbClr val="FFFFFF"/>
                 </a:solidFill>
@@ -1407,20 +1525,20 @@
               </a:rPr>
               <a:t>TRAINING PROGRAM (OSSTP)</a:t>
             </a:r>
-            <a:endParaRPr lang="en-US" sz="4200" dirty="0"/>
-          </a:p>
-        </p:txBody>
-      </p:sp>
-      <p:sp>
-        <p:nvSpPr>
-          <p:cNvPr id="7" name="Text 5"/>
+            <a:endParaRPr lang="en-US" sz="4000" dirty="0"/>
+          </a:p>
+        </p:txBody>
+      </p:sp>
+      <p:sp>
+        <p:nvSpPr>
+          <p:cNvPr id="11" name="Text 9"/>
           <p:cNvSpPr txBox="1"/>
           <p:nvPr/>
         </p:nvSpPr>
         <p:spPr>
           <a:xfrm>
-            <a:off x="457200" y="3584448"/>
-            <a:ext cx="11274552" cy="365760"/>
+            <a:off x="777240" y="3429000"/>
+            <a:ext cx="10607040" cy="329184"/>
           </a:xfrm>
           <a:prstGeom prst="rect">
             <a:avLst/>
@@ -1436,7 +1554,7 @@
               <a:buNone/>
             </a:pPr>
             <a:r>
-              <a:rPr lang="en-US" sz="1400" b="1" spc="100" kern="0" dirty="0">
+              <a:rPr lang="en-US" sz="1300" b="1" spc="100" kern="0" dirty="0">
                 <a:solidFill>
                   <a:srgbClr val="FF002B"/>
                 </a:solidFill>
@@ -1446,20 +1564,20 @@
               </a:rPr>
               <a:t>DEPARTMENT OF THE INTERIOR  |  OFFICE OF LAW ENFORCEMENT AND SECURITY</a:t>
             </a:r>
-            <a:endParaRPr lang="en-US" sz="1400" dirty="0"/>
-          </a:p>
-        </p:txBody>
-      </p:sp>
-      <p:sp>
-        <p:nvSpPr>
-          <p:cNvPr id="8" name="Text 6"/>
+            <a:endParaRPr lang="en-US" sz="1300" dirty="0"/>
+          </a:p>
+        </p:txBody>
+      </p:sp>
+      <p:sp>
+        <p:nvSpPr>
+          <p:cNvPr id="12" name="Text 10"/>
           <p:cNvSpPr txBox="1"/>
           <p:nvPr/>
         </p:nvSpPr>
         <p:spPr>
           <a:xfrm>
-            <a:off x="457200" y="4023360"/>
-            <a:ext cx="8503920" cy="502920"/>
+            <a:off x="777240" y="3822192"/>
+            <a:ext cx="10058400" cy="457200"/>
           </a:xfrm>
           <a:prstGeom prst="rect">
             <a:avLst/>
@@ -1475,9 +1593,48 @@
               <a:buNone/>
             </a:pPr>
             <a:r>
-              <a:rPr lang="en-US" sz="1500" i="1" dirty="0">
-                <a:solidFill>
-                  <a:srgbClr val="F5F5F3"/>
+              <a:rPr lang="en-US" sz="2400" b="1" dirty="0">
+                <a:solidFill>
+                  <a:srgbClr val="FFFFFF"/>
+                </a:solidFill>
+                <a:latin typeface="Bookman Old Style" pitchFamily="34" charset="0"/>
+                <a:ea typeface="Bookman Old Style" pitchFamily="34" charset="-122"/>
+                <a:cs typeface="Bookman Old Style" pitchFamily="34" charset="-120"/>
+              </a:rPr>
+              <a:t>BUILT BY OPERATORS.</a:t>
+            </a:r>
+            <a:endParaRPr lang="en-US" sz="2400" dirty="0"/>
+          </a:p>
+        </p:txBody>
+      </p:sp>
+      <p:sp>
+        <p:nvSpPr>
+          <p:cNvPr id="13" name="Text 11"/>
+          <p:cNvSpPr txBox="1"/>
+          <p:nvPr/>
+        </p:nvSpPr>
+        <p:spPr>
+          <a:xfrm>
+            <a:off x="777240" y="4315968"/>
+            <a:ext cx="8778240" cy="502920"/>
+          </a:xfrm>
+          <a:prstGeom prst="rect">
+            <a:avLst/>
+          </a:prstGeom>
+          <a:noFill/>
+          <a:ln/>
+        </p:spPr>
+        <p:txBody>
+          <a:bodyPr wrap="square" lIns="0" tIns="0" rIns="0" bIns="0" rtlCol="0" anchor="ctr"/>
+          <a:lstStyle/>
+          <a:p>
+            <a:pPr algn="l" indent="0" marL="0">
+              <a:buNone/>
+            </a:pPr>
+            <a:r>
+              <a:rPr lang="en-US" sz="1300" i="1" dirty="0">
+                <a:solidFill>
+                  <a:srgbClr val="D8D9DB"/>
                 </a:solidFill>
                 <a:latin typeface="Calibri" pitchFamily="34" charset="0"/>
                 <a:ea typeface="Calibri" pitchFamily="34" charset="-122"/>
@@ -1485,20 +1642,43 @@
               </a:rPr>
               <a:t>Federal law-enforcement and force-protection training experience, reinforced by current protective-force operations.</a:t>
             </a:r>
-            <a:endParaRPr lang="en-US" sz="1500" dirty="0"/>
-          </a:p>
-        </p:txBody>
-      </p:sp>
-      <p:sp>
-        <p:nvSpPr>
-          <p:cNvPr id="9" name="Text 7"/>
+            <a:endParaRPr lang="en-US" sz="1300" dirty="0"/>
+          </a:p>
+        </p:txBody>
+      </p:sp>
+      <p:sp>
+        <p:nvSpPr>
+          <p:cNvPr id="14" name="Shape 12"/>
+          <p:cNvSpPr/>
+          <p:nvPr/>
+        </p:nvSpPr>
+        <p:spPr>
+          <a:xfrm>
+            <a:off x="777240" y="5102352"/>
+            <a:ext cx="10607040" cy="0"/>
+          </a:xfrm>
+          <a:prstGeom prst="line">
+            <a:avLst/>
+          </a:prstGeom>
+          <a:noFill/>
+          <a:ln w="12700">
+            <a:solidFill>
+              <a:srgbClr val="1C1D21"/>
+            </a:solidFill>
+            <a:prstDash val="solid"/>
+          </a:ln>
+        </p:spPr>
+      </p:sp>
+      <p:sp>
+        <p:nvSpPr>
+          <p:cNvPr id="15" name="Text 13"/>
           <p:cNvSpPr txBox="1"/>
           <p:nvPr/>
         </p:nvSpPr>
         <p:spPr>
           <a:xfrm>
-            <a:off x="457200" y="5257800"/>
-            <a:ext cx="4572000" cy="274320"/>
+            <a:off x="777240" y="5285232"/>
+            <a:ext cx="4572000" cy="256032"/>
           </a:xfrm>
           <a:prstGeom prst="rect">
             <a:avLst/>
@@ -1514,7 +1694,7 @@
               <a:buNone/>
             </a:pPr>
             <a:r>
-              <a:rPr lang="en-US" sz="1000" b="1" spc="150" kern="0" dirty="0">
+              <a:rPr lang="en-US" sz="950" b="1" spc="150" kern="0" dirty="0">
                 <a:solidFill>
                   <a:srgbClr val="5B5F66"/>
                 </a:solidFill>
@@ -1524,19 +1704,19 @@
               </a:rPr>
               <a:t>SUBMITTED BY</a:t>
             </a:r>
-            <a:endParaRPr lang="en-US" sz="1000" dirty="0"/>
-          </a:p>
-        </p:txBody>
-      </p:sp>
-      <p:sp>
-        <p:nvSpPr>
-          <p:cNvPr id="10" name="Text 8"/>
+            <a:endParaRPr lang="en-US" sz="950" dirty="0"/>
+          </a:p>
+        </p:txBody>
+      </p:sp>
+      <p:sp>
+        <p:nvSpPr>
+          <p:cNvPr id="16" name="Text 14"/>
           <p:cNvSpPr txBox="1"/>
           <p:nvPr/>
         </p:nvSpPr>
         <p:spPr>
           <a:xfrm>
-            <a:off x="457200" y="5532120"/>
+            <a:off x="777240" y="5541264"/>
             <a:ext cx="6126480" cy="868680"/>
           </a:xfrm>
           <a:prstGeom prst="rect">
@@ -1556,7 +1736,7 @@
               <a:buNone/>
             </a:pPr>
             <a:r>
-              <a:rPr lang="en-US" sz="1200" b="1" dirty="0">
+              <a:rPr lang="en-US" sz="1100" b="1" dirty="0">
                 <a:solidFill>
                   <a:srgbClr val="F5F5F3"/>
                 </a:solidFill>
@@ -1566,7 +1746,7 @@
               </a:rPr>
               <a:t>Samuel Blair, Chief Executive Officer</a:t>
             </a:r>
-            <a:endParaRPr lang="en-US" sz="1200" dirty="0"/>
+            <a:endParaRPr lang="en-US" sz="1100" dirty="0"/>
           </a:p>
           <a:p>
             <a:pPr indent="0" marL="0">
@@ -1576,7 +1756,7 @@
               <a:buNone/>
             </a:pPr>
             <a:r>
-              <a:rPr lang="en-US" sz="1200" dirty="0">
+              <a:rPr lang="en-US" sz="1100" dirty="0">
                 <a:solidFill>
                   <a:srgbClr val="F5F5F3"/>
                 </a:solidFill>
@@ -1586,7 +1766,7 @@
               </a:rPr>
               <a:t>Valletta Industries, Inc.</a:t>
             </a:r>
-            <a:endParaRPr lang="en-US" sz="1200" dirty="0"/>
+            <a:endParaRPr lang="en-US" sz="1100" dirty="0"/>
           </a:p>
           <a:p>
             <a:pPr indent="0" marL="0">
@@ -1596,7 +1776,7 @@
               <a:buNone/>
             </a:pPr>
             <a:r>
-              <a:rPr lang="en-US" sz="1200" dirty="0">
+              <a:rPr lang="en-US" sz="1100" dirty="0">
                 <a:solidFill>
                   <a:srgbClr val="F5F5F3"/>
                 </a:solidFill>
@@ -1606,7 +1786,7 @@
               </a:rPr>
               <a:t>403 N Columbia Street, Suite 9, Covington, LA 70433</a:t>
             </a:r>
-            <a:endParaRPr lang="en-US" sz="1200" dirty="0"/>
+            <a:endParaRPr lang="en-US" sz="1100" dirty="0"/>
           </a:p>
           <a:p>
             <a:pPr indent="0" marL="0">
@@ -1616,7 +1796,7 @@
               <a:buNone/>
             </a:pPr>
             <a:r>
-              <a:rPr lang="en-US" sz="1200" dirty="0">
+              <a:rPr lang="en-US" sz="1100" dirty="0">
                 <a:solidFill>
                   <a:srgbClr val="F5F5F3"/>
                 </a:solidFill>
@@ -1626,20 +1806,20 @@
               </a:rPr>
               <a:t>(619) 873-5312  |  sam@vallettaindustries.com</a:t>
             </a:r>
-            <a:endParaRPr lang="en-US" sz="1200" dirty="0"/>
-          </a:p>
-        </p:txBody>
-      </p:sp>
-      <p:sp>
-        <p:nvSpPr>
-          <p:cNvPr id="11" name="Text 9"/>
+            <a:endParaRPr lang="en-US" sz="1100" dirty="0"/>
+          </a:p>
+        </p:txBody>
+      </p:sp>
+      <p:sp>
+        <p:nvSpPr>
+          <p:cNvPr id="17" name="Text 15"/>
           <p:cNvSpPr txBox="1"/>
           <p:nvPr/>
         </p:nvSpPr>
         <p:spPr>
           <a:xfrm>
-            <a:off x="7498080" y="5257800"/>
-            <a:ext cx="4206240" cy="274320"/>
+            <a:off x="7498080" y="5285232"/>
+            <a:ext cx="3886200" cy="256032"/>
           </a:xfrm>
           <a:prstGeom prst="rect">
             <a:avLst/>
@@ -1655,7 +1835,7 @@
               <a:buNone/>
             </a:pPr>
             <a:r>
-              <a:rPr lang="en-US" sz="1000" b="1" spc="150" kern="0" dirty="0">
+              <a:rPr lang="en-US" sz="950" b="1" spc="150" kern="0" dirty="0">
                 <a:solidFill>
                   <a:srgbClr val="5B5F66"/>
                 </a:solidFill>
@@ -1665,20 +1845,20 @@
               </a:rPr>
               <a:t>RFI RESPONSE DUE</a:t>
             </a:r>
-            <a:endParaRPr lang="en-US" sz="1000" dirty="0"/>
-          </a:p>
-        </p:txBody>
-      </p:sp>
-      <p:sp>
-        <p:nvSpPr>
-          <p:cNvPr id="12" name="Text 10"/>
+            <a:endParaRPr lang="en-US" sz="950" dirty="0"/>
+          </a:p>
+        </p:txBody>
+      </p:sp>
+      <p:sp>
+        <p:nvSpPr>
+          <p:cNvPr id="18" name="Text 16"/>
           <p:cNvSpPr txBox="1"/>
           <p:nvPr/>
         </p:nvSpPr>
         <p:spPr>
           <a:xfrm>
-            <a:off x="7498080" y="5532120"/>
-            <a:ext cx="4206240" cy="868680"/>
+            <a:off x="7498080" y="5541264"/>
+            <a:ext cx="4233672" cy="868680"/>
           </a:xfrm>
           <a:prstGeom prst="rect">
             <a:avLst/>
@@ -1697,7 +1877,7 @@
               <a:buNone/>
             </a:pPr>
             <a:r>
-              <a:rPr lang="en-US" sz="1100" b="1" dirty="0">
+              <a:rPr lang="en-US" sz="1050" b="1" dirty="0">
                 <a:solidFill>
                   <a:srgbClr val="F5F5F3"/>
                 </a:solidFill>
@@ -1707,7 +1887,7 @@
               </a:rPr>
               <a:t>01 September 2026, 12:00 PM ET</a:t>
             </a:r>
-            <a:endParaRPr lang="en-US" sz="1100" dirty="0"/>
+            <a:endParaRPr lang="en-US" sz="1050" dirty="0"/>
           </a:p>
           <a:p>
             <a:pPr algn="r" indent="0" marL="0">
@@ -1717,7 +1897,7 @@
               <a:buNone/>
             </a:pPr>
             <a:r>
-              <a:rPr lang="en-US" sz="1100" dirty="0">
+              <a:rPr lang="en-US" sz="1050" dirty="0">
                 <a:solidFill>
                   <a:srgbClr val="F5F5F3"/>
                 </a:solidFill>
@@ -1727,7 +1907,7 @@
               </a:rPr>
               <a:t>UEI CKXMD3HBP1P7  |  CAGE 92SX6</a:t>
             </a:r>
-            <a:endParaRPr lang="en-US" sz="1100" dirty="0"/>
+            <a:endParaRPr lang="en-US" sz="1050" dirty="0"/>
           </a:p>
           <a:p>
             <a:pPr algn="r" indent="0" marL="0">
@@ -1737,7 +1917,7 @@
               <a:buNone/>
             </a:pPr>
             <a:r>
-              <a:rPr lang="en-US" sz="1100" dirty="0">
+              <a:rPr lang="en-US" sz="1050" dirty="0">
                 <a:solidFill>
                   <a:srgbClr val="F5F5F3"/>
                 </a:solidFill>
@@ -1747,7 +1927,7 @@
               </a:rPr>
               <a:t>SDVOSB  |  VOSB  |  HUBZone  |  Small Business</a:t>
             </a:r>
-            <a:endParaRPr lang="en-US" sz="1100" dirty="0"/>
+            <a:endParaRPr lang="en-US" sz="1050" dirty="0"/>
           </a:p>
           <a:p>
             <a:pPr algn="r" indent="0" marL="0">
@@ -1757,7 +1937,7 @@
               <a:buNone/>
             </a:pPr>
             <a:r>
-              <a:rPr lang="en-US" sz="1100" dirty="0">
+              <a:rPr lang="en-US" sz="1050" dirty="0">
                 <a:solidFill>
                   <a:srgbClr val="F5F5F3"/>
                 </a:solidFill>
@@ -1767,7 +1947,7 @@
               </a:rPr>
               <a:t>GSA MAS GS-00F-204GA  |  SeaPort-NxG Prime</a:t>
             </a:r>
-            <a:endParaRPr lang="en-US" sz="1100" dirty="0"/>
+            <a:endParaRPr lang="en-US" sz="1050" dirty="0"/>
           </a:p>
         </p:txBody>
       </p:sp>
@@ -1811,8 +1991,8 @@
         </p:nvSpPr>
         <p:spPr>
           <a:xfrm>
-            <a:off x="457200" y="457200"/>
-            <a:ext cx="7315200" cy="320040"/>
+            <a:off x="6949440" y="0"/>
+            <a:ext cx="5486400" cy="6858000"/>
           </a:xfrm>
           <a:prstGeom prst="rect">
             <a:avLst/>
@@ -1821,21 +2001,178 @@
           <a:ln/>
         </p:spPr>
         <p:txBody>
+          <a:bodyPr wrap="square" lIns="0" tIns="0" rIns="0" bIns="0" rtlCol="0" anchor="t"/>
+          <a:lstStyle/>
+          <a:p>
+            <a:pPr algn="r" indent="0" marL="0">
+              <a:buNone/>
+            </a:pPr>
+            <a:r>
+              <a:rPr lang="en-US" sz="36000" b="1" dirty="0">
+                <a:solidFill>
+                  <a:srgbClr val="EBEBE9"/>
+                </a:solidFill>
+                <a:latin typeface="Bookman Old Style" pitchFamily="34" charset="0"/>
+                <a:ea typeface="Bookman Old Style" pitchFamily="34" charset="-122"/>
+                <a:cs typeface="Bookman Old Style" pitchFamily="34" charset="-120"/>
+              </a:rPr>
+              <a:t>02</a:t>
+            </a:r>
+            <a:endParaRPr lang="en-US" sz="36000" dirty="0"/>
+          </a:p>
+        </p:txBody>
+      </p:sp>
+      <p:sp>
+        <p:nvSpPr>
+          <p:cNvPr id="3" name="Shape 1"/>
+          <p:cNvSpPr/>
+          <p:nvPr/>
+        </p:nvSpPr>
+        <p:spPr>
+          <a:xfrm>
+            <a:off x="457200" y="384048"/>
+            <a:ext cx="310896" cy="29261"/>
+          </a:xfrm>
+          <a:prstGeom prst="rect">
+            <a:avLst/>
+          </a:prstGeom>
+          <a:solidFill>
+            <a:srgbClr val="FF002B"/>
+          </a:solidFill>
+          <a:ln/>
+        </p:spPr>
+      </p:sp>
+      <p:sp>
+        <p:nvSpPr>
+          <p:cNvPr id="4" name="Shape 2"/>
+          <p:cNvSpPr/>
+          <p:nvPr/>
+        </p:nvSpPr>
+        <p:spPr>
+          <a:xfrm>
+            <a:off x="457200" y="384048"/>
+            <a:ext cx="29261" cy="310896"/>
+          </a:xfrm>
+          <a:prstGeom prst="rect">
+            <a:avLst/>
+          </a:prstGeom>
+          <a:solidFill>
+            <a:srgbClr val="FF002B"/>
+          </a:solidFill>
+          <a:ln/>
+        </p:spPr>
+      </p:sp>
+      <p:sp>
+        <p:nvSpPr>
+          <p:cNvPr id="5" name="Text 3"/>
+          <p:cNvSpPr txBox="1"/>
+          <p:nvPr/>
+        </p:nvSpPr>
+        <p:spPr>
+          <a:xfrm>
+            <a:off x="896112" y="329184"/>
+            <a:ext cx="2926080" cy="292608"/>
+          </a:xfrm>
+          <a:prstGeom prst="rect">
+            <a:avLst/>
+          </a:prstGeom>
+          <a:noFill/>
+          <a:ln/>
+        </p:spPr>
+        <p:txBody>
           <a:bodyPr wrap="square" lIns="0" tIns="0" rIns="0" bIns="0" rtlCol="0" anchor="ctr"/>
           <a:lstStyle/>
           <a:p>
-            <a:pPr algn="l" indent="0" marL="0">
-              <a:buNone/>
-            </a:pPr>
-            <a:r>
-              <a:rPr lang="en-US" sz="1100" b="1" spc="150" kern="0" dirty="0">
-                <a:solidFill>
-                  <a:srgbClr val="FF002B"/>
+            <a:pPr indent="0" marL="0">
+              <a:buNone/>
+            </a:pPr>
+            <a:r>
+              <a:rPr lang="en-US" sz="1500" b="1" spc="200" kern="0" dirty="0">
+                <a:solidFill>
+                  <a:srgbClr val="0A0A0A"/>
                 </a:solidFill>
                 <a:latin typeface="Arial" pitchFamily="34" charset="0"/>
                 <a:ea typeface="Arial" pitchFamily="34" charset="-122"/>
                 <a:cs typeface="Arial" pitchFamily="34" charset="-120"/>
               </a:rPr>
+              <a:t>VALLETTA</a:t>
+            </a:r>
+            <a:endParaRPr lang="en-US" sz="1500" dirty="0"/>
+          </a:p>
+        </p:txBody>
+      </p:sp>
+      <p:sp>
+        <p:nvSpPr>
+          <p:cNvPr id="6" name="Text 4"/>
+          <p:cNvSpPr txBox="1"/>
+          <p:nvPr/>
+        </p:nvSpPr>
+        <p:spPr>
+          <a:xfrm>
+            <a:off x="896112" y="603504"/>
+            <a:ext cx="2926080" cy="219456"/>
+          </a:xfrm>
+          <a:prstGeom prst="rect">
+            <a:avLst/>
+          </a:prstGeom>
+          <a:noFill/>
+          <a:ln/>
+        </p:spPr>
+        <p:txBody>
+          <a:bodyPr wrap="square" lIns="0" tIns="0" rIns="0" bIns="0" rtlCol="0" anchor="ctr"/>
+          <a:lstStyle/>
+          <a:p>
+            <a:pPr indent="0" marL="0">
+              <a:buNone/>
+            </a:pPr>
+            <a:r>
+              <a:rPr lang="en-US" sz="750" b="1" spc="200" kern="0" dirty="0">
+                <a:solidFill>
+                  <a:srgbClr val="5B5F66"/>
+                </a:solidFill>
+                <a:latin typeface="Arial" pitchFamily="34" charset="0"/>
+                <a:ea typeface="Arial" pitchFamily="34" charset="-122"/>
+                <a:cs typeface="Arial" pitchFamily="34" charset="-120"/>
+              </a:rPr>
+              <a:t>INDUSTRIES, INC.</a:t>
+            </a:r>
+            <a:endParaRPr lang="en-US" sz="750" dirty="0"/>
+          </a:p>
+        </p:txBody>
+      </p:sp>
+      <p:sp>
+        <p:nvSpPr>
+          <p:cNvPr id="7" name="Text 5"/>
+          <p:cNvSpPr txBox="1"/>
+          <p:nvPr/>
+        </p:nvSpPr>
+        <p:spPr>
+          <a:xfrm>
+            <a:off x="457200" y="777240"/>
+            <a:ext cx="7315200" cy="320040"/>
+          </a:xfrm>
+          <a:prstGeom prst="rect">
+            <a:avLst/>
+          </a:prstGeom>
+          <a:noFill/>
+          <a:ln/>
+        </p:spPr>
+        <p:txBody>
+          <a:bodyPr wrap="square" lIns="0" tIns="0" rIns="0" bIns="0" rtlCol="0" anchor="ctr"/>
+          <a:lstStyle/>
+          <a:p>
+            <a:pPr algn="l" indent="0" marL="0">
+              <a:buNone/>
+            </a:pPr>
+            <a:r>
+              <a:rPr lang="en-US" sz="1100" b="1" spc="150" kern="0" dirty="0">
+                <a:solidFill>
+                  <a:srgbClr val="FF002B"/>
+                </a:solidFill>
+                <a:latin typeface="Arial" pitchFamily="34" charset="0"/>
+                <a:ea typeface="Arial" pitchFamily="34" charset="-122"/>
+                <a:cs typeface="Arial" pitchFamily="34" charset="-120"/>
+              </a:rPr>
               <a:t>RFI RESPONSE — SECTIONS 1–3</a:t>
             </a:r>
             <a:endParaRPr lang="en-US" sz="1100" dirty="0"/>
@@ -1844,14 +2181,14 @@
       </p:sp>
       <p:sp>
         <p:nvSpPr>
-          <p:cNvPr id="3" name="Text 1"/>
+          <p:cNvPr id="8" name="Text 6"/>
           <p:cNvSpPr txBox="1"/>
           <p:nvPr/>
         </p:nvSpPr>
         <p:spPr>
           <a:xfrm>
-            <a:off x="457200" y="777240"/>
-            <a:ext cx="11274552" cy="685800"/>
+            <a:off x="457200" y="1097280"/>
+            <a:ext cx="11274552" cy="731520"/>
           </a:xfrm>
           <a:prstGeom prst="rect">
             <a:avLst/>
@@ -1883,14 +2220,14 @@
       </p:sp>
       <p:sp>
         <p:nvSpPr>
-          <p:cNvPr id="4" name="Shape 2"/>
+          <p:cNvPr id="9" name="Shape 7"/>
           <p:cNvSpPr/>
           <p:nvPr/>
         </p:nvSpPr>
         <p:spPr>
           <a:xfrm>
-            <a:off x="457200" y="1691640"/>
-            <a:ext cx="3200400" cy="1371600"/>
+            <a:off x="457200" y="1965960"/>
+            <a:ext cx="3200400" cy="1280160"/>
           </a:xfrm>
           <a:prstGeom prst="rect">
             <a:avLst/>
@@ -1903,14 +2240,14 @@
       </p:sp>
       <p:sp>
         <p:nvSpPr>
-          <p:cNvPr id="5" name="Shape 3"/>
+          <p:cNvPr id="10" name="Shape 8"/>
           <p:cNvSpPr/>
           <p:nvPr/>
         </p:nvSpPr>
         <p:spPr>
           <a:xfrm>
-            <a:off x="457200" y="1691640"/>
-            <a:ext cx="274320" cy="25603"/>
+            <a:off x="457200" y="1965960"/>
+            <a:ext cx="274320" cy="29261"/>
           </a:xfrm>
           <a:prstGeom prst="rect">
             <a:avLst/>
@@ -1923,14 +2260,14 @@
       </p:sp>
       <p:sp>
         <p:nvSpPr>
-          <p:cNvPr id="6" name="Shape 4"/>
+          <p:cNvPr id="11" name="Shape 9"/>
           <p:cNvSpPr/>
           <p:nvPr/>
         </p:nvSpPr>
         <p:spPr>
           <a:xfrm>
-            <a:off x="457200" y="1691640"/>
-            <a:ext cx="25603" cy="274320"/>
+            <a:off x="457200" y="1965960"/>
+            <a:ext cx="29261" cy="274320"/>
           </a:xfrm>
           <a:prstGeom prst="rect">
             <a:avLst/>
@@ -1943,13 +2280,13 @@
       </p:sp>
       <p:sp>
         <p:nvSpPr>
-          <p:cNvPr id="7" name="Text 5"/>
+          <p:cNvPr id="12" name="Text 10"/>
           <p:cNvSpPr txBox="1"/>
           <p:nvPr/>
         </p:nvSpPr>
         <p:spPr>
           <a:xfrm>
-            <a:off x="685800" y="1856232"/>
+            <a:off x="685800" y="2112264"/>
             <a:ext cx="2743200" cy="274320"/>
           </a:xfrm>
           <a:prstGeom prst="rect">
@@ -1982,14 +2319,14 @@
       </p:sp>
       <p:sp>
         <p:nvSpPr>
-          <p:cNvPr id="8" name="Text 6"/>
+          <p:cNvPr id="13" name="Text 11"/>
           <p:cNvSpPr txBox="1"/>
           <p:nvPr/>
         </p:nvSpPr>
         <p:spPr>
           <a:xfrm>
-            <a:off x="685800" y="2130552"/>
-            <a:ext cx="2743200" cy="502920"/>
+            <a:off x="685800" y="2368296"/>
+            <a:ext cx="2743200" cy="475488"/>
           </a:xfrm>
           <a:prstGeom prst="rect">
             <a:avLst/>
@@ -2005,7 +2342,7 @@
               <a:buNone/>
             </a:pPr>
             <a:r>
-              <a:rPr lang="en-US" sz="2600" b="1" dirty="0">
+              <a:rPr lang="en-US" sz="2400" b="1" dirty="0">
                 <a:solidFill>
                   <a:srgbClr val="FFFFFF"/>
                 </a:solidFill>
@@ -2015,19 +2352,19 @@
               </a:rPr>
               <a:t>611430</a:t>
             </a:r>
-            <a:endParaRPr lang="en-US" sz="2600" dirty="0"/>
-          </a:p>
-        </p:txBody>
-      </p:sp>
-      <p:sp>
-        <p:nvSpPr>
-          <p:cNvPr id="9" name="Text 7"/>
+            <a:endParaRPr lang="en-US" sz="2400" dirty="0"/>
+          </a:p>
+        </p:txBody>
+      </p:sp>
+      <p:sp>
+        <p:nvSpPr>
+          <p:cNvPr id="14" name="Text 12"/>
           <p:cNvSpPr txBox="1"/>
           <p:nvPr/>
         </p:nvSpPr>
         <p:spPr>
           <a:xfrm>
-            <a:off x="685800" y="2624328"/>
+            <a:off x="685800" y="2843784"/>
             <a:ext cx="2743200" cy="365760"/>
           </a:xfrm>
           <a:prstGeom prst="rect">
@@ -2060,14 +2397,14 @@
       </p:sp>
       <p:sp>
         <p:nvSpPr>
-          <p:cNvPr id="10" name="Shape 8"/>
+          <p:cNvPr id="15" name="Shape 13"/>
           <p:cNvSpPr/>
           <p:nvPr/>
         </p:nvSpPr>
         <p:spPr>
           <a:xfrm>
-            <a:off x="3794760" y="1691640"/>
-            <a:ext cx="3200400" cy="1371600"/>
+            <a:off x="3794760" y="1965960"/>
+            <a:ext cx="3200400" cy="1280160"/>
           </a:xfrm>
           <a:prstGeom prst="rect">
             <a:avLst/>
@@ -2080,14 +2417,14 @@
       </p:sp>
       <p:sp>
         <p:nvSpPr>
-          <p:cNvPr id="11" name="Shape 9"/>
+          <p:cNvPr id="16" name="Shape 14"/>
           <p:cNvSpPr/>
           <p:nvPr/>
         </p:nvSpPr>
         <p:spPr>
           <a:xfrm>
-            <a:off x="3794760" y="1691640"/>
-            <a:ext cx="274320" cy="25603"/>
+            <a:off x="3794760" y="1965960"/>
+            <a:ext cx="274320" cy="29261"/>
           </a:xfrm>
           <a:prstGeom prst="rect">
             <a:avLst/>
@@ -2100,14 +2437,14 @@
       </p:sp>
       <p:sp>
         <p:nvSpPr>
-          <p:cNvPr id="12" name="Shape 10"/>
+          <p:cNvPr id="17" name="Shape 15"/>
           <p:cNvSpPr/>
           <p:nvPr/>
         </p:nvSpPr>
         <p:spPr>
           <a:xfrm>
-            <a:off x="3794760" y="1691640"/>
-            <a:ext cx="25603" cy="274320"/>
+            <a:off x="3794760" y="1965960"/>
+            <a:ext cx="29261" cy="274320"/>
           </a:xfrm>
           <a:prstGeom prst="rect">
             <a:avLst/>
@@ -2120,13 +2457,13 @@
       </p:sp>
       <p:sp>
         <p:nvSpPr>
-          <p:cNvPr id="13" name="Text 11"/>
+          <p:cNvPr id="18" name="Text 16"/>
           <p:cNvSpPr txBox="1"/>
           <p:nvPr/>
         </p:nvSpPr>
         <p:spPr>
           <a:xfrm>
-            <a:off x="4023360" y="1856232"/>
+            <a:off x="4023360" y="2112264"/>
             <a:ext cx="2743200" cy="274320"/>
           </a:xfrm>
           <a:prstGeom prst="rect">
@@ -2159,14 +2496,14 @@
       </p:sp>
       <p:sp>
         <p:nvSpPr>
-          <p:cNvPr id="14" name="Text 12"/>
+          <p:cNvPr id="19" name="Text 17"/>
           <p:cNvSpPr txBox="1"/>
           <p:nvPr/>
         </p:nvSpPr>
         <p:spPr>
           <a:xfrm>
-            <a:off x="4023360" y="2130552"/>
-            <a:ext cx="2743200" cy="502920"/>
+            <a:off x="4023360" y="2368296"/>
+            <a:ext cx="2743200" cy="475488"/>
           </a:xfrm>
           <a:prstGeom prst="rect">
             <a:avLst/>
@@ -2182,7 +2519,7 @@
               <a:buNone/>
             </a:pPr>
             <a:r>
-              <a:rPr lang="en-US" sz="2600" b="1" dirty="0">
+              <a:rPr lang="en-US" sz="2400" b="1" dirty="0">
                 <a:solidFill>
                   <a:srgbClr val="FFFFFF"/>
                 </a:solidFill>
@@ -2192,19 +2529,19 @@
               </a:rPr>
               <a:t>U008</a:t>
             </a:r>
-            <a:endParaRPr lang="en-US" sz="2600" dirty="0"/>
-          </a:p>
-        </p:txBody>
-      </p:sp>
-      <p:sp>
-        <p:nvSpPr>
-          <p:cNvPr id="15" name="Text 13"/>
+            <a:endParaRPr lang="en-US" sz="2400" dirty="0"/>
+          </a:p>
+        </p:txBody>
+      </p:sp>
+      <p:sp>
+        <p:nvSpPr>
+          <p:cNvPr id="20" name="Text 18"/>
           <p:cNvSpPr txBox="1"/>
           <p:nvPr/>
         </p:nvSpPr>
         <p:spPr>
           <a:xfrm>
-            <a:off x="4023360" y="2624328"/>
+            <a:off x="4023360" y="2843784"/>
             <a:ext cx="2743200" cy="365760"/>
           </a:xfrm>
           <a:prstGeom prst="rect">
@@ -2237,13 +2574,13 @@
       </p:sp>
       <p:sp>
         <p:nvSpPr>
-          <p:cNvPr id="16" name="Text 14"/>
+          <p:cNvPr id="21" name="Text 19"/>
           <p:cNvSpPr txBox="1"/>
           <p:nvPr/>
         </p:nvSpPr>
         <p:spPr>
           <a:xfrm>
-            <a:off x="7178040" y="1691640"/>
+            <a:off x="7178040" y="1965960"/>
             <a:ext cx="4553712" cy="274320"/>
           </a:xfrm>
           <a:prstGeom prst="rect">
@@ -2276,14 +2613,14 @@
       </p:sp>
       <p:sp>
         <p:nvSpPr>
-          <p:cNvPr id="17" name="Text 15"/>
+          <p:cNvPr id="22" name="Text 20"/>
           <p:cNvSpPr txBox="1"/>
           <p:nvPr/>
         </p:nvSpPr>
         <p:spPr>
           <a:xfrm>
-            <a:off x="7178040" y="2011680"/>
-            <a:ext cx="4553712" cy="1051560"/>
+            <a:off x="7178040" y="2276856"/>
+            <a:ext cx="4553712" cy="969264"/>
           </a:xfrm>
           <a:prstGeom prst="rect">
             <a:avLst/>
@@ -2300,13 +2637,13 @@
                 <a:spcPct val="115000"/>
               </a:lnSpc>
               <a:spcAft>
-                <a:spcPts val="800"/>
+                <a:spcPts val="700"/>
               </a:spcAft>
               <a:buSzPct val="100000"/>
               <a:buChar char="•"/>
             </a:pPr>
             <a:r>
-              <a:rPr lang="en-US" sz="1100" dirty="0">
+              <a:rPr lang="en-US" sz="1050" dirty="0">
                 <a:solidFill>
                   <a:srgbClr val="0A0A0A"/>
                 </a:solidFill>
@@ -2316,7 +2653,7 @@
               </a:rPr>
               <a:t>Matches the draft SOW's emphasis on original curriculum, instructor/student materials, and DOI instructor certification — not guard services.</a:t>
             </a:r>
-            <a:endParaRPr lang="en-US" sz="1100" dirty="0"/>
+            <a:endParaRPr lang="en-US" sz="1050" dirty="0"/>
           </a:p>
           <a:p>
             <a:pPr marL="342900" indent="-342900">
@@ -2324,13 +2661,13 @@
                 <a:spcPct val="115000"/>
               </a:lnSpc>
               <a:spcAft>
-                <a:spcPts val="800"/>
+                <a:spcPts val="700"/>
               </a:spcAft>
               <a:buSzPct val="100000"/>
               <a:buChar char="•"/>
             </a:pPr>
             <a:r>
-              <a:rPr lang="en-US" sz="1100" dirty="0">
+              <a:rPr lang="en-US" sz="1050" dirty="0">
                 <a:solidFill>
                   <a:srgbClr val="0A0A0A"/>
                 </a:solidFill>
@@ -2340,19 +2677,19 @@
               </a:rPr>
               <a:t>Valletta already holds GSA MAS SIN 611430 and 611430ST, providing an existing acquisition path.</a:t>
             </a:r>
-            <a:endParaRPr lang="en-US" sz="1100" dirty="0"/>
-          </a:p>
-        </p:txBody>
-      </p:sp>
-      <p:sp>
-        <p:nvSpPr>
-          <p:cNvPr id="18" name="Text 16"/>
+            <a:endParaRPr lang="en-US" sz="1050" dirty="0"/>
+          </a:p>
+        </p:txBody>
+      </p:sp>
+      <p:sp>
+        <p:nvSpPr>
+          <p:cNvPr id="23" name="Text 21"/>
           <p:cNvSpPr txBox="1"/>
           <p:nvPr/>
         </p:nvSpPr>
         <p:spPr>
           <a:xfrm>
-            <a:off x="457200" y="3310128"/>
+            <a:off x="457200" y="3383280"/>
             <a:ext cx="11274552" cy="274320"/>
           </a:xfrm>
           <a:prstGeom prst="rect">
@@ -2385,14 +2722,14 @@
       </p:sp>
       <p:sp>
         <p:nvSpPr>
-          <p:cNvPr id="19" name="Shape 17"/>
+          <p:cNvPr id="24" name="Shape 22"/>
           <p:cNvSpPr/>
           <p:nvPr/>
         </p:nvSpPr>
         <p:spPr>
           <a:xfrm>
-            <a:off x="457200" y="3675888"/>
-            <a:ext cx="2715768" cy="1188720"/>
+            <a:off x="457200" y="3703320"/>
+            <a:ext cx="2715768" cy="1097280"/>
           </a:xfrm>
           <a:prstGeom prst="rect">
             <a:avLst/>
@@ -2410,14 +2747,14 @@
       </p:sp>
       <p:sp>
         <p:nvSpPr>
-          <p:cNvPr id="20" name="Shape 18"/>
+          <p:cNvPr id="25" name="Shape 23"/>
           <p:cNvSpPr/>
           <p:nvPr/>
         </p:nvSpPr>
         <p:spPr>
           <a:xfrm>
-            <a:off x="621792" y="3822192"/>
-            <a:ext cx="365760" cy="365760"/>
+            <a:off x="621792" y="3840480"/>
+            <a:ext cx="347472" cy="347472"/>
           </a:xfrm>
           <a:prstGeom prst="ellipse">
             <a:avLst/>
@@ -2430,14 +2767,14 @@
       </p:sp>
       <p:sp>
         <p:nvSpPr>
-          <p:cNvPr id="21" name="Text 19"/>
+          <p:cNvPr id="26" name="Text 24"/>
           <p:cNvSpPr txBox="1"/>
           <p:nvPr/>
         </p:nvSpPr>
         <p:spPr>
           <a:xfrm>
-            <a:off x="621792" y="3822192"/>
-            <a:ext cx="365760" cy="365760"/>
+            <a:off x="621792" y="3840480"/>
+            <a:ext cx="347472" cy="347472"/>
           </a:xfrm>
           <a:prstGeom prst="rect">
             <a:avLst/>
@@ -2453,7 +2790,7 @@
               <a:buNone/>
             </a:pPr>
             <a:r>
-              <a:rPr lang="en-US" sz="1400" b="1" dirty="0">
+              <a:rPr lang="en-US" sz="1300" b="1" dirty="0">
                 <a:solidFill>
                   <a:srgbClr val="FFFFFF"/>
                 </a:solidFill>
@@ -2463,20 +2800,20 @@
               </a:rPr>
               <a:t>1</a:t>
             </a:r>
-            <a:endParaRPr lang="en-US" sz="1400" dirty="0"/>
-          </a:p>
-        </p:txBody>
-      </p:sp>
-      <p:sp>
-        <p:nvSpPr>
-          <p:cNvPr id="22" name="Text 20"/>
+            <a:endParaRPr lang="en-US" sz="1300" dirty="0"/>
+          </a:p>
+        </p:txBody>
+      </p:sp>
+      <p:sp>
+        <p:nvSpPr>
+          <p:cNvPr id="27" name="Text 25"/>
           <p:cNvSpPr txBox="1"/>
           <p:nvPr/>
         </p:nvSpPr>
         <p:spPr>
           <a:xfrm>
-            <a:off x="640080" y="4242816"/>
-            <a:ext cx="2350008" cy="530352"/>
+            <a:off x="640080" y="4233672"/>
+            <a:ext cx="2350008" cy="475488"/>
           </a:xfrm>
           <a:prstGeom prst="rect">
             <a:avLst/>
@@ -2490,12 +2827,12 @@
           <a:p>
             <a:pPr indent="0" marL="0">
               <a:lnSpc>
-                <a:spcPct val="105000"/>
+                <a:spcPct val="102000"/>
               </a:lnSpc>
               <a:buNone/>
             </a:pPr>
             <a:r>
-              <a:rPr lang="en-US" sz="1100" b="1" dirty="0">
+              <a:rPr lang="en-US" sz="1050" b="1" dirty="0">
                 <a:solidFill>
                   <a:srgbClr val="0A0A0A"/>
                 </a:solidFill>
@@ -2505,20 +2842,20 @@
               </a:rPr>
               <a:t>Training Needs Analysis</a:t>
             </a:r>
-            <a:endParaRPr lang="en-US" sz="1100" dirty="0"/>
-          </a:p>
-        </p:txBody>
-      </p:sp>
-      <p:sp>
-        <p:nvSpPr>
-          <p:cNvPr id="23" name="Shape 21"/>
+            <a:endParaRPr lang="en-US" sz="1050" dirty="0"/>
+          </a:p>
+        </p:txBody>
+      </p:sp>
+      <p:sp>
+        <p:nvSpPr>
+          <p:cNvPr id="28" name="Shape 26"/>
           <p:cNvSpPr/>
           <p:nvPr/>
         </p:nvSpPr>
         <p:spPr>
           <a:xfrm>
-            <a:off x="3310128" y="3675888"/>
-            <a:ext cx="2715768" cy="1188720"/>
+            <a:off x="3310128" y="3703320"/>
+            <a:ext cx="2715768" cy="1097280"/>
           </a:xfrm>
           <a:prstGeom prst="rect">
             <a:avLst/>
@@ -2536,14 +2873,14 @@
       </p:sp>
       <p:sp>
         <p:nvSpPr>
-          <p:cNvPr id="24" name="Shape 22"/>
+          <p:cNvPr id="29" name="Shape 27"/>
           <p:cNvSpPr/>
           <p:nvPr/>
         </p:nvSpPr>
         <p:spPr>
           <a:xfrm>
-            <a:off x="3474720" y="3822192"/>
-            <a:ext cx="365760" cy="365760"/>
+            <a:off x="3474720" y="3840480"/>
+            <a:ext cx="347472" cy="347472"/>
           </a:xfrm>
           <a:prstGeom prst="ellipse">
             <a:avLst/>
@@ -2556,14 +2893,14 @@
       </p:sp>
       <p:sp>
         <p:nvSpPr>
-          <p:cNvPr id="25" name="Text 23"/>
+          <p:cNvPr id="30" name="Text 28"/>
           <p:cNvSpPr txBox="1"/>
           <p:nvPr/>
         </p:nvSpPr>
         <p:spPr>
           <a:xfrm>
-            <a:off x="3474720" y="3822192"/>
-            <a:ext cx="365760" cy="365760"/>
+            <a:off x="3474720" y="3840480"/>
+            <a:ext cx="347472" cy="347472"/>
           </a:xfrm>
           <a:prstGeom prst="rect">
             <a:avLst/>
@@ -2579,7 +2916,7 @@
               <a:buNone/>
             </a:pPr>
             <a:r>
-              <a:rPr lang="en-US" sz="1400" b="1" dirty="0">
+              <a:rPr lang="en-US" sz="1300" b="1" dirty="0">
                 <a:solidFill>
                   <a:srgbClr val="FFFFFF"/>
                 </a:solidFill>
@@ -2589,20 +2926,20 @@
               </a:rPr>
               <a:t>2</a:t>
             </a:r>
-            <a:endParaRPr lang="en-US" sz="1400" dirty="0"/>
-          </a:p>
-        </p:txBody>
-      </p:sp>
-      <p:sp>
-        <p:nvSpPr>
-          <p:cNvPr id="26" name="Text 24"/>
+            <a:endParaRPr lang="en-US" sz="1300" dirty="0"/>
+          </a:p>
+        </p:txBody>
+      </p:sp>
+      <p:sp>
+        <p:nvSpPr>
+          <p:cNvPr id="31" name="Text 29"/>
           <p:cNvSpPr txBox="1"/>
           <p:nvPr/>
         </p:nvSpPr>
         <p:spPr>
           <a:xfrm>
-            <a:off x="3493008" y="4242816"/>
-            <a:ext cx="2350008" cy="530352"/>
+            <a:off x="3493008" y="4233672"/>
+            <a:ext cx="2350008" cy="475488"/>
           </a:xfrm>
           <a:prstGeom prst="rect">
             <a:avLst/>
@@ -2616,12 +2953,12 @@
           <a:p>
             <a:pPr indent="0" marL="0">
               <a:lnSpc>
-                <a:spcPct val="105000"/>
+                <a:spcPct val="102000"/>
               </a:lnSpc>
               <a:buNone/>
             </a:pPr>
             <a:r>
-              <a:rPr lang="en-US" sz="1100" b="1" dirty="0">
+              <a:rPr lang="en-US" sz="1050" b="1" dirty="0">
                 <a:solidFill>
                   <a:srgbClr val="0A0A0A"/>
                 </a:solidFill>
@@ -2631,20 +2968,20 @@
               </a:rPr>
               <a:t>Terminal &amp; Enabling Learning Objectives</a:t>
             </a:r>
-            <a:endParaRPr lang="en-US" sz="1100" dirty="0"/>
-          </a:p>
-        </p:txBody>
-      </p:sp>
-      <p:sp>
-        <p:nvSpPr>
-          <p:cNvPr id="27" name="Shape 25"/>
+            <a:endParaRPr lang="en-US" sz="1050" dirty="0"/>
+          </a:p>
+        </p:txBody>
+      </p:sp>
+      <p:sp>
+        <p:nvSpPr>
+          <p:cNvPr id="32" name="Shape 30"/>
           <p:cNvSpPr/>
           <p:nvPr/>
         </p:nvSpPr>
         <p:spPr>
           <a:xfrm>
-            <a:off x="6163056" y="3675888"/>
-            <a:ext cx="2715768" cy="1188720"/>
+            <a:off x="6163056" y="3703320"/>
+            <a:ext cx="2715768" cy="1097280"/>
           </a:xfrm>
           <a:prstGeom prst="rect">
             <a:avLst/>
@@ -2662,14 +2999,14 @@
       </p:sp>
       <p:sp>
         <p:nvSpPr>
-          <p:cNvPr id="28" name="Shape 26"/>
+          <p:cNvPr id="33" name="Shape 31"/>
           <p:cNvSpPr/>
           <p:nvPr/>
         </p:nvSpPr>
         <p:spPr>
           <a:xfrm>
-            <a:off x="6327648" y="3822192"/>
-            <a:ext cx="365760" cy="365760"/>
+            <a:off x="6327648" y="3840480"/>
+            <a:ext cx="347472" cy="347472"/>
           </a:xfrm>
           <a:prstGeom prst="ellipse">
             <a:avLst/>
@@ -2682,14 +3019,14 @@
       </p:sp>
       <p:sp>
         <p:nvSpPr>
-          <p:cNvPr id="29" name="Text 27"/>
+          <p:cNvPr id="34" name="Text 32"/>
           <p:cNvSpPr txBox="1"/>
           <p:nvPr/>
         </p:nvSpPr>
         <p:spPr>
           <a:xfrm>
-            <a:off x="6327648" y="3822192"/>
-            <a:ext cx="365760" cy="365760"/>
+            <a:off x="6327648" y="3840480"/>
+            <a:ext cx="347472" cy="347472"/>
           </a:xfrm>
           <a:prstGeom prst="rect">
             <a:avLst/>
@@ -2705,7 +3042,7 @@
               <a:buNone/>
             </a:pPr>
             <a:r>
-              <a:rPr lang="en-US" sz="1400" b="1" dirty="0">
+              <a:rPr lang="en-US" sz="1300" b="1" dirty="0">
                 <a:solidFill>
                   <a:srgbClr val="FFFFFF"/>
                 </a:solidFill>
@@ -2715,20 +3052,20 @@
               </a:rPr>
               <a:t>3</a:t>
             </a:r>
-            <a:endParaRPr lang="en-US" sz="1400" dirty="0"/>
-          </a:p>
-        </p:txBody>
-      </p:sp>
-      <p:sp>
-        <p:nvSpPr>
-          <p:cNvPr id="30" name="Text 28"/>
+            <a:endParaRPr lang="en-US" sz="1300" dirty="0"/>
+          </a:p>
+        </p:txBody>
+      </p:sp>
+      <p:sp>
+        <p:nvSpPr>
+          <p:cNvPr id="35" name="Text 33"/>
           <p:cNvSpPr txBox="1"/>
           <p:nvPr/>
         </p:nvSpPr>
         <p:spPr>
           <a:xfrm>
-            <a:off x="6345936" y="4242816"/>
-            <a:ext cx="2350008" cy="530352"/>
+            <a:off x="6345936" y="4233672"/>
+            <a:ext cx="2350008" cy="475488"/>
           </a:xfrm>
           <a:prstGeom prst="rect">
             <a:avLst/>
@@ -2742,12 +3079,12 @@
           <a:p>
             <a:pPr indent="0" marL="0">
               <a:lnSpc>
-                <a:spcPct val="105000"/>
+                <a:spcPct val="102000"/>
               </a:lnSpc>
               <a:buNone/>
             </a:pPr>
             <a:r>
-              <a:rPr lang="en-US" sz="1100" b="1" dirty="0">
+              <a:rPr lang="en-US" sz="1050" b="1" dirty="0">
                 <a:solidFill>
                   <a:srgbClr val="0A0A0A"/>
                 </a:solidFill>
@@ -2757,20 +3094,20 @@
               </a:rPr>
               <a:t>Curriculum &amp; Scenario Design</a:t>
             </a:r>
-            <a:endParaRPr lang="en-US" sz="1100" dirty="0"/>
-          </a:p>
-        </p:txBody>
-      </p:sp>
-      <p:sp>
-        <p:nvSpPr>
-          <p:cNvPr id="31" name="Shape 29"/>
+            <a:endParaRPr lang="en-US" sz="1050" dirty="0"/>
+          </a:p>
+        </p:txBody>
+      </p:sp>
+      <p:sp>
+        <p:nvSpPr>
+          <p:cNvPr id="36" name="Shape 34"/>
           <p:cNvSpPr/>
           <p:nvPr/>
         </p:nvSpPr>
         <p:spPr>
           <a:xfrm>
-            <a:off x="9015984" y="3675888"/>
-            <a:ext cx="2715768" cy="1188720"/>
+            <a:off x="9015984" y="3703320"/>
+            <a:ext cx="2715768" cy="1097280"/>
           </a:xfrm>
           <a:prstGeom prst="rect">
             <a:avLst/>
@@ -2788,14 +3125,14 @@
       </p:sp>
       <p:sp>
         <p:nvSpPr>
-          <p:cNvPr id="32" name="Shape 30"/>
+          <p:cNvPr id="37" name="Shape 35"/>
           <p:cNvSpPr/>
           <p:nvPr/>
         </p:nvSpPr>
         <p:spPr>
           <a:xfrm>
-            <a:off x="9180576" y="3822192"/>
-            <a:ext cx="365760" cy="365760"/>
+            <a:off x="9180576" y="3840480"/>
+            <a:ext cx="347472" cy="347472"/>
           </a:xfrm>
           <a:prstGeom prst="ellipse">
             <a:avLst/>
@@ -2808,14 +3145,14 @@
       </p:sp>
       <p:sp>
         <p:nvSpPr>
-          <p:cNvPr id="33" name="Text 31"/>
+          <p:cNvPr id="38" name="Text 36"/>
           <p:cNvSpPr txBox="1"/>
           <p:nvPr/>
         </p:nvSpPr>
         <p:spPr>
           <a:xfrm>
-            <a:off x="9180576" y="3822192"/>
-            <a:ext cx="365760" cy="365760"/>
+            <a:off x="9180576" y="3840480"/>
+            <a:ext cx="347472" cy="347472"/>
           </a:xfrm>
           <a:prstGeom prst="rect">
             <a:avLst/>
@@ -2831,7 +3168,7 @@
               <a:buNone/>
             </a:pPr>
             <a:r>
-              <a:rPr lang="en-US" sz="1400" b="1" dirty="0">
+              <a:rPr lang="en-US" sz="1300" b="1" dirty="0">
                 <a:solidFill>
                   <a:srgbClr val="FFFFFF"/>
                 </a:solidFill>
@@ -2841,20 +3178,20 @@
               </a:rPr>
               <a:t>4</a:t>
             </a:r>
-            <a:endParaRPr lang="en-US" sz="1400" dirty="0"/>
-          </a:p>
-        </p:txBody>
-      </p:sp>
-      <p:sp>
-        <p:nvSpPr>
-          <p:cNvPr id="34" name="Text 32"/>
+            <a:endParaRPr lang="en-US" sz="1300" dirty="0"/>
+          </a:p>
+        </p:txBody>
+      </p:sp>
+      <p:sp>
+        <p:nvSpPr>
+          <p:cNvPr id="39" name="Text 37"/>
           <p:cNvSpPr txBox="1"/>
           <p:nvPr/>
         </p:nvSpPr>
         <p:spPr>
           <a:xfrm>
-            <a:off x="9198864" y="4242816"/>
-            <a:ext cx="2350008" cy="530352"/>
+            <a:off x="9198864" y="4233672"/>
+            <a:ext cx="2350008" cy="475488"/>
           </a:xfrm>
           <a:prstGeom prst="rect">
             <a:avLst/>
@@ -2868,12 +3205,12 @@
           <a:p>
             <a:pPr indent="0" marL="0">
               <a:lnSpc>
-                <a:spcPct val="105000"/>
+                <a:spcPct val="102000"/>
               </a:lnSpc>
               <a:buNone/>
             </a:pPr>
             <a:r>
-              <a:rPr lang="en-US" sz="1100" b="1" dirty="0">
+              <a:rPr lang="en-US" sz="1050" b="1" dirty="0">
                 <a:solidFill>
                   <a:srgbClr val="0A0A0A"/>
                 </a:solidFill>
@@ -2883,20 +3220,20 @@
               </a:rPr>
               <a:t>Pilot / Validation</a:t>
             </a:r>
-            <a:endParaRPr lang="en-US" sz="1100" dirty="0"/>
-          </a:p>
-        </p:txBody>
-      </p:sp>
-      <p:sp>
-        <p:nvSpPr>
-          <p:cNvPr id="35" name="Shape 33"/>
+            <a:endParaRPr lang="en-US" sz="1050" dirty="0"/>
+          </a:p>
+        </p:txBody>
+      </p:sp>
+      <p:sp>
+        <p:nvSpPr>
+          <p:cNvPr id="40" name="Shape 38"/>
           <p:cNvSpPr/>
           <p:nvPr/>
         </p:nvSpPr>
         <p:spPr>
           <a:xfrm>
-            <a:off x="457200" y="5001768"/>
-            <a:ext cx="2715768" cy="1188720"/>
+            <a:off x="457200" y="4910328"/>
+            <a:ext cx="2715768" cy="1097280"/>
           </a:xfrm>
           <a:prstGeom prst="rect">
             <a:avLst/>
@@ -2914,14 +3251,14 @@
       </p:sp>
       <p:sp>
         <p:nvSpPr>
-          <p:cNvPr id="36" name="Shape 34"/>
+          <p:cNvPr id="41" name="Shape 39"/>
           <p:cNvSpPr/>
           <p:nvPr/>
         </p:nvSpPr>
         <p:spPr>
           <a:xfrm>
-            <a:off x="621792" y="5148072"/>
-            <a:ext cx="365760" cy="365760"/>
+            <a:off x="621792" y="5047488"/>
+            <a:ext cx="347472" cy="347472"/>
           </a:xfrm>
           <a:prstGeom prst="ellipse">
             <a:avLst/>
@@ -2934,14 +3271,14 @@
       </p:sp>
       <p:sp>
         <p:nvSpPr>
-          <p:cNvPr id="37" name="Text 35"/>
+          <p:cNvPr id="42" name="Text 40"/>
           <p:cNvSpPr txBox="1"/>
           <p:nvPr/>
         </p:nvSpPr>
         <p:spPr>
           <a:xfrm>
-            <a:off x="621792" y="5148072"/>
-            <a:ext cx="365760" cy="365760"/>
+            <a:off x="621792" y="5047488"/>
+            <a:ext cx="347472" cy="347472"/>
           </a:xfrm>
           <a:prstGeom prst="rect">
             <a:avLst/>
@@ -2957,7 +3294,7 @@
               <a:buNone/>
             </a:pPr>
             <a:r>
-              <a:rPr lang="en-US" sz="1400" b="1" dirty="0">
+              <a:rPr lang="en-US" sz="1300" b="1" dirty="0">
                 <a:solidFill>
                   <a:srgbClr val="FFFFFF"/>
                 </a:solidFill>
@@ -2967,20 +3304,20 @@
               </a:rPr>
               <a:t>5</a:t>
             </a:r>
-            <a:endParaRPr lang="en-US" sz="1400" dirty="0"/>
-          </a:p>
-        </p:txBody>
-      </p:sp>
-      <p:sp>
-        <p:nvSpPr>
-          <p:cNvPr id="38" name="Text 36"/>
+            <a:endParaRPr lang="en-US" sz="1300" dirty="0"/>
+          </a:p>
+        </p:txBody>
+      </p:sp>
+      <p:sp>
+        <p:nvSpPr>
+          <p:cNvPr id="43" name="Text 41"/>
           <p:cNvSpPr txBox="1"/>
           <p:nvPr/>
         </p:nvSpPr>
         <p:spPr>
           <a:xfrm>
-            <a:off x="640080" y="5568696"/>
-            <a:ext cx="2350008" cy="530352"/>
+            <a:off x="640080" y="5440680"/>
+            <a:ext cx="2350008" cy="475488"/>
           </a:xfrm>
           <a:prstGeom prst="rect">
             <a:avLst/>
@@ -2994,12 +3331,12 @@
           <a:p>
             <a:pPr indent="0" marL="0">
               <a:lnSpc>
-                <a:spcPct val="105000"/>
+                <a:spcPct val="102000"/>
               </a:lnSpc>
               <a:buNone/>
             </a:pPr>
             <a:r>
-              <a:rPr lang="en-US" sz="1100" b="1" dirty="0">
+              <a:rPr lang="en-US" sz="1050" b="1" dirty="0">
                 <a:solidFill>
                   <a:srgbClr val="0A0A0A"/>
                 </a:solidFill>
@@ -3009,20 +3346,20 @@
               </a:rPr>
               <a:t>Government Approval</a:t>
             </a:r>
-            <a:endParaRPr lang="en-US" sz="1100" dirty="0"/>
-          </a:p>
-        </p:txBody>
-      </p:sp>
-      <p:sp>
-        <p:nvSpPr>
-          <p:cNvPr id="39" name="Shape 37"/>
+            <a:endParaRPr lang="en-US" sz="1050" dirty="0"/>
+          </a:p>
+        </p:txBody>
+      </p:sp>
+      <p:sp>
+        <p:nvSpPr>
+          <p:cNvPr id="44" name="Shape 42"/>
           <p:cNvSpPr/>
           <p:nvPr/>
         </p:nvSpPr>
         <p:spPr>
           <a:xfrm>
-            <a:off x="3310128" y="5001768"/>
-            <a:ext cx="2715768" cy="1188720"/>
+            <a:off x="3310128" y="4910328"/>
+            <a:ext cx="2715768" cy="1097280"/>
           </a:xfrm>
           <a:prstGeom prst="rect">
             <a:avLst/>
@@ -3040,14 +3377,14 @@
       </p:sp>
       <p:sp>
         <p:nvSpPr>
-          <p:cNvPr id="40" name="Shape 38"/>
+          <p:cNvPr id="45" name="Shape 43"/>
           <p:cNvSpPr/>
           <p:nvPr/>
         </p:nvSpPr>
         <p:spPr>
           <a:xfrm>
-            <a:off x="3474720" y="5148072"/>
-            <a:ext cx="365760" cy="365760"/>
+            <a:off x="3474720" y="5047488"/>
+            <a:ext cx="347472" cy="347472"/>
           </a:xfrm>
           <a:prstGeom prst="ellipse">
             <a:avLst/>
@@ -3060,14 +3397,14 @@
       </p:sp>
       <p:sp>
         <p:nvSpPr>
-          <p:cNvPr id="41" name="Text 39"/>
+          <p:cNvPr id="46" name="Text 44"/>
           <p:cNvSpPr txBox="1"/>
           <p:nvPr/>
         </p:nvSpPr>
         <p:spPr>
           <a:xfrm>
-            <a:off x="3474720" y="5148072"/>
-            <a:ext cx="365760" cy="365760"/>
+            <a:off x="3474720" y="5047488"/>
+            <a:ext cx="347472" cy="347472"/>
           </a:xfrm>
           <a:prstGeom prst="rect">
             <a:avLst/>
@@ -3083,7 +3420,7 @@
               <a:buNone/>
             </a:pPr>
             <a:r>
-              <a:rPr lang="en-US" sz="1400" b="1" dirty="0">
+              <a:rPr lang="en-US" sz="1300" b="1" dirty="0">
                 <a:solidFill>
                   <a:srgbClr val="FFFFFF"/>
                 </a:solidFill>
@@ -3093,20 +3430,20 @@
               </a:rPr>
               <a:t>6</a:t>
             </a:r>
-            <a:endParaRPr lang="en-US" sz="1400" dirty="0"/>
-          </a:p>
-        </p:txBody>
-      </p:sp>
-      <p:sp>
-        <p:nvSpPr>
-          <p:cNvPr id="42" name="Text 40"/>
+            <a:endParaRPr lang="en-US" sz="1300" dirty="0"/>
+          </a:p>
+        </p:txBody>
+      </p:sp>
+      <p:sp>
+        <p:nvSpPr>
+          <p:cNvPr id="47" name="Text 45"/>
           <p:cNvSpPr txBox="1"/>
           <p:nvPr/>
         </p:nvSpPr>
         <p:spPr>
           <a:xfrm>
-            <a:off x="3493008" y="5568696"/>
-            <a:ext cx="2350008" cy="530352"/>
+            <a:off x="3493008" y="5440680"/>
+            <a:ext cx="2350008" cy="475488"/>
           </a:xfrm>
           <a:prstGeom prst="rect">
             <a:avLst/>
@@ -3120,12 +3457,12 @@
           <a:p>
             <a:pPr indent="0" marL="0">
               <a:lnSpc>
-                <a:spcPct val="105000"/>
+                <a:spcPct val="102000"/>
               </a:lnSpc>
               <a:buNone/>
             </a:pPr>
             <a:r>
-              <a:rPr lang="en-US" sz="1100" b="1" dirty="0">
+              <a:rPr lang="en-US" sz="1050" b="1" dirty="0">
                 <a:solidFill>
                   <a:srgbClr val="0A0A0A"/>
                 </a:solidFill>
@@ -3135,20 +3472,20 @@
               </a:rPr>
               <a:t>Instructor Certification</a:t>
             </a:r>
-            <a:endParaRPr lang="en-US" sz="1100" dirty="0"/>
-          </a:p>
-        </p:txBody>
-      </p:sp>
-      <p:sp>
-        <p:nvSpPr>
-          <p:cNvPr id="43" name="Shape 41"/>
+            <a:endParaRPr lang="en-US" sz="1050" dirty="0"/>
+          </a:p>
+        </p:txBody>
+      </p:sp>
+      <p:sp>
+        <p:nvSpPr>
+          <p:cNvPr id="48" name="Shape 46"/>
           <p:cNvSpPr/>
           <p:nvPr/>
         </p:nvSpPr>
         <p:spPr>
           <a:xfrm>
-            <a:off x="6163056" y="5001768"/>
-            <a:ext cx="2715768" cy="1188720"/>
+            <a:off x="6163056" y="4910328"/>
+            <a:ext cx="2715768" cy="1097280"/>
           </a:xfrm>
           <a:prstGeom prst="rect">
             <a:avLst/>
@@ -3166,14 +3503,14 @@
       </p:sp>
       <p:sp>
         <p:nvSpPr>
-          <p:cNvPr id="44" name="Shape 42"/>
+          <p:cNvPr id="49" name="Shape 47"/>
           <p:cNvSpPr/>
           <p:nvPr/>
         </p:nvSpPr>
         <p:spPr>
           <a:xfrm>
-            <a:off x="6327648" y="5148072"/>
-            <a:ext cx="365760" cy="365760"/>
+            <a:off x="6327648" y="5047488"/>
+            <a:ext cx="347472" cy="347472"/>
           </a:xfrm>
           <a:prstGeom prst="ellipse">
             <a:avLst/>
@@ -3186,14 +3523,14 @@
       </p:sp>
       <p:sp>
         <p:nvSpPr>
-          <p:cNvPr id="45" name="Text 43"/>
+          <p:cNvPr id="50" name="Text 48"/>
           <p:cNvSpPr txBox="1"/>
           <p:nvPr/>
         </p:nvSpPr>
         <p:spPr>
           <a:xfrm>
-            <a:off x="6327648" y="5148072"/>
-            <a:ext cx="365760" cy="365760"/>
+            <a:off x="6327648" y="5047488"/>
+            <a:ext cx="347472" cy="347472"/>
           </a:xfrm>
           <a:prstGeom prst="rect">
             <a:avLst/>
@@ -3209,7 +3546,7 @@
               <a:buNone/>
             </a:pPr>
             <a:r>
-              <a:rPr lang="en-US" sz="1400" b="1" dirty="0">
+              <a:rPr lang="en-US" sz="1300" b="1" dirty="0">
                 <a:solidFill>
                   <a:srgbClr val="FFFFFF"/>
                 </a:solidFill>
@@ -3219,20 +3556,20 @@
               </a:rPr>
               <a:t>7</a:t>
             </a:r>
-            <a:endParaRPr lang="en-US" sz="1400" dirty="0"/>
-          </a:p>
-        </p:txBody>
-      </p:sp>
-      <p:sp>
-        <p:nvSpPr>
-          <p:cNvPr id="46" name="Text 44"/>
+            <a:endParaRPr lang="en-US" sz="1300" dirty="0"/>
+          </a:p>
+        </p:txBody>
+      </p:sp>
+      <p:sp>
+        <p:nvSpPr>
+          <p:cNvPr id="51" name="Text 49"/>
           <p:cNvSpPr txBox="1"/>
           <p:nvPr/>
         </p:nvSpPr>
         <p:spPr>
           <a:xfrm>
-            <a:off x="6345936" y="5568696"/>
-            <a:ext cx="2350008" cy="530352"/>
+            <a:off x="6345936" y="5440680"/>
+            <a:ext cx="2350008" cy="475488"/>
           </a:xfrm>
           <a:prstGeom prst="rect">
             <a:avLst/>
@@ -3246,12 +3583,12 @@
           <a:p>
             <a:pPr indent="0" marL="0">
               <a:lnSpc>
-                <a:spcPct val="105000"/>
+                <a:spcPct val="102000"/>
               </a:lnSpc>
               <a:buNone/>
             </a:pPr>
             <a:r>
-              <a:rPr lang="en-US" sz="1100" b="1" dirty="0">
+              <a:rPr lang="en-US" sz="1050" b="1" dirty="0">
                 <a:solidFill>
                   <a:srgbClr val="0A0A0A"/>
                 </a:solidFill>
@@ -3261,20 +3598,20 @@
               </a:rPr>
               <a:t>Course Delivery</a:t>
             </a:r>
-            <a:endParaRPr lang="en-US" sz="1100" dirty="0"/>
-          </a:p>
-        </p:txBody>
-      </p:sp>
-      <p:sp>
-        <p:nvSpPr>
-          <p:cNvPr id="47" name="Shape 45"/>
+            <a:endParaRPr lang="en-US" sz="1050" dirty="0"/>
+          </a:p>
+        </p:txBody>
+      </p:sp>
+      <p:sp>
+        <p:nvSpPr>
+          <p:cNvPr id="52" name="Shape 50"/>
           <p:cNvSpPr/>
           <p:nvPr/>
         </p:nvSpPr>
         <p:spPr>
           <a:xfrm>
-            <a:off x="9015984" y="5001768"/>
-            <a:ext cx="2715768" cy="1188720"/>
+            <a:off x="9015984" y="4910328"/>
+            <a:ext cx="2715768" cy="1097280"/>
           </a:xfrm>
           <a:prstGeom prst="rect">
             <a:avLst/>
@@ -3292,14 +3629,14 @@
       </p:sp>
       <p:sp>
         <p:nvSpPr>
-          <p:cNvPr id="48" name="Shape 46"/>
+          <p:cNvPr id="53" name="Shape 51"/>
           <p:cNvSpPr/>
           <p:nvPr/>
         </p:nvSpPr>
         <p:spPr>
           <a:xfrm>
-            <a:off x="9180576" y="5148072"/>
-            <a:ext cx="365760" cy="365760"/>
+            <a:off x="9180576" y="5047488"/>
+            <a:ext cx="347472" cy="347472"/>
           </a:xfrm>
           <a:prstGeom prst="ellipse">
             <a:avLst/>
@@ -3312,14 +3649,14 @@
       </p:sp>
       <p:sp>
         <p:nvSpPr>
-          <p:cNvPr id="49" name="Text 47"/>
+          <p:cNvPr id="54" name="Text 52"/>
           <p:cNvSpPr txBox="1"/>
           <p:nvPr/>
         </p:nvSpPr>
         <p:spPr>
           <a:xfrm>
-            <a:off x="9180576" y="5148072"/>
-            <a:ext cx="365760" cy="365760"/>
+            <a:off x="9180576" y="5047488"/>
+            <a:ext cx="347472" cy="347472"/>
           </a:xfrm>
           <a:prstGeom prst="rect">
             <a:avLst/>
@@ -3335,7 +3672,7 @@
               <a:buNone/>
             </a:pPr>
             <a:r>
-              <a:rPr lang="en-US" sz="1400" b="1" dirty="0">
+              <a:rPr lang="en-US" sz="1300" b="1" dirty="0">
                 <a:solidFill>
                   <a:srgbClr val="FFFFFF"/>
                 </a:solidFill>
@@ -3345,20 +3682,20 @@
               </a:rPr>
               <a:t>8</a:t>
             </a:r>
-            <a:endParaRPr lang="en-US" sz="1400" dirty="0"/>
-          </a:p>
-        </p:txBody>
-      </p:sp>
-      <p:sp>
-        <p:nvSpPr>
-          <p:cNvPr id="50" name="Text 48"/>
+            <a:endParaRPr lang="en-US" sz="1300" dirty="0"/>
+          </a:p>
+        </p:txBody>
+      </p:sp>
+      <p:sp>
+        <p:nvSpPr>
+          <p:cNvPr id="55" name="Text 53"/>
           <p:cNvSpPr txBox="1"/>
           <p:nvPr/>
         </p:nvSpPr>
         <p:spPr>
           <a:xfrm>
-            <a:off x="9198864" y="5568696"/>
-            <a:ext cx="2350008" cy="530352"/>
+            <a:off x="9198864" y="5440680"/>
+            <a:ext cx="2350008" cy="475488"/>
           </a:xfrm>
           <a:prstGeom prst="rect">
             <a:avLst/>
@@ -3372,12 +3709,12 @@
           <a:p>
             <a:pPr indent="0" marL="0">
               <a:lnSpc>
-                <a:spcPct val="105000"/>
+                <a:spcPct val="102000"/>
               </a:lnSpc>
               <a:buNone/>
             </a:pPr>
             <a:r>
-              <a:rPr lang="en-US" sz="1100" b="1" dirty="0">
+              <a:rPr lang="en-US" sz="1050" b="1" dirty="0">
                 <a:solidFill>
                   <a:srgbClr val="0A0A0A"/>
                 </a:solidFill>
@@ -3387,19 +3724,19 @@
               </a:rPr>
               <a:t>After-Action Review &amp; Continuous Improvement</a:t>
             </a:r>
-            <a:endParaRPr lang="en-US" sz="1100" dirty="0"/>
-          </a:p>
-        </p:txBody>
-      </p:sp>
-      <p:sp>
-        <p:nvSpPr>
-          <p:cNvPr id="51" name="Text 49"/>
+            <a:endParaRPr lang="en-US" sz="1050" dirty="0"/>
+          </a:p>
+        </p:txBody>
+      </p:sp>
+      <p:sp>
+        <p:nvSpPr>
+          <p:cNvPr id="56" name="Text 54"/>
           <p:cNvSpPr/>
           <p:nvPr/>
         </p:nvSpPr>
         <p:spPr>
           <a:xfrm>
-            <a:off x="457200" y="6473952"/>
+            <a:off x="457200" y="6492240"/>
             <a:ext cx="11274552" cy="274320"/>
           </a:xfrm>
           <a:prstGeom prst="rect">
@@ -3470,8 +3807,8 @@
         </p:nvSpPr>
         <p:spPr>
           <a:xfrm>
-            <a:off x="457200" y="457200"/>
-            <a:ext cx="9144000" cy="320040"/>
+            <a:off x="6949440" y="0"/>
+            <a:ext cx="5486400" cy="6858000"/>
           </a:xfrm>
           <a:prstGeom prst="rect">
             <a:avLst/>
@@ -3480,21 +3817,178 @@
           <a:ln/>
         </p:spPr>
         <p:txBody>
+          <a:bodyPr wrap="square" lIns="0" tIns="0" rIns="0" bIns="0" rtlCol="0" anchor="t"/>
+          <a:lstStyle/>
+          <a:p>
+            <a:pPr algn="r" indent="0" marL="0">
+              <a:buNone/>
+            </a:pPr>
+            <a:r>
+              <a:rPr lang="en-US" sz="36000" b="1" dirty="0">
+                <a:solidFill>
+                  <a:srgbClr val="141414"/>
+                </a:solidFill>
+                <a:latin typeface="Bookman Old Style" pitchFamily="34" charset="0"/>
+                <a:ea typeface="Bookman Old Style" pitchFamily="34" charset="-122"/>
+                <a:cs typeface="Bookman Old Style" pitchFamily="34" charset="-120"/>
+              </a:rPr>
+              <a:t>03</a:t>
+            </a:r>
+            <a:endParaRPr lang="en-US" sz="36000" dirty="0"/>
+          </a:p>
+        </p:txBody>
+      </p:sp>
+      <p:sp>
+        <p:nvSpPr>
+          <p:cNvPr id="3" name="Shape 1"/>
+          <p:cNvSpPr/>
+          <p:nvPr/>
+        </p:nvSpPr>
+        <p:spPr>
+          <a:xfrm>
+            <a:off x="457200" y="384048"/>
+            <a:ext cx="310896" cy="29261"/>
+          </a:xfrm>
+          <a:prstGeom prst="rect">
+            <a:avLst/>
+          </a:prstGeom>
+          <a:solidFill>
+            <a:srgbClr val="FF002B"/>
+          </a:solidFill>
+          <a:ln/>
+        </p:spPr>
+      </p:sp>
+      <p:sp>
+        <p:nvSpPr>
+          <p:cNvPr id="4" name="Shape 2"/>
+          <p:cNvSpPr/>
+          <p:nvPr/>
+        </p:nvSpPr>
+        <p:spPr>
+          <a:xfrm>
+            <a:off x="457200" y="384048"/>
+            <a:ext cx="29261" cy="310896"/>
+          </a:xfrm>
+          <a:prstGeom prst="rect">
+            <a:avLst/>
+          </a:prstGeom>
+          <a:solidFill>
+            <a:srgbClr val="FF002B"/>
+          </a:solidFill>
+          <a:ln/>
+        </p:spPr>
+      </p:sp>
+      <p:sp>
+        <p:nvSpPr>
+          <p:cNvPr id="5" name="Text 3"/>
+          <p:cNvSpPr txBox="1"/>
+          <p:nvPr/>
+        </p:nvSpPr>
+        <p:spPr>
+          <a:xfrm>
+            <a:off x="896112" y="329184"/>
+            <a:ext cx="2926080" cy="292608"/>
+          </a:xfrm>
+          <a:prstGeom prst="rect">
+            <a:avLst/>
+          </a:prstGeom>
+          <a:noFill/>
+          <a:ln/>
+        </p:spPr>
+        <p:txBody>
           <a:bodyPr wrap="square" lIns="0" tIns="0" rIns="0" bIns="0" rtlCol="0" anchor="ctr"/>
           <a:lstStyle/>
           <a:p>
-            <a:pPr algn="l" indent="0" marL="0">
-              <a:buNone/>
-            </a:pPr>
-            <a:r>
-              <a:rPr lang="en-US" sz="1100" b="1" spc="150" kern="0" dirty="0">
-                <a:solidFill>
-                  <a:srgbClr val="FF002B"/>
+            <a:pPr indent="0" marL="0">
+              <a:buNone/>
+            </a:pPr>
+            <a:r>
+              <a:rPr lang="en-US" sz="1500" b="1" spc="200" kern="0" dirty="0">
+                <a:solidFill>
+                  <a:srgbClr val="FFFFFF"/>
                 </a:solidFill>
                 <a:latin typeface="Arial" pitchFamily="34" charset="0"/>
                 <a:ea typeface="Arial" pitchFamily="34" charset="-122"/>
                 <a:cs typeface="Arial" pitchFamily="34" charset="-120"/>
               </a:rPr>
+              <a:t>VALLETTA</a:t>
+            </a:r>
+            <a:endParaRPr lang="en-US" sz="1500" dirty="0"/>
+          </a:p>
+        </p:txBody>
+      </p:sp>
+      <p:sp>
+        <p:nvSpPr>
+          <p:cNvPr id="6" name="Text 4"/>
+          <p:cNvSpPr txBox="1"/>
+          <p:nvPr/>
+        </p:nvSpPr>
+        <p:spPr>
+          <a:xfrm>
+            <a:off x="896112" y="603504"/>
+            <a:ext cx="2926080" cy="219456"/>
+          </a:xfrm>
+          <a:prstGeom prst="rect">
+            <a:avLst/>
+          </a:prstGeom>
+          <a:noFill/>
+          <a:ln/>
+        </p:spPr>
+        <p:txBody>
+          <a:bodyPr wrap="square" lIns="0" tIns="0" rIns="0" bIns="0" rtlCol="0" anchor="ctr"/>
+          <a:lstStyle/>
+          <a:p>
+            <a:pPr indent="0" marL="0">
+              <a:buNone/>
+            </a:pPr>
+            <a:r>
+              <a:rPr lang="en-US" sz="750" b="1" spc="200" kern="0" dirty="0">
+                <a:solidFill>
+                  <a:srgbClr val="5B5F66"/>
+                </a:solidFill>
+                <a:latin typeface="Arial" pitchFamily="34" charset="0"/>
+                <a:ea typeface="Arial" pitchFamily="34" charset="-122"/>
+                <a:cs typeface="Arial" pitchFamily="34" charset="-120"/>
+              </a:rPr>
+              <a:t>INDUSTRIES, INC.</a:t>
+            </a:r>
+            <a:endParaRPr lang="en-US" sz="750" dirty="0"/>
+          </a:p>
+        </p:txBody>
+      </p:sp>
+      <p:sp>
+        <p:nvSpPr>
+          <p:cNvPr id="7" name="Text 5"/>
+          <p:cNvSpPr txBox="1"/>
+          <p:nvPr/>
+        </p:nvSpPr>
+        <p:spPr>
+          <a:xfrm>
+            <a:off x="457200" y="777240"/>
+            <a:ext cx="9144000" cy="320040"/>
+          </a:xfrm>
+          <a:prstGeom prst="rect">
+            <a:avLst/>
+          </a:prstGeom>
+          <a:noFill/>
+          <a:ln/>
+        </p:spPr>
+        <p:txBody>
+          <a:bodyPr wrap="square" lIns="0" tIns="0" rIns="0" bIns="0" rtlCol="0" anchor="ctr"/>
+          <a:lstStyle/>
+          <a:p>
+            <a:pPr algn="l" indent="0" marL="0">
+              <a:buNone/>
+            </a:pPr>
+            <a:r>
+              <a:rPr lang="en-US" sz="1100" b="1" spc="150" kern="0" dirty="0">
+                <a:solidFill>
+                  <a:srgbClr val="FF002B"/>
+                </a:solidFill>
+                <a:latin typeface="Arial" pitchFamily="34" charset="0"/>
+                <a:ea typeface="Arial" pitchFamily="34" charset="-122"/>
+                <a:cs typeface="Arial" pitchFamily="34" charset="-120"/>
+              </a:rPr>
               <a:t>SECTIONS 3.2 &amp; 6 — REPRESENTATIVE EXPERIENCE</a:t>
             </a:r>
             <a:endParaRPr lang="en-US" sz="1100" dirty="0"/>
@@ -3503,13 +3997,13 @@
       </p:sp>
       <p:sp>
         <p:nvSpPr>
-          <p:cNvPr id="3" name="Text 1"/>
+          <p:cNvPr id="8" name="Text 6"/>
           <p:cNvSpPr txBox="1"/>
           <p:nvPr/>
         </p:nvSpPr>
         <p:spPr>
           <a:xfrm>
-            <a:off x="457200" y="777240"/>
+            <a:off x="457200" y="1097280"/>
             <a:ext cx="11274552" cy="685800"/>
           </a:xfrm>
           <a:prstGeom prst="rect">
@@ -3526,7 +4020,7 @@
               <a:buNone/>
             </a:pPr>
             <a:r>
-              <a:rPr lang="en-US" sz="2600" b="1" dirty="0">
+              <a:rPr lang="en-US" sz="2400" b="1" dirty="0">
                 <a:solidFill>
                   <a:srgbClr val="FFFFFF"/>
                 </a:solidFill>
@@ -3536,20 +4030,20 @@
               </a:rPr>
               <a:t>Federal Law-Enforcement &amp; Force-Protection Training Track Record</a:t>
             </a:r>
-            <a:endParaRPr lang="en-US" sz="2600" dirty="0"/>
-          </a:p>
-        </p:txBody>
-      </p:sp>
-      <p:sp>
-        <p:nvSpPr>
-          <p:cNvPr id="4" name="Shape 2"/>
+            <a:endParaRPr lang="en-US" sz="2400" dirty="0"/>
+          </a:p>
+        </p:txBody>
+      </p:sp>
+      <p:sp>
+        <p:nvSpPr>
+          <p:cNvPr id="9" name="Shape 7"/>
           <p:cNvSpPr/>
           <p:nvPr/>
         </p:nvSpPr>
         <p:spPr>
           <a:xfrm>
-            <a:off x="457200" y="1691640"/>
-            <a:ext cx="274320" cy="25603"/>
+            <a:off x="457200" y="1965960"/>
+            <a:ext cx="274320" cy="29261"/>
           </a:xfrm>
           <a:prstGeom prst="rect">
             <a:avLst/>
@@ -3562,14 +4056,14 @@
       </p:sp>
       <p:sp>
         <p:nvSpPr>
-          <p:cNvPr id="5" name="Shape 3"/>
+          <p:cNvPr id="10" name="Shape 8"/>
           <p:cNvSpPr/>
           <p:nvPr/>
         </p:nvSpPr>
         <p:spPr>
           <a:xfrm>
-            <a:off x="457200" y="1691640"/>
-            <a:ext cx="25603" cy="274320"/>
+            <a:off x="457200" y="1965960"/>
+            <a:ext cx="29261" cy="274320"/>
           </a:xfrm>
           <a:prstGeom prst="rect">
             <a:avLst/>
@@ -3582,14 +4076,14 @@
       </p:sp>
       <p:sp>
         <p:nvSpPr>
-          <p:cNvPr id="6" name="Text 4"/>
+          <p:cNvPr id="11" name="Text 9"/>
           <p:cNvSpPr txBox="1"/>
           <p:nvPr/>
         </p:nvSpPr>
         <p:spPr>
           <a:xfrm>
-            <a:off x="457200" y="1856232"/>
-            <a:ext cx="2681478" cy="685800"/>
+            <a:off x="457200" y="2112264"/>
+            <a:ext cx="2681478" cy="640080"/>
           </a:xfrm>
           <a:prstGeom prst="rect">
             <a:avLst/>
@@ -3605,7 +4099,7 @@
               <a:buNone/>
             </a:pPr>
             <a:r>
-              <a:rPr lang="en-US" sz="2200" b="1" dirty="0">
+              <a:rPr lang="en-US" sz="2000" b="1" dirty="0">
                 <a:solidFill>
                   <a:srgbClr val="FF002B"/>
                 </a:solidFill>
@@ -3615,20 +4109,20 @@
               </a:rPr>
               <a:t>$3.4M+</a:t>
             </a:r>
-            <a:endParaRPr lang="en-US" sz="2200" dirty="0"/>
-          </a:p>
-        </p:txBody>
-      </p:sp>
-      <p:sp>
-        <p:nvSpPr>
-          <p:cNvPr id="7" name="Text 5"/>
+            <a:endParaRPr lang="en-US" sz="2000" dirty="0"/>
+          </a:p>
+        </p:txBody>
+      </p:sp>
+      <p:sp>
+        <p:nvSpPr>
+          <p:cNvPr id="12" name="Text 10"/>
           <p:cNvSpPr txBox="1"/>
           <p:nvPr/>
         </p:nvSpPr>
         <p:spPr>
           <a:xfrm>
-            <a:off x="457200" y="2560320"/>
-            <a:ext cx="2544318" cy="502920"/>
+            <a:off x="457200" y="2770632"/>
+            <a:ext cx="2544318" cy="457200"/>
           </a:xfrm>
           <a:prstGeom prst="rect">
             <a:avLst/>
@@ -3647,7 +4141,7 @@
               <a:buNone/>
             </a:pPr>
             <a:r>
-              <a:rPr lang="en-US" sz="1000" dirty="0">
+              <a:rPr lang="en-US" sz="950" dirty="0">
                 <a:solidFill>
                   <a:srgbClr val="D8D9DB"/>
                 </a:solidFill>
@@ -3657,20 +4151,20 @@
               </a:rPr>
               <a:t>Combined value across the relevant contracts shown below</a:t>
             </a:r>
-            <a:endParaRPr lang="en-US" sz="1000" dirty="0"/>
-          </a:p>
-        </p:txBody>
-      </p:sp>
-      <p:sp>
-        <p:nvSpPr>
-          <p:cNvPr id="8" name="Shape 6"/>
+            <a:endParaRPr lang="en-US" sz="950" dirty="0"/>
+          </a:p>
+        </p:txBody>
+      </p:sp>
+      <p:sp>
+        <p:nvSpPr>
+          <p:cNvPr id="13" name="Shape 11"/>
           <p:cNvSpPr/>
           <p:nvPr/>
         </p:nvSpPr>
         <p:spPr>
           <a:xfrm>
-            <a:off x="3321558" y="1691640"/>
-            <a:ext cx="274320" cy="25603"/>
+            <a:off x="3321558" y="1965960"/>
+            <a:ext cx="274320" cy="29261"/>
           </a:xfrm>
           <a:prstGeom prst="rect">
             <a:avLst/>
@@ -3683,14 +4177,14 @@
       </p:sp>
       <p:sp>
         <p:nvSpPr>
-          <p:cNvPr id="9" name="Shape 7"/>
+          <p:cNvPr id="14" name="Shape 12"/>
           <p:cNvSpPr/>
           <p:nvPr/>
         </p:nvSpPr>
         <p:spPr>
           <a:xfrm>
-            <a:off x="3321558" y="1691640"/>
-            <a:ext cx="25603" cy="274320"/>
+            <a:off x="3321558" y="1965960"/>
+            <a:ext cx="29261" cy="274320"/>
           </a:xfrm>
           <a:prstGeom prst="rect">
             <a:avLst/>
@@ -3703,14 +4197,14 @@
       </p:sp>
       <p:sp>
         <p:nvSpPr>
-          <p:cNvPr id="10" name="Text 8"/>
+          <p:cNvPr id="15" name="Text 13"/>
           <p:cNvSpPr txBox="1"/>
           <p:nvPr/>
         </p:nvSpPr>
         <p:spPr>
           <a:xfrm>
-            <a:off x="3321558" y="1856232"/>
-            <a:ext cx="2681478" cy="685800"/>
+            <a:off x="3321558" y="2112264"/>
+            <a:ext cx="2681478" cy="640080"/>
           </a:xfrm>
           <a:prstGeom prst="rect">
             <a:avLst/>
@@ -3726,7 +4220,7 @@
               <a:buNone/>
             </a:pPr>
             <a:r>
-              <a:rPr lang="en-US" sz="3400" b="1" dirty="0">
+              <a:rPr lang="en-US" sz="3200" b="1" dirty="0">
                 <a:solidFill>
                   <a:srgbClr val="FFFFFF"/>
                 </a:solidFill>
@@ -3736,20 +4230,20 @@
               </a:rPr>
               <a:t>674</a:t>
             </a:r>
-            <a:endParaRPr lang="en-US" sz="3400" dirty="0"/>
-          </a:p>
-        </p:txBody>
-      </p:sp>
-      <p:sp>
-        <p:nvSpPr>
-          <p:cNvPr id="11" name="Text 9"/>
+            <a:endParaRPr lang="en-US" sz="3200" dirty="0"/>
+          </a:p>
+        </p:txBody>
+      </p:sp>
+      <p:sp>
+        <p:nvSpPr>
+          <p:cNvPr id="16" name="Text 14"/>
           <p:cNvSpPr txBox="1"/>
           <p:nvPr/>
         </p:nvSpPr>
         <p:spPr>
           <a:xfrm>
-            <a:off x="3321558" y="2560320"/>
-            <a:ext cx="2544318" cy="502920"/>
+            <a:off x="3321558" y="2770632"/>
+            <a:ext cx="2544318" cy="457200"/>
           </a:xfrm>
           <a:prstGeom prst="rect">
             <a:avLst/>
@@ -3768,7 +4262,7 @@
               <a:buNone/>
             </a:pPr>
             <a:r>
-              <a:rPr lang="en-US" sz="1000" dirty="0">
+              <a:rPr lang="en-US" sz="950" dirty="0">
                 <a:solidFill>
                   <a:srgbClr val="D8D9DB"/>
                 </a:solidFill>
@@ -3778,20 +4272,20 @@
               </a:rPr>
               <a:t>Personnel trained — NAVSEA Norfolk &amp; Puget Sound, 2023–2026</a:t>
             </a:r>
-            <a:endParaRPr lang="en-US" sz="1000" dirty="0"/>
-          </a:p>
-        </p:txBody>
-      </p:sp>
-      <p:sp>
-        <p:nvSpPr>
-          <p:cNvPr id="12" name="Shape 10"/>
+            <a:endParaRPr lang="en-US" sz="950" dirty="0"/>
+          </a:p>
+        </p:txBody>
+      </p:sp>
+      <p:sp>
+        <p:nvSpPr>
+          <p:cNvPr id="17" name="Shape 15"/>
           <p:cNvSpPr/>
           <p:nvPr/>
         </p:nvSpPr>
         <p:spPr>
           <a:xfrm>
-            <a:off x="6185916" y="1691640"/>
-            <a:ext cx="274320" cy="25603"/>
+            <a:off x="6185916" y="1965960"/>
+            <a:ext cx="274320" cy="29261"/>
           </a:xfrm>
           <a:prstGeom prst="rect">
             <a:avLst/>
@@ -3804,14 +4298,14 @@
       </p:sp>
       <p:sp>
         <p:nvSpPr>
-          <p:cNvPr id="13" name="Shape 11"/>
+          <p:cNvPr id="18" name="Shape 16"/>
           <p:cNvSpPr/>
           <p:nvPr/>
         </p:nvSpPr>
         <p:spPr>
           <a:xfrm>
-            <a:off x="6185916" y="1691640"/>
-            <a:ext cx="25603" cy="274320"/>
+            <a:off x="6185916" y="1965960"/>
+            <a:ext cx="29261" cy="274320"/>
           </a:xfrm>
           <a:prstGeom prst="rect">
             <a:avLst/>
@@ -3824,14 +4318,14 @@
       </p:sp>
       <p:sp>
         <p:nvSpPr>
-          <p:cNvPr id="14" name="Text 12"/>
+          <p:cNvPr id="19" name="Text 17"/>
           <p:cNvSpPr txBox="1"/>
           <p:nvPr/>
         </p:nvSpPr>
         <p:spPr>
           <a:xfrm>
-            <a:off x="6185916" y="1856232"/>
-            <a:ext cx="2681478" cy="685800"/>
+            <a:off x="6185916" y="2112264"/>
+            <a:ext cx="2681478" cy="640080"/>
           </a:xfrm>
           <a:prstGeom prst="rect">
             <a:avLst/>
@@ -3847,7 +4341,7 @@
               <a:buNone/>
             </a:pPr>
             <a:r>
-              <a:rPr lang="en-US" sz="3400" b="1" dirty="0">
+              <a:rPr lang="en-US" sz="3200" b="1" dirty="0">
                 <a:solidFill>
                   <a:srgbClr val="FFFFFF"/>
                 </a:solidFill>
@@ -3857,20 +4351,20 @@
               </a:rPr>
               <a:t>6</a:t>
             </a:r>
-            <a:endParaRPr lang="en-US" sz="3400" dirty="0"/>
-          </a:p>
-        </p:txBody>
-      </p:sp>
-      <p:sp>
-        <p:nvSpPr>
-          <p:cNvPr id="15" name="Text 13"/>
+            <a:endParaRPr lang="en-US" sz="3200" dirty="0"/>
+          </a:p>
+        </p:txBody>
+      </p:sp>
+      <p:sp>
+        <p:nvSpPr>
+          <p:cNvPr id="20" name="Text 18"/>
           <p:cNvSpPr txBox="1"/>
           <p:nvPr/>
         </p:nvSpPr>
         <p:spPr>
           <a:xfrm>
-            <a:off x="6185916" y="2560320"/>
-            <a:ext cx="2544318" cy="502920"/>
+            <a:off x="6185916" y="2770632"/>
+            <a:ext cx="2544318" cy="457200"/>
           </a:xfrm>
           <a:prstGeom prst="rect">
             <a:avLst/>
@@ -3889,7 +4383,7 @@
               <a:buNone/>
             </a:pPr>
             <a:r>
-              <a:rPr lang="en-US" sz="1000" dirty="0">
+              <a:rPr lang="en-US" sz="950" dirty="0">
                 <a:solidFill>
                   <a:srgbClr val="D8D9DB"/>
                 </a:solidFill>
@@ -3899,20 +4393,20 @@
               </a:rPr>
               <a:t>Federal customers: DIA, FBI, MSC, U.S. Navy, HHS, USDA</a:t>
             </a:r>
-            <a:endParaRPr lang="en-US" sz="1000" dirty="0"/>
-          </a:p>
-        </p:txBody>
-      </p:sp>
-      <p:sp>
-        <p:nvSpPr>
-          <p:cNvPr id="16" name="Shape 14"/>
+            <a:endParaRPr lang="en-US" sz="950" dirty="0"/>
+          </a:p>
+        </p:txBody>
+      </p:sp>
+      <p:sp>
+        <p:nvSpPr>
+          <p:cNvPr id="21" name="Shape 19"/>
           <p:cNvSpPr/>
           <p:nvPr/>
         </p:nvSpPr>
         <p:spPr>
           <a:xfrm>
-            <a:off x="9050274" y="1691640"/>
-            <a:ext cx="274320" cy="25603"/>
+            <a:off x="9050274" y="1965960"/>
+            <a:ext cx="274320" cy="29261"/>
           </a:xfrm>
           <a:prstGeom prst="rect">
             <a:avLst/>
@@ -3925,14 +4419,14 @@
       </p:sp>
       <p:sp>
         <p:nvSpPr>
-          <p:cNvPr id="17" name="Shape 15"/>
+          <p:cNvPr id="22" name="Shape 20"/>
           <p:cNvSpPr/>
           <p:nvPr/>
         </p:nvSpPr>
         <p:spPr>
           <a:xfrm>
-            <a:off x="9050274" y="1691640"/>
-            <a:ext cx="25603" cy="274320"/>
+            <a:off x="9050274" y="1965960"/>
+            <a:ext cx="29261" cy="274320"/>
           </a:xfrm>
           <a:prstGeom prst="rect">
             <a:avLst/>
@@ -3945,14 +4439,14 @@
       </p:sp>
       <p:sp>
         <p:nvSpPr>
-          <p:cNvPr id="18" name="Text 16"/>
+          <p:cNvPr id="23" name="Text 21"/>
           <p:cNvSpPr txBox="1"/>
           <p:nvPr/>
         </p:nvSpPr>
         <p:spPr>
           <a:xfrm>
-            <a:off x="9050274" y="1856232"/>
-            <a:ext cx="2681478" cy="685800"/>
+            <a:off x="9050274" y="2112264"/>
+            <a:ext cx="2681478" cy="640080"/>
           </a:xfrm>
           <a:prstGeom prst="rect">
             <a:avLst/>
@@ -3968,7 +4462,7 @@
               <a:buNone/>
             </a:pPr>
             <a:r>
-              <a:rPr lang="en-US" sz="2200" b="1" dirty="0">
+              <a:rPr lang="en-US" sz="2000" b="1" dirty="0">
                 <a:solidFill>
                   <a:srgbClr val="FFFFFF"/>
                 </a:solidFill>
@@ -3978,14 +4472,14 @@
               </a:rPr>
               <a:t>CONUS /</a:t>
             </a:r>
-            <a:endParaRPr lang="en-US" sz="2200" dirty="0"/>
+            <a:endParaRPr lang="en-US" sz="2000" dirty="0"/>
           </a:p>
           <a:p>
             <a:pPr indent="0" marL="0">
               <a:buNone/>
             </a:pPr>
             <a:r>
-              <a:rPr lang="en-US" sz="2200" b="1" dirty="0">
+              <a:rPr lang="en-US" sz="2000" b="1" dirty="0">
                 <a:solidFill>
                   <a:srgbClr val="FFFFFF"/>
                 </a:solidFill>
@@ -3995,20 +4489,20 @@
               </a:rPr>
               <a:t>OCONUS</a:t>
             </a:r>
-            <a:endParaRPr lang="en-US" sz="2200" dirty="0"/>
-          </a:p>
-        </p:txBody>
-      </p:sp>
-      <p:sp>
-        <p:nvSpPr>
-          <p:cNvPr id="19" name="Text 17"/>
+            <a:endParaRPr lang="en-US" sz="2000" dirty="0"/>
+          </a:p>
+        </p:txBody>
+      </p:sp>
+      <p:sp>
+        <p:nvSpPr>
+          <p:cNvPr id="24" name="Text 22"/>
           <p:cNvSpPr txBox="1"/>
           <p:nvPr/>
         </p:nvSpPr>
         <p:spPr>
           <a:xfrm>
-            <a:off x="9050274" y="2560320"/>
-            <a:ext cx="2544318" cy="502920"/>
+            <a:off x="9050274" y="2770632"/>
+            <a:ext cx="2544318" cy="457200"/>
           </a:xfrm>
           <a:prstGeom prst="rect">
             <a:avLst/>
@@ -4027,7 +4521,7 @@
               <a:buNone/>
             </a:pPr>
             <a:r>
-              <a:rPr lang="en-US" sz="1000" dirty="0">
+              <a:rPr lang="en-US" sz="950" dirty="0">
                 <a:solidFill>
                   <a:srgbClr val="D8D9DB"/>
                 </a:solidFill>
@@ -4037,7 +4531,7 @@
               </a:rPr>
               <a:t>Mobile training-team delivery with instructor redundancy</a:t>
             </a:r>
-            <a:endParaRPr lang="en-US" sz="1000" dirty="0"/>
+            <a:endParaRPr lang="en-US" sz="950" dirty="0"/>
           </a:p>
         </p:txBody>
       </p:sp>
@@ -4056,8 +4550,8 @@
           </p:nvPr>
         </p:nvGraphicFramePr>
         <p:xfrm>
-          <a:off x="457200" y="3520440"/>
-          <a:ext cx="11274552" cy="2697480"/>
+          <a:off x="457200" y="3383280"/>
+          <a:ext cx="11274552" cy="2926080"/>
         </p:xfrm>
         <a:graphic>
           <a:graphicData uri="http://schemas.openxmlformats.org/drawingml/2006/table">
@@ -4068,7 +4562,7 @@
                 <a:gridCol w="3291840"/>
                 <a:gridCol w="5605272"/>
               </a:tblGrid>
-              <a:tr h="385354">
+              <a:tr h="418011">
                 <a:tc>
                   <a:txBody>
                     <a:bodyPr/>
@@ -4253,7 +4747,7 @@
                   </a:tcPr>
                 </a:tc>
               </a:tr>
-              <a:tr h="385354">
+              <a:tr h="418011">
                 <a:tc>
                   <a:txBody>
                     <a:bodyPr/>
@@ -4438,7 +4932,7 @@
                   </a:tcPr>
                 </a:tc>
               </a:tr>
-              <a:tr h="385354">
+              <a:tr h="418011">
                 <a:tc>
                   <a:txBody>
                     <a:bodyPr/>
@@ -4623,7 +5117,7 @@
                   </a:tcPr>
                 </a:tc>
               </a:tr>
-              <a:tr h="385354">
+              <a:tr h="418011">
                 <a:tc>
                   <a:txBody>
                     <a:bodyPr/>
@@ -4808,7 +5302,7 @@
                   </a:tcPr>
                 </a:tc>
               </a:tr>
-              <a:tr h="385354">
+              <a:tr h="418011">
                 <a:tc>
                   <a:txBody>
                     <a:bodyPr/>
@@ -4993,7 +5487,7 @@
                   </a:tcPr>
                 </a:tc>
               </a:tr>
-              <a:tr h="385354">
+              <a:tr h="418011">
                 <a:tc>
                   <a:txBody>
                     <a:bodyPr/>
@@ -5178,7 +5672,7 @@
                   </a:tcPr>
                 </a:tc>
               </a:tr>
-              <a:tr h="385354">
+              <a:tr h="418011">
                 <a:tc>
                   <a:txBody>
                     <a:bodyPr/>
@@ -5407,8 +5901,8 @@
         </p:nvSpPr>
         <p:spPr>
           <a:xfrm>
-            <a:off x="457200" y="457200"/>
-            <a:ext cx="9144000" cy="320040"/>
+            <a:off x="6949440" y="0"/>
+            <a:ext cx="5486400" cy="6858000"/>
           </a:xfrm>
           <a:prstGeom prst="rect">
             <a:avLst/>
@@ -5417,21 +5911,178 @@
           <a:ln/>
         </p:spPr>
         <p:txBody>
+          <a:bodyPr wrap="square" lIns="0" tIns="0" rIns="0" bIns="0" rtlCol="0" anchor="t"/>
+          <a:lstStyle/>
+          <a:p>
+            <a:pPr algn="r" indent="0" marL="0">
+              <a:buNone/>
+            </a:pPr>
+            <a:r>
+              <a:rPr lang="en-US" sz="36000" b="1" dirty="0">
+                <a:solidFill>
+                  <a:srgbClr val="EBEBE9"/>
+                </a:solidFill>
+                <a:latin typeface="Bookman Old Style" pitchFamily="34" charset="0"/>
+                <a:ea typeface="Bookman Old Style" pitchFamily="34" charset="-122"/>
+                <a:cs typeface="Bookman Old Style" pitchFamily="34" charset="-120"/>
+              </a:rPr>
+              <a:t>04</a:t>
+            </a:r>
+            <a:endParaRPr lang="en-US" sz="36000" dirty="0"/>
+          </a:p>
+        </p:txBody>
+      </p:sp>
+      <p:sp>
+        <p:nvSpPr>
+          <p:cNvPr id="3" name="Shape 1"/>
+          <p:cNvSpPr/>
+          <p:nvPr/>
+        </p:nvSpPr>
+        <p:spPr>
+          <a:xfrm>
+            <a:off x="457200" y="384048"/>
+            <a:ext cx="310896" cy="29261"/>
+          </a:xfrm>
+          <a:prstGeom prst="rect">
+            <a:avLst/>
+          </a:prstGeom>
+          <a:solidFill>
+            <a:srgbClr val="FF002B"/>
+          </a:solidFill>
+          <a:ln/>
+        </p:spPr>
+      </p:sp>
+      <p:sp>
+        <p:nvSpPr>
+          <p:cNvPr id="4" name="Shape 2"/>
+          <p:cNvSpPr/>
+          <p:nvPr/>
+        </p:nvSpPr>
+        <p:spPr>
+          <a:xfrm>
+            <a:off x="457200" y="384048"/>
+            <a:ext cx="29261" cy="310896"/>
+          </a:xfrm>
+          <a:prstGeom prst="rect">
+            <a:avLst/>
+          </a:prstGeom>
+          <a:solidFill>
+            <a:srgbClr val="FF002B"/>
+          </a:solidFill>
+          <a:ln/>
+        </p:spPr>
+      </p:sp>
+      <p:sp>
+        <p:nvSpPr>
+          <p:cNvPr id="5" name="Text 3"/>
+          <p:cNvSpPr txBox="1"/>
+          <p:nvPr/>
+        </p:nvSpPr>
+        <p:spPr>
+          <a:xfrm>
+            <a:off x="896112" y="329184"/>
+            <a:ext cx="2926080" cy="292608"/>
+          </a:xfrm>
+          <a:prstGeom prst="rect">
+            <a:avLst/>
+          </a:prstGeom>
+          <a:noFill/>
+          <a:ln/>
+        </p:spPr>
+        <p:txBody>
           <a:bodyPr wrap="square" lIns="0" tIns="0" rIns="0" bIns="0" rtlCol="0" anchor="ctr"/>
           <a:lstStyle/>
           <a:p>
-            <a:pPr algn="l" indent="0" marL="0">
-              <a:buNone/>
-            </a:pPr>
-            <a:r>
-              <a:rPr lang="en-US" sz="1100" b="1" spc="150" kern="0" dirty="0">
-                <a:solidFill>
-                  <a:srgbClr val="FF002B"/>
+            <a:pPr indent="0" marL="0">
+              <a:buNone/>
+            </a:pPr>
+            <a:r>
+              <a:rPr lang="en-US" sz="1500" b="1" spc="200" kern="0" dirty="0">
+                <a:solidFill>
+                  <a:srgbClr val="0A0A0A"/>
                 </a:solidFill>
                 <a:latin typeface="Arial" pitchFamily="34" charset="0"/>
                 <a:ea typeface="Arial" pitchFamily="34" charset="-122"/>
                 <a:cs typeface="Arial" pitchFamily="34" charset="-120"/>
               </a:rPr>
+              <a:t>VALLETTA</a:t>
+            </a:r>
+            <a:endParaRPr lang="en-US" sz="1500" dirty="0"/>
+          </a:p>
+        </p:txBody>
+      </p:sp>
+      <p:sp>
+        <p:nvSpPr>
+          <p:cNvPr id="6" name="Text 4"/>
+          <p:cNvSpPr txBox="1"/>
+          <p:nvPr/>
+        </p:nvSpPr>
+        <p:spPr>
+          <a:xfrm>
+            <a:off x="896112" y="603504"/>
+            <a:ext cx="2926080" cy="219456"/>
+          </a:xfrm>
+          <a:prstGeom prst="rect">
+            <a:avLst/>
+          </a:prstGeom>
+          <a:noFill/>
+          <a:ln/>
+        </p:spPr>
+        <p:txBody>
+          <a:bodyPr wrap="square" lIns="0" tIns="0" rIns="0" bIns="0" rtlCol="0" anchor="ctr"/>
+          <a:lstStyle/>
+          <a:p>
+            <a:pPr indent="0" marL="0">
+              <a:buNone/>
+            </a:pPr>
+            <a:r>
+              <a:rPr lang="en-US" sz="750" b="1" spc="200" kern="0" dirty="0">
+                <a:solidFill>
+                  <a:srgbClr val="5B5F66"/>
+                </a:solidFill>
+                <a:latin typeface="Arial" pitchFamily="34" charset="0"/>
+                <a:ea typeface="Arial" pitchFamily="34" charset="-122"/>
+                <a:cs typeface="Arial" pitchFamily="34" charset="-120"/>
+              </a:rPr>
+              <a:t>INDUSTRIES, INC.</a:t>
+            </a:r>
+            <a:endParaRPr lang="en-US" sz="750" dirty="0"/>
+          </a:p>
+        </p:txBody>
+      </p:sp>
+      <p:sp>
+        <p:nvSpPr>
+          <p:cNvPr id="7" name="Text 5"/>
+          <p:cNvSpPr txBox="1"/>
+          <p:nvPr/>
+        </p:nvSpPr>
+        <p:spPr>
+          <a:xfrm>
+            <a:off x="457200" y="777240"/>
+            <a:ext cx="9144000" cy="320040"/>
+          </a:xfrm>
+          <a:prstGeom prst="rect">
+            <a:avLst/>
+          </a:prstGeom>
+          <a:noFill/>
+          <a:ln/>
+        </p:spPr>
+        <p:txBody>
+          <a:bodyPr wrap="square" lIns="0" tIns="0" rIns="0" bIns="0" rtlCol="0" anchor="ctr"/>
+          <a:lstStyle/>
+          <a:p>
+            <a:pPr algn="l" indent="0" marL="0">
+              <a:buNone/>
+            </a:pPr>
+            <a:r>
+              <a:rPr lang="en-US" sz="1100" b="1" spc="150" kern="0" dirty="0">
+                <a:solidFill>
+                  <a:srgbClr val="FF002B"/>
+                </a:solidFill>
+                <a:latin typeface="Arial" pitchFamily="34" charset="0"/>
+                <a:ea typeface="Arial" pitchFamily="34" charset="-122"/>
+                <a:cs typeface="Arial" pitchFamily="34" charset="-120"/>
+              </a:rPr>
               <a:t>SECTION 7 — RECOMMENDATIONS</a:t>
             </a:r>
             <a:endParaRPr lang="en-US" sz="1100" dirty="0"/>
@@ -5440,13 +6091,13 @@
       </p:sp>
       <p:sp>
         <p:nvSpPr>
-          <p:cNvPr id="3" name="Text 1"/>
+          <p:cNvPr id="8" name="Text 6"/>
           <p:cNvSpPr txBox="1"/>
           <p:nvPr/>
         </p:nvSpPr>
         <p:spPr>
           <a:xfrm>
-            <a:off x="457200" y="777240"/>
+            <a:off x="457200" y="1097280"/>
             <a:ext cx="11274552" cy="777240"/>
           </a:xfrm>
           <a:prstGeom prst="rect">
@@ -5466,7 +6117,7 @@
               <a:buNone/>
             </a:pPr>
             <a:r>
-              <a:rPr lang="en-US" sz="2500" b="1" dirty="0">
+              <a:rPr lang="en-US" sz="2300" b="1" dirty="0">
                 <a:solidFill>
                   <a:srgbClr val="0A0A0A"/>
                 </a:solidFill>
@@ -5476,7 +6127,7 @@
               </a:rPr>
               <a:t>Refinements That Deliver a Durable Training System — Not a One-Time Course</a:t>
             </a:r>
-            <a:endParaRPr lang="en-US" sz="2500" dirty="0"/>
+            <a:endParaRPr lang="en-US" sz="2300" dirty="0"/>
           </a:p>
         </p:txBody>
       </p:sp>
@@ -5495,8 +6146,8 @@
           </p:nvPr>
         </p:nvGraphicFramePr>
         <p:xfrm>
-          <a:off x="457200" y="1737360"/>
-          <a:ext cx="11274552" cy="4617720"/>
+          <a:off x="457200" y="2011680"/>
+          <a:ext cx="11274552" cy="4343400"/>
         </p:xfrm>
         <a:graphic>
           <a:graphicData uri="http://schemas.openxmlformats.org/drawingml/2006/table">
@@ -5506,7 +6157,7 @@
                 <a:gridCol w="4023360"/>
                 <a:gridCol w="7251192"/>
               </a:tblGrid>
-              <a:tr h="659674">
+              <a:tr h="620486">
                 <a:tc>
                   <a:txBody>
                     <a:bodyPr/>
@@ -5526,7 +6177,7 @@
                       <a:endParaRPr lang="en-US" sz="1100" dirty="0"/>
                     </a:p>
                   </a:txBody>
-                  <a:tcPr marL="127000" marR="127000" marT="76200" marB="76200">
+                  <a:tcPr marL="127000" marR="127000" marT="63500" marB="63500">
                     <a:lnL w="6350" cap="flat" cmpd="sng" algn="ctr">
                       <a:solidFill>
                         <a:srgbClr val="D8D9DB"/>
@@ -5587,7 +6238,7 @@
                       <a:endParaRPr lang="en-US" sz="1100" dirty="0"/>
                     </a:p>
                   </a:txBody>
-                  <a:tcPr marL="127000" marR="127000" marT="76200" marB="76200">
+                  <a:tcPr marL="127000" marR="127000" marT="63500" marB="63500">
                     <a:lnL w="6350" cap="flat" cmpd="sng" algn="ctr">
                       <a:solidFill>
                         <a:srgbClr val="D8D9DB"/>
@@ -5630,7 +6281,7 @@
                   </a:tcPr>
                 </a:tc>
               </a:tr>
-              <a:tr h="659674">
+              <a:tr h="620486">
                 <a:tc>
                   <a:txBody>
                     <a:bodyPr/>
@@ -5640,17 +6291,17 @@
                         <a:buNone/>
                       </a:pPr>
                       <a:r>
-                        <a:rPr lang="en-US" sz="1100" b="1" dirty="0">
+                        <a:rPr lang="en-US" sz="1050" b="1" dirty="0">
                           <a:solidFill>
                             <a:srgbClr val="0A0A0A"/>
                           </a:solidFill>
                         </a:rPr>
                         <a:t>Define a formal curriculum-development lifecycle</a:t>
                       </a:r>
-                      <a:endParaRPr lang="en-US" sz="1100" dirty="0"/>
+                      <a:endParaRPr lang="en-US" sz="1050" dirty="0"/>
                     </a:p>
                   </a:txBody>
-                  <a:tcPr marL="127000" marR="127000" marT="76200" marB="76200" anchor="ctr">
+                  <a:tcPr marL="127000" marR="127000" marT="63500" marB="63500" anchor="ctr">
                     <a:lnL w="6350" cap="flat" cmpd="sng" algn="ctr">
                       <a:solidFill>
                         <a:srgbClr val="D8D9DB"/>
@@ -5701,17 +6352,17 @@
                         <a:buNone/>
                       </a:pPr>
                       <a:r>
-                        <a:rPr lang="en-US" sz="1100" dirty="0">
+                        <a:rPr lang="en-US" sz="1050" dirty="0">
                           <a:solidFill>
                             <a:srgbClr val="5B5F66"/>
                           </a:solidFill>
                         </a:rPr>
                         <a:t>A repeatable, auditable process from Training Needs Analysis through pilot/validation, Government approval, delivery, AAR, and revision.</a:t>
                       </a:r>
-                      <a:endParaRPr lang="en-US" sz="1100" dirty="0"/>
+                      <a:endParaRPr lang="en-US" sz="1050" dirty="0"/>
                     </a:p>
                   </a:txBody>
-                  <a:tcPr marL="127000" marR="127000" marT="76200" marB="76200" anchor="ctr">
+                  <a:tcPr marL="127000" marR="127000" marT="63500" marB="63500" anchor="ctr">
                     <a:lnL w="6350" cap="flat" cmpd="sng" algn="ctr">
                       <a:solidFill>
                         <a:srgbClr val="D8D9DB"/>
@@ -5754,7 +6405,7 @@
                   </a:tcPr>
                 </a:tc>
               </a:tr>
-              <a:tr h="659674">
+              <a:tr h="620486">
                 <a:tc>
                   <a:txBody>
                     <a:bodyPr/>
@@ -5764,17 +6415,17 @@
                         <a:buNone/>
                       </a:pPr>
                       <a:r>
-                        <a:rPr lang="en-US" sz="1100" b="1" dirty="0">
+                        <a:rPr lang="en-US" sz="1050" b="1" dirty="0">
                           <a:solidFill>
                             <a:srgbClr val="0A0A0A"/>
                           </a:solidFill>
                         </a:rPr>
                         <a:t>Define instructor qualification standards</a:t>
                       </a:r>
-                      <a:endParaRPr lang="en-US" sz="1100" dirty="0"/>
+                      <a:endParaRPr lang="en-US" sz="1050" dirty="0"/>
                     </a:p>
                   </a:txBody>
-                  <a:tcPr marL="127000" marR="127000" marT="76200" marB="76200" anchor="ctr">
+                  <a:tcPr marL="127000" marR="127000" marT="63500" marB="63500" anchor="ctr">
                     <a:lnL w="6350" cap="flat" cmpd="sng" algn="ctr">
                       <a:solidFill>
                         <a:srgbClr val="D8D9DB"/>
@@ -5825,17 +6476,17 @@
                         <a:buNone/>
                       </a:pPr>
                       <a:r>
-                        <a:rPr lang="en-US" sz="1100" dirty="0">
+                        <a:rPr lang="en-US" sz="1050" dirty="0">
                           <a:solidFill>
                             <a:srgbClr val="5B5F66"/>
                           </a:solidFill>
                         </a:rPr>
                         <a:t>Demonstrated law-enforcement, military, tactical, use-of-force, or firearms experience matched to each assigned module.</a:t>
                       </a:r>
-                      <a:endParaRPr lang="en-US" sz="1100" dirty="0"/>
+                      <a:endParaRPr lang="en-US" sz="1050" dirty="0"/>
                     </a:p>
                   </a:txBody>
-                  <a:tcPr marL="127000" marR="127000" marT="76200" marB="76200" anchor="ctr">
+                  <a:tcPr marL="127000" marR="127000" marT="63500" marB="63500" anchor="ctr">
                     <a:lnL w="6350" cap="flat" cmpd="sng" algn="ctr">
                       <a:solidFill>
                         <a:srgbClr val="D8D9DB"/>
@@ -5878,7 +6529,7 @@
                   </a:tcPr>
                 </a:tc>
               </a:tr>
-              <a:tr h="659674">
+              <a:tr h="620486">
                 <a:tc>
                   <a:txBody>
                     <a:bodyPr/>
@@ -5888,17 +6539,17 @@
                         <a:buNone/>
                       </a:pPr>
                       <a:r>
-                        <a:rPr lang="en-US" sz="1100" b="1" dirty="0">
+                        <a:rPr lang="en-US" sz="1050" b="1" dirty="0">
                           <a:solidFill>
                             <a:srgbClr val="0A0A0A"/>
                           </a:solidFill>
                         </a:rPr>
                         <a:t>Establish a formal DOI Train-the-Trainer certification</a:t>
                       </a:r>
-                      <a:endParaRPr lang="en-US" sz="1100" dirty="0"/>
+                      <a:endParaRPr lang="en-US" sz="1050" dirty="0"/>
                     </a:p>
                   </a:txBody>
-                  <a:tcPr marL="127000" marR="127000" marT="76200" marB="76200" anchor="ctr">
+                  <a:tcPr marL="127000" marR="127000" marT="63500" marB="63500" anchor="ctr">
                     <a:lnL w="6350" cap="flat" cmpd="sng" algn="ctr">
                       <a:solidFill>
                         <a:srgbClr val="D8D9DB"/>
@@ -5949,17 +6600,17 @@
                         <a:buNone/>
                       </a:pPr>
                       <a:r>
-                        <a:rPr lang="en-US" sz="1100" dirty="0">
+                        <a:rPr lang="en-US" sz="1050" dirty="0">
                           <a:solidFill>
                             <a:srgbClr val="5B5F66"/>
                           </a:solidFill>
                         </a:rPr>
                         <a:t>Prerequisites, teach-backs, practical evaluation, safety evaluation, knowledge assessment, and recertification.</a:t>
                       </a:r>
-                      <a:endParaRPr lang="en-US" sz="1100" dirty="0"/>
+                      <a:endParaRPr lang="en-US" sz="1050" dirty="0"/>
                     </a:p>
                   </a:txBody>
-                  <a:tcPr marL="127000" marR="127000" marT="76200" marB="76200" anchor="ctr">
+                  <a:tcPr marL="127000" marR="127000" marT="63500" marB="63500" anchor="ctr">
                     <a:lnL w="6350" cap="flat" cmpd="sng" algn="ctr">
                       <a:solidFill>
                         <a:srgbClr val="D8D9DB"/>
@@ -6002,7 +6653,7 @@
                   </a:tcPr>
                 </a:tc>
               </a:tr>
-              <a:tr h="659674">
+              <a:tr h="620486">
                 <a:tc>
                   <a:txBody>
                     <a:bodyPr/>
@@ -6012,17 +6663,17 @@
                         <a:buNone/>
                       </a:pPr>
                       <a:r>
-                        <a:rPr lang="en-US" sz="1100" b="1" dirty="0">
+                        <a:rPr lang="en-US" sz="1050" b="1" dirty="0">
                           <a:solidFill>
                             <a:srgbClr val="0A0A0A"/>
                           </a:solidFill>
                         </a:rPr>
                         <a:t>Standardize scenario design and evaluation</a:t>
                       </a:r>
-                      <a:endParaRPr lang="en-US" sz="1100" dirty="0"/>
+                      <a:endParaRPr lang="en-US" sz="1050" dirty="0"/>
                     </a:p>
                   </a:txBody>
-                  <a:tcPr marL="127000" marR="127000" marT="76200" marB="76200" anchor="ctr">
+                  <a:tcPr marL="127000" marR="127000" marT="63500" marB="63500" anchor="ctr">
                     <a:lnL w="6350" cap="flat" cmpd="sng" algn="ctr">
                       <a:solidFill>
                         <a:srgbClr val="D8D9DB"/>
@@ -6073,17 +6724,17 @@
                         <a:buNone/>
                       </a:pPr>
                       <a:r>
-                        <a:rPr lang="en-US" sz="1100" dirty="0">
+                        <a:rPr lang="en-US" sz="1050" dirty="0">
                           <a:solidFill>
                             <a:srgbClr val="5B5F66"/>
                           </a:solidFill>
                         </a:rPr>
                         <a:t>Learning objectives, decision points, safety controls, scoring rubrics, remediation triggers, and AAR elements.</a:t>
                       </a:r>
-                      <a:endParaRPr lang="en-US" sz="1100" dirty="0"/>
+                      <a:endParaRPr lang="en-US" sz="1050" dirty="0"/>
                     </a:p>
                   </a:txBody>
-                  <a:tcPr marL="127000" marR="127000" marT="76200" marB="76200" anchor="ctr">
+                  <a:tcPr marL="127000" marR="127000" marT="63500" marB="63500" anchor="ctr">
                     <a:lnL w="6350" cap="flat" cmpd="sng" algn="ctr">
                       <a:solidFill>
                         <a:srgbClr val="D8D9DB"/>
@@ -6126,7 +6777,7 @@
                   </a:tcPr>
                 </a:tc>
               </a:tr>
-              <a:tr h="659674">
+              <a:tr h="620486">
                 <a:tc>
                   <a:txBody>
                     <a:bodyPr/>
@@ -6136,17 +6787,17 @@
                         <a:buNone/>
                       </a:pPr>
                       <a:r>
-                        <a:rPr lang="en-US" sz="1100" b="1" dirty="0">
+                        <a:rPr lang="en-US" sz="1050" b="1" dirty="0">
                           <a:solidFill>
                             <a:srgbClr val="0A0A0A"/>
                           </a:solidFill>
                         </a:rPr>
                         <a:t>Protect Government ownership of new courseware</a:t>
                       </a:r>
-                      <a:endParaRPr lang="en-US" sz="1100" dirty="0"/>
+                      <a:endParaRPr lang="en-US" sz="1050" dirty="0"/>
                     </a:p>
                   </a:txBody>
-                  <a:tcPr marL="127000" marR="127000" marT="76200" marB="76200" anchor="ctr">
+                  <a:tcPr marL="127000" marR="127000" marT="63500" marB="63500" anchor="ctr">
                     <a:lnL w="6350" cap="flat" cmpd="sng" algn="ctr">
                       <a:solidFill>
                         <a:srgbClr val="D8D9DB"/>
@@ -6197,17 +6848,17 @@
                         <a:buNone/>
                       </a:pPr>
                       <a:r>
-                        <a:rPr lang="en-US" sz="1100" dirty="0">
+                        <a:rPr lang="en-US" sz="1050" dirty="0">
                           <a:solidFill>
                             <a:srgbClr val="5B5F66"/>
                           </a:solidFill>
                         </a:rPr>
                         <a:t>DOI owns/has right-to-use newly developed OSSTP material, while legitimate contractor background IP stays excluded.</a:t>
                       </a:r>
-                      <a:endParaRPr lang="en-US" sz="1100" dirty="0"/>
+                      <a:endParaRPr lang="en-US" sz="1050" dirty="0"/>
                     </a:p>
                   </a:txBody>
-                  <a:tcPr marL="127000" marR="127000" marT="76200" marB="76200" anchor="ctr">
+                  <a:tcPr marL="127000" marR="127000" marT="63500" marB="63500" anchor="ctr">
                     <a:lnL w="6350" cap="flat" cmpd="sng" algn="ctr">
                       <a:solidFill>
                         <a:srgbClr val="D8D9DB"/>
@@ -6250,7 +6901,7 @@
                   </a:tcPr>
                 </a:tc>
               </a:tr>
-              <a:tr h="659674">
+              <a:tr h="620486">
                 <a:tc>
                   <a:txBody>
                     <a:bodyPr/>
@@ -6260,17 +6911,17 @@
                         <a:buNone/>
                       </a:pPr>
                       <a:r>
-                        <a:rPr lang="en-US" sz="1100" b="1" dirty="0">
+                        <a:rPr lang="en-US" sz="1050" b="1" dirty="0">
                           <a:solidFill>
                             <a:srgbClr val="0A0A0A"/>
                           </a:solidFill>
                         </a:rPr>
                         <a:t>Require standards-based, portable digital courseware</a:t>
                       </a:r>
-                      <a:endParaRPr lang="en-US" sz="1100" dirty="0"/>
+                      <a:endParaRPr lang="en-US" sz="1050" dirty="0"/>
                     </a:p>
                   </a:txBody>
-                  <a:tcPr marL="127000" marR="127000" marT="76200" marB="76200" anchor="ctr">
+                  <a:tcPr marL="127000" marR="127000" marT="63500" marB="63500" anchor="ctr">
                     <a:lnL w="6350" cap="flat" cmpd="sng" algn="ctr">
                       <a:solidFill>
                         <a:srgbClr val="D8D9DB"/>
@@ -6321,17 +6972,17 @@
                         <a:buNone/>
                       </a:pPr>
                       <a:r>
-                        <a:rPr lang="en-US" sz="1100" dirty="0">
+                        <a:rPr lang="en-US" sz="1050" dirty="0">
                           <a:solidFill>
                             <a:srgbClr val="5B5F66"/>
                           </a:solidFill>
                         </a:rPr>
                         <a:t>SCORM / xAPI / AICC / IMS QTI interoperability so DOI can sustain content without vendor lock-in.</a:t>
                       </a:r>
-                      <a:endParaRPr lang="en-US" sz="1100" dirty="0"/>
+                      <a:endParaRPr lang="en-US" sz="1050" dirty="0"/>
                     </a:p>
                   </a:txBody>
-                  <a:tcPr marL="127000" marR="127000" marT="76200" marB="76200" anchor="ctr">
+                  <a:tcPr marL="127000" marR="127000" marT="63500" marB="63500" anchor="ctr">
                     <a:lnL w="6350" cap="flat" cmpd="sng" algn="ctr">
                       <a:solidFill>
                         <a:srgbClr val="D8D9DB"/>
@@ -6380,13 +7031,13 @@
       </p:graphicFrame>
       <p:sp>
         <p:nvSpPr>
-          <p:cNvPr id="5" name="Text 2"/>
+          <p:cNvPr id="10" name="Text 7"/>
           <p:cNvSpPr/>
           <p:nvPr/>
         </p:nvSpPr>
         <p:spPr>
           <a:xfrm>
-            <a:off x="457200" y="6473952"/>
+            <a:off x="457200" y="6492240"/>
             <a:ext cx="11274552" cy="274320"/>
           </a:xfrm>
           <a:prstGeom prst="rect">
@@ -6457,8 +7108,8 @@
         </p:nvSpPr>
         <p:spPr>
           <a:xfrm>
-            <a:off x="457200" y="457200"/>
-            <a:ext cx="5486400" cy="320040"/>
+            <a:off x="6949440" y="0"/>
+            <a:ext cx="5486400" cy="6858000"/>
           </a:xfrm>
           <a:prstGeom prst="rect">
             <a:avLst/>
@@ -6467,21 +7118,178 @@
           <a:ln/>
         </p:spPr>
         <p:txBody>
+          <a:bodyPr wrap="square" lIns="0" tIns="0" rIns="0" bIns="0" rtlCol="0" anchor="t"/>
+          <a:lstStyle/>
+          <a:p>
+            <a:pPr algn="r" indent="0" marL="0">
+              <a:buNone/>
+            </a:pPr>
+            <a:r>
+              <a:rPr lang="en-US" sz="36000" b="1" dirty="0">
+                <a:solidFill>
+                  <a:srgbClr val="141414"/>
+                </a:solidFill>
+                <a:latin typeface="Bookman Old Style" pitchFamily="34" charset="0"/>
+                <a:ea typeface="Bookman Old Style" pitchFamily="34" charset="-122"/>
+                <a:cs typeface="Bookman Old Style" pitchFamily="34" charset="-120"/>
+              </a:rPr>
+              <a:t>05</a:t>
+            </a:r>
+            <a:endParaRPr lang="en-US" sz="36000" dirty="0"/>
+          </a:p>
+        </p:txBody>
+      </p:sp>
+      <p:sp>
+        <p:nvSpPr>
+          <p:cNvPr id="3" name="Shape 1"/>
+          <p:cNvSpPr/>
+          <p:nvPr/>
+        </p:nvSpPr>
+        <p:spPr>
+          <a:xfrm>
+            <a:off x="457200" y="384048"/>
+            <a:ext cx="310896" cy="29261"/>
+          </a:xfrm>
+          <a:prstGeom prst="rect">
+            <a:avLst/>
+          </a:prstGeom>
+          <a:solidFill>
+            <a:srgbClr val="FF002B"/>
+          </a:solidFill>
+          <a:ln/>
+        </p:spPr>
+      </p:sp>
+      <p:sp>
+        <p:nvSpPr>
+          <p:cNvPr id="4" name="Shape 2"/>
+          <p:cNvSpPr/>
+          <p:nvPr/>
+        </p:nvSpPr>
+        <p:spPr>
+          <a:xfrm>
+            <a:off x="457200" y="384048"/>
+            <a:ext cx="29261" cy="310896"/>
+          </a:xfrm>
+          <a:prstGeom prst="rect">
+            <a:avLst/>
+          </a:prstGeom>
+          <a:solidFill>
+            <a:srgbClr val="FF002B"/>
+          </a:solidFill>
+          <a:ln/>
+        </p:spPr>
+      </p:sp>
+      <p:sp>
+        <p:nvSpPr>
+          <p:cNvPr id="5" name="Text 3"/>
+          <p:cNvSpPr txBox="1"/>
+          <p:nvPr/>
+        </p:nvSpPr>
+        <p:spPr>
+          <a:xfrm>
+            <a:off x="896112" y="329184"/>
+            <a:ext cx="2926080" cy="292608"/>
+          </a:xfrm>
+          <a:prstGeom prst="rect">
+            <a:avLst/>
+          </a:prstGeom>
+          <a:noFill/>
+          <a:ln/>
+        </p:spPr>
+        <p:txBody>
           <a:bodyPr wrap="square" lIns="0" tIns="0" rIns="0" bIns="0" rtlCol="0" anchor="ctr"/>
           <a:lstStyle/>
           <a:p>
-            <a:pPr algn="l" indent="0" marL="0">
-              <a:buNone/>
-            </a:pPr>
-            <a:r>
-              <a:rPr lang="en-US" sz="1100" b="1" spc="150" kern="0" dirty="0">
-                <a:solidFill>
-                  <a:srgbClr val="FF002B"/>
+            <a:pPr indent="0" marL="0">
+              <a:buNone/>
+            </a:pPr>
+            <a:r>
+              <a:rPr lang="en-US" sz="1500" b="1" spc="200" kern="0" dirty="0">
+                <a:solidFill>
+                  <a:srgbClr val="FFFFFF"/>
                 </a:solidFill>
                 <a:latin typeface="Arial" pitchFamily="34" charset="0"/>
                 <a:ea typeface="Arial" pitchFamily="34" charset="-122"/>
                 <a:cs typeface="Arial" pitchFamily="34" charset="-120"/>
               </a:rPr>
+              <a:t>VALLETTA</a:t>
+            </a:r>
+            <a:endParaRPr lang="en-US" sz="1500" dirty="0"/>
+          </a:p>
+        </p:txBody>
+      </p:sp>
+      <p:sp>
+        <p:nvSpPr>
+          <p:cNvPr id="6" name="Text 4"/>
+          <p:cNvSpPr txBox="1"/>
+          <p:nvPr/>
+        </p:nvSpPr>
+        <p:spPr>
+          <a:xfrm>
+            <a:off x="896112" y="603504"/>
+            <a:ext cx="2926080" cy="219456"/>
+          </a:xfrm>
+          <a:prstGeom prst="rect">
+            <a:avLst/>
+          </a:prstGeom>
+          <a:noFill/>
+          <a:ln/>
+        </p:spPr>
+        <p:txBody>
+          <a:bodyPr wrap="square" lIns="0" tIns="0" rIns="0" bIns="0" rtlCol="0" anchor="ctr"/>
+          <a:lstStyle/>
+          <a:p>
+            <a:pPr indent="0" marL="0">
+              <a:buNone/>
+            </a:pPr>
+            <a:r>
+              <a:rPr lang="en-US" sz="750" b="1" spc="200" kern="0" dirty="0">
+                <a:solidFill>
+                  <a:srgbClr val="5B5F66"/>
+                </a:solidFill>
+                <a:latin typeface="Arial" pitchFamily="34" charset="0"/>
+                <a:ea typeface="Arial" pitchFamily="34" charset="-122"/>
+                <a:cs typeface="Arial" pitchFamily="34" charset="-120"/>
+              </a:rPr>
+              <a:t>INDUSTRIES, INC.</a:t>
+            </a:r>
+            <a:endParaRPr lang="en-US" sz="750" dirty="0"/>
+          </a:p>
+        </p:txBody>
+      </p:sp>
+      <p:sp>
+        <p:nvSpPr>
+          <p:cNvPr id="7" name="Text 5"/>
+          <p:cNvSpPr txBox="1"/>
+          <p:nvPr/>
+        </p:nvSpPr>
+        <p:spPr>
+          <a:xfrm>
+            <a:off x="457200" y="777240"/>
+            <a:ext cx="5486400" cy="320040"/>
+          </a:xfrm>
+          <a:prstGeom prst="rect">
+            <a:avLst/>
+          </a:prstGeom>
+          <a:noFill/>
+          <a:ln/>
+        </p:spPr>
+        <p:txBody>
+          <a:bodyPr wrap="square" lIns="0" tIns="0" rIns="0" bIns="0" rtlCol="0" anchor="ctr"/>
+          <a:lstStyle/>
+          <a:p>
+            <a:pPr algn="l" indent="0" marL="0">
+              <a:buNone/>
+            </a:pPr>
+            <a:r>
+              <a:rPr lang="en-US" sz="1100" b="1" spc="150" kern="0" dirty="0">
+                <a:solidFill>
+                  <a:srgbClr val="FF002B"/>
+                </a:solidFill>
+                <a:latin typeface="Arial" pitchFamily="34" charset="0"/>
+                <a:ea typeface="Arial" pitchFamily="34" charset="-122"/>
+                <a:cs typeface="Arial" pitchFamily="34" charset="-120"/>
+              </a:rPr>
               <a:t>CLOSING</a:t>
             </a:r>
             <a:endParaRPr lang="en-US" sz="1100" dirty="0"/>
@@ -6490,14 +7298,14 @@
       </p:sp>
       <p:sp>
         <p:nvSpPr>
-          <p:cNvPr id="3" name="Text 1"/>
+          <p:cNvPr id="8" name="Text 6"/>
           <p:cNvSpPr txBox="1"/>
           <p:nvPr/>
         </p:nvSpPr>
         <p:spPr>
           <a:xfrm>
-            <a:off x="457200" y="777240"/>
-            <a:ext cx="11274552" cy="685800"/>
+            <a:off x="457200" y="1097280"/>
+            <a:ext cx="6675120" cy="685800"/>
           </a:xfrm>
           <a:prstGeom prst="rect">
             <a:avLst/>
@@ -6513,7 +7321,7 @@
               <a:buNone/>
             </a:pPr>
             <a:r>
-              <a:rPr lang="en-US" sz="2800" b="1" dirty="0">
+              <a:rPr lang="en-US" sz="3400" b="1" dirty="0">
                 <a:solidFill>
                   <a:srgbClr val="FFFFFF"/>
                 </a:solidFill>
@@ -6521,24 +7329,63 @@
                 <a:ea typeface="Bookman Old Style" pitchFamily="34" charset="-122"/>
                 <a:cs typeface="Bookman Old Style" pitchFamily="34" charset="-120"/>
               </a:rPr>
-              <a:t>A Proven Partner to Stand Up DOI's Own OSSTP</a:t>
-            </a:r>
-            <a:endParaRPr lang="en-US" sz="2800" dirty="0"/>
-          </a:p>
-        </p:txBody>
-      </p:sp>
-      <p:sp>
-        <p:nvSpPr>
-          <p:cNvPr id="4" name="Shape 2"/>
+              <a:t>BUILT BY OPERATORS.</a:t>
+            </a:r>
+            <a:endParaRPr lang="en-US" sz="3400" dirty="0"/>
+          </a:p>
+        </p:txBody>
+      </p:sp>
+      <p:sp>
+        <p:nvSpPr>
+          <p:cNvPr id="9" name="Text 7"/>
+          <p:cNvSpPr txBox="1"/>
+          <p:nvPr/>
+        </p:nvSpPr>
+        <p:spPr>
+          <a:xfrm>
+            <a:off x="457200" y="1783080"/>
+            <a:ext cx="6675120" cy="457200"/>
+          </a:xfrm>
+          <a:prstGeom prst="rect">
+            <a:avLst/>
+          </a:prstGeom>
+          <a:noFill/>
+          <a:ln/>
+        </p:spPr>
+        <p:txBody>
+          <a:bodyPr wrap="square" lIns="0" tIns="0" rIns="0" bIns="0" rtlCol="0" anchor="ctr"/>
+          <a:lstStyle/>
+          <a:p>
+            <a:pPr indent="0" marL="0">
+              <a:buNone/>
+            </a:pPr>
+            <a:r>
+              <a:rPr lang="en-US" sz="1400" i="1" dirty="0">
+                <a:solidFill>
+                  <a:srgbClr val="D8D9DB"/>
+                </a:solidFill>
+                <a:latin typeface="Calibri" pitchFamily="34" charset="0"/>
+                <a:ea typeface="Calibri" pitchFamily="34" charset="-122"/>
+                <a:cs typeface="Calibri" pitchFamily="34" charset="-120"/>
+              </a:rPr>
+              <a:t>A proven partner to stand up DOI's own OSSTP.</a:t>
+            </a:r>
+            <a:endParaRPr lang="en-US" sz="1400" dirty="0"/>
+          </a:p>
+        </p:txBody>
+      </p:sp>
+      <p:sp>
+        <p:nvSpPr>
+          <p:cNvPr id="10" name="Shape 8"/>
           <p:cNvSpPr/>
           <p:nvPr/>
         </p:nvSpPr>
         <p:spPr>
           <a:xfrm>
-            <a:off x="457200" y="1783080"/>
-            <a:ext cx="457200" cy="457200"/>
-          </a:xfrm>
-          <a:prstGeom prst="ellipse">
+            <a:off x="457200" y="2606040"/>
+            <a:ext cx="256032" cy="32004"/>
+          </a:xfrm>
+          <a:prstGeom prst="rect">
             <a:avLst/>
           </a:prstGeom>
           <a:solidFill>
@@ -6549,14 +7396,34 @@
       </p:sp>
       <p:sp>
         <p:nvSpPr>
-          <p:cNvPr id="5" name="Text 3"/>
+          <p:cNvPr id="11" name="Shape 9"/>
+          <p:cNvSpPr/>
+          <p:nvPr/>
+        </p:nvSpPr>
+        <p:spPr>
+          <a:xfrm>
+            <a:off x="457200" y="2606040"/>
+            <a:ext cx="32004" cy="256032"/>
+          </a:xfrm>
+          <a:prstGeom prst="rect">
+            <a:avLst/>
+          </a:prstGeom>
+          <a:solidFill>
+            <a:srgbClr val="FF002B"/>
+          </a:solidFill>
+          <a:ln/>
+        </p:spPr>
+      </p:sp>
+      <p:sp>
+        <p:nvSpPr>
+          <p:cNvPr id="12" name="Text 10"/>
           <p:cNvSpPr txBox="1"/>
           <p:nvPr/>
         </p:nvSpPr>
         <p:spPr>
           <a:xfrm>
-            <a:off x="457200" y="1783080"/>
-            <a:ext cx="457200" cy="457200"/>
+            <a:off x="868680" y="2569464"/>
+            <a:ext cx="5623560" cy="384048"/>
           </a:xfrm>
           <a:prstGeom prst="rect">
             <a:avLst/>
@@ -6565,14 +7432,14 @@
           <a:ln/>
         </p:spPr>
         <p:txBody>
-          <a:bodyPr wrap="square" lIns="0" tIns="0" rIns="0" bIns="0" rtlCol="0" anchor="ctr"/>
-          <a:lstStyle/>
-          <a:p>
-            <a:pPr algn="ctr" indent="0" marL="0">
-              <a:buNone/>
-            </a:pPr>
-            <a:r>
-              <a:rPr lang="en-US" sz="1800" b="1" dirty="0">
+          <a:bodyPr wrap="square" lIns="0" tIns="0" rIns="0" bIns="0" rtlCol="0" anchor="t"/>
+          <a:lstStyle/>
+          <a:p>
+            <a:pPr indent="0" marL="0">
+              <a:buNone/>
+            </a:pPr>
+            <a:r>
+              <a:rPr lang="en-US" sz="1200" b="1" spc="50" kern="0" dirty="0">
                 <a:solidFill>
                   <a:srgbClr val="FFFFFF"/>
                 </a:solidFill>
@@ -6580,61 +7447,22 @@
                 <a:ea typeface="Arial" pitchFamily="34" charset="-122"/>
                 <a:cs typeface="Arial" pitchFamily="34" charset="-120"/>
               </a:rPr>
-              <a:t>1</a:t>
-            </a:r>
-            <a:endParaRPr lang="en-US" sz="1800" dirty="0"/>
-          </a:p>
-        </p:txBody>
-      </p:sp>
-      <p:sp>
-        <p:nvSpPr>
-          <p:cNvPr id="6" name="Text 4"/>
+              <a:t>CURRENT OPERATOR, NOT JUST AN INSTRUCTOR</a:t>
+            </a:r>
+            <a:endParaRPr lang="en-US" sz="1200" dirty="0"/>
+          </a:p>
+        </p:txBody>
+      </p:sp>
+      <p:sp>
+        <p:nvSpPr>
+          <p:cNvPr id="13" name="Text 11"/>
           <p:cNvSpPr txBox="1"/>
           <p:nvPr/>
         </p:nvSpPr>
         <p:spPr>
           <a:xfrm>
-            <a:off x="1143000" y="1737360"/>
-            <a:ext cx="5120640" cy="457200"/>
-          </a:xfrm>
-          <a:prstGeom prst="rect">
-            <a:avLst/>
-          </a:prstGeom>
-          <a:noFill/>
-          <a:ln/>
-        </p:spPr>
-        <p:txBody>
-          <a:bodyPr wrap="square" lIns="0" tIns="0" rIns="0" bIns="0" rtlCol="0" anchor="t"/>
-          <a:lstStyle/>
-          <a:p>
-            <a:pPr indent="0" marL="0">
-              <a:buNone/>
-            </a:pPr>
-            <a:r>
-              <a:rPr lang="en-US" sz="1300" b="1" spc="50" kern="0" dirty="0">
-                <a:solidFill>
-                  <a:srgbClr val="FFFFFF"/>
-                </a:solidFill>
-                <a:latin typeface="Arial" pitchFamily="34" charset="0"/>
-                <a:ea typeface="Arial" pitchFamily="34" charset="-122"/>
-                <a:cs typeface="Arial" pitchFamily="34" charset="-120"/>
-              </a:rPr>
-              <a:t>CURRENT OPERATOR, NOT JUST AN INSTRUCTOR</a:t>
-            </a:r>
-            <a:endParaRPr lang="en-US" sz="1300" dirty="0"/>
-          </a:p>
-        </p:txBody>
-      </p:sp>
-      <p:sp>
-        <p:nvSpPr>
-          <p:cNvPr id="7" name="Text 5"/>
-          <p:cNvSpPr txBox="1"/>
-          <p:nvPr/>
-        </p:nvSpPr>
-        <p:spPr>
-          <a:xfrm>
-            <a:off x="1143000" y="2167128"/>
-            <a:ext cx="5120640" cy="777240"/>
+            <a:off x="868680" y="2935224"/>
+            <a:ext cx="5623560" cy="640080"/>
           </a:xfrm>
           <a:prstGeom prst="rect">
             <a:avLst/>
@@ -6653,7 +7481,7 @@
               <a:buNone/>
             </a:pPr>
             <a:r>
-              <a:rPr lang="en-US" sz="1200" dirty="0">
+              <a:rPr lang="en-US" sz="1050" dirty="0">
                 <a:solidFill>
                   <a:srgbClr val="D8D9DB"/>
                 </a:solidFill>
@@ -6663,22 +7491,22 @@
               </a:rPr>
               <a:t>Active protective-force operations reinforce every module Valletta designs and teaches.</a:t>
             </a:r>
-            <a:endParaRPr lang="en-US" sz="1200" dirty="0"/>
-          </a:p>
-        </p:txBody>
-      </p:sp>
-      <p:sp>
-        <p:nvSpPr>
-          <p:cNvPr id="8" name="Shape 6"/>
+            <a:endParaRPr lang="en-US" sz="1050" dirty="0"/>
+          </a:p>
+        </p:txBody>
+      </p:sp>
+      <p:sp>
+        <p:nvSpPr>
+          <p:cNvPr id="14" name="Shape 12"/>
           <p:cNvSpPr/>
           <p:nvPr/>
         </p:nvSpPr>
         <p:spPr>
           <a:xfrm>
-            <a:off x="457200" y="3108960"/>
-            <a:ext cx="457200" cy="457200"/>
-          </a:xfrm>
-          <a:prstGeom prst="ellipse">
+            <a:off x="457200" y="3685032"/>
+            <a:ext cx="256032" cy="32004"/>
+          </a:xfrm>
+          <a:prstGeom prst="rect">
             <a:avLst/>
           </a:prstGeom>
           <a:solidFill>
@@ -6689,14 +7517,34 @@
       </p:sp>
       <p:sp>
         <p:nvSpPr>
-          <p:cNvPr id="9" name="Text 7"/>
+          <p:cNvPr id="15" name="Shape 13"/>
+          <p:cNvSpPr/>
+          <p:nvPr/>
+        </p:nvSpPr>
+        <p:spPr>
+          <a:xfrm>
+            <a:off x="457200" y="3685032"/>
+            <a:ext cx="32004" cy="256032"/>
+          </a:xfrm>
+          <a:prstGeom prst="rect">
+            <a:avLst/>
+          </a:prstGeom>
+          <a:solidFill>
+            <a:srgbClr val="FF002B"/>
+          </a:solidFill>
+          <a:ln/>
+        </p:spPr>
+      </p:sp>
+      <p:sp>
+        <p:nvSpPr>
+          <p:cNvPr id="16" name="Text 14"/>
           <p:cNvSpPr txBox="1"/>
           <p:nvPr/>
         </p:nvSpPr>
         <p:spPr>
           <a:xfrm>
-            <a:off x="457200" y="3108960"/>
-            <a:ext cx="457200" cy="457200"/>
+            <a:off x="868680" y="3648456"/>
+            <a:ext cx="5623560" cy="384048"/>
           </a:xfrm>
           <a:prstGeom prst="rect">
             <a:avLst/>
@@ -6705,14 +7553,14 @@
           <a:ln/>
         </p:spPr>
         <p:txBody>
-          <a:bodyPr wrap="square" lIns="0" tIns="0" rIns="0" bIns="0" rtlCol="0" anchor="ctr"/>
-          <a:lstStyle/>
-          <a:p>
-            <a:pPr algn="ctr" indent="0" marL="0">
-              <a:buNone/>
-            </a:pPr>
-            <a:r>
-              <a:rPr lang="en-US" sz="1800" b="1" dirty="0">
+          <a:bodyPr wrap="square" lIns="0" tIns="0" rIns="0" bIns="0" rtlCol="0" anchor="t"/>
+          <a:lstStyle/>
+          <a:p>
+            <a:pPr indent="0" marL="0">
+              <a:buNone/>
+            </a:pPr>
+            <a:r>
+              <a:rPr lang="en-US" sz="1200" b="1" spc="50" kern="0" dirty="0">
                 <a:solidFill>
                   <a:srgbClr val="FFFFFF"/>
                 </a:solidFill>
@@ -6720,61 +7568,22 @@
                 <a:ea typeface="Arial" pitchFamily="34" charset="-122"/>
                 <a:cs typeface="Arial" pitchFamily="34" charset="-120"/>
               </a:rPr>
-              <a:t>2</a:t>
-            </a:r>
-            <a:endParaRPr lang="en-US" sz="1800" dirty="0"/>
-          </a:p>
-        </p:txBody>
-      </p:sp>
-      <p:sp>
-        <p:nvSpPr>
-          <p:cNvPr id="10" name="Text 8"/>
+              <a:t>MISSION PROTECT: A DOI-OWNED DIGITAL PATHWAY</a:t>
+            </a:r>
+            <a:endParaRPr lang="en-US" sz="1200" dirty="0"/>
+          </a:p>
+        </p:txBody>
+      </p:sp>
+      <p:sp>
+        <p:nvSpPr>
+          <p:cNvPr id="17" name="Text 15"/>
           <p:cNvSpPr txBox="1"/>
           <p:nvPr/>
         </p:nvSpPr>
         <p:spPr>
           <a:xfrm>
-            <a:off x="1143000" y="3063240"/>
-            <a:ext cx="5120640" cy="457200"/>
-          </a:xfrm>
-          <a:prstGeom prst="rect">
-            <a:avLst/>
-          </a:prstGeom>
-          <a:noFill/>
-          <a:ln/>
-        </p:spPr>
-        <p:txBody>
-          <a:bodyPr wrap="square" lIns="0" tIns="0" rIns="0" bIns="0" rtlCol="0" anchor="t"/>
-          <a:lstStyle/>
-          <a:p>
-            <a:pPr indent="0" marL="0">
-              <a:buNone/>
-            </a:pPr>
-            <a:r>
-              <a:rPr lang="en-US" sz="1300" b="1" spc="50" kern="0" dirty="0">
-                <a:solidFill>
-                  <a:srgbClr val="FFFFFF"/>
-                </a:solidFill>
-                <a:latin typeface="Arial" pitchFamily="34" charset="0"/>
-                <a:ea typeface="Arial" pitchFamily="34" charset="-122"/>
-                <a:cs typeface="Arial" pitchFamily="34" charset="-120"/>
-              </a:rPr>
-              <a:t>MISSION PROTECT: A DOI-OWNED DIGITAL PATHWAY</a:t>
-            </a:r>
-            <a:endParaRPr lang="en-US" sz="1300" dirty="0"/>
-          </a:p>
-        </p:txBody>
-      </p:sp>
-      <p:sp>
-        <p:nvSpPr>
-          <p:cNvPr id="11" name="Text 9"/>
-          <p:cNvSpPr txBox="1"/>
-          <p:nvPr/>
-        </p:nvSpPr>
-        <p:spPr>
-          <a:xfrm>
-            <a:off x="1143000" y="3493008"/>
-            <a:ext cx="5120640" cy="777240"/>
+            <a:off x="868680" y="4014216"/>
+            <a:ext cx="5623560" cy="640080"/>
           </a:xfrm>
           <a:prstGeom prst="rect">
             <a:avLst/>
@@ -6793,7 +7602,7 @@
               <a:buNone/>
             </a:pPr>
             <a:r>
-              <a:rPr lang="en-US" sz="1200" dirty="0">
+              <a:rPr lang="en-US" sz="1050" dirty="0">
                 <a:solidFill>
                   <a:srgbClr val="D8D9DB"/>
                 </a:solidFill>
@@ -6803,22 +7612,22 @@
               </a:rPr>
               <a:t>SCORM / xAPI / AICC / IMS QTI-ready courseware with learner-performance analytics — no vendor lock-in.</a:t>
             </a:r>
-            <a:endParaRPr lang="en-US" sz="1200" dirty="0"/>
-          </a:p>
-        </p:txBody>
-      </p:sp>
-      <p:sp>
-        <p:nvSpPr>
-          <p:cNvPr id="12" name="Shape 10"/>
+            <a:endParaRPr lang="en-US" sz="1050" dirty="0"/>
+          </a:p>
+        </p:txBody>
+      </p:sp>
+      <p:sp>
+        <p:nvSpPr>
+          <p:cNvPr id="18" name="Shape 16"/>
           <p:cNvSpPr/>
           <p:nvPr/>
         </p:nvSpPr>
         <p:spPr>
           <a:xfrm>
-            <a:off x="457200" y="4434840"/>
-            <a:ext cx="457200" cy="457200"/>
-          </a:xfrm>
-          <a:prstGeom prst="ellipse">
+            <a:off x="457200" y="4764024"/>
+            <a:ext cx="256032" cy="32004"/>
+          </a:xfrm>
+          <a:prstGeom prst="rect">
             <a:avLst/>
           </a:prstGeom>
           <a:solidFill>
@@ -6829,14 +7638,34 @@
       </p:sp>
       <p:sp>
         <p:nvSpPr>
-          <p:cNvPr id="13" name="Text 11"/>
+          <p:cNvPr id="19" name="Shape 17"/>
+          <p:cNvSpPr/>
+          <p:nvPr/>
+        </p:nvSpPr>
+        <p:spPr>
+          <a:xfrm>
+            <a:off x="457200" y="4764024"/>
+            <a:ext cx="32004" cy="256032"/>
+          </a:xfrm>
+          <a:prstGeom prst="rect">
+            <a:avLst/>
+          </a:prstGeom>
+          <a:solidFill>
+            <a:srgbClr val="FF002B"/>
+          </a:solidFill>
+          <a:ln/>
+        </p:spPr>
+      </p:sp>
+      <p:sp>
+        <p:nvSpPr>
+          <p:cNvPr id="20" name="Text 18"/>
           <p:cNvSpPr txBox="1"/>
           <p:nvPr/>
         </p:nvSpPr>
         <p:spPr>
           <a:xfrm>
-            <a:off x="457200" y="4434840"/>
-            <a:ext cx="457200" cy="457200"/>
+            <a:off x="868680" y="4727448"/>
+            <a:ext cx="5623560" cy="384048"/>
           </a:xfrm>
           <a:prstGeom prst="rect">
             <a:avLst/>
@@ -6845,14 +7674,14 @@
           <a:ln/>
         </p:spPr>
         <p:txBody>
-          <a:bodyPr wrap="square" lIns="0" tIns="0" rIns="0" bIns="0" rtlCol="0" anchor="ctr"/>
-          <a:lstStyle/>
-          <a:p>
-            <a:pPr algn="ctr" indent="0" marL="0">
-              <a:buNone/>
-            </a:pPr>
-            <a:r>
-              <a:rPr lang="en-US" sz="1800" b="1" dirty="0">
+          <a:bodyPr wrap="square" lIns="0" tIns="0" rIns="0" bIns="0" rtlCol="0" anchor="t"/>
+          <a:lstStyle/>
+          <a:p>
+            <a:pPr indent="0" marL="0">
+              <a:buNone/>
+            </a:pPr>
+            <a:r>
+              <a:rPr lang="en-US" sz="1200" b="1" spc="50" kern="0" dirty="0">
                 <a:solidFill>
                   <a:srgbClr val="FFFFFF"/>
                 </a:solidFill>
@@ -6860,61 +7689,22 @@
                 <a:ea typeface="Arial" pitchFamily="34" charset="-122"/>
                 <a:cs typeface="Arial" pitchFamily="34" charset="-120"/>
               </a:rPr>
-              <a:t>3</a:t>
-            </a:r>
-            <a:endParaRPr lang="en-US" sz="1800" dirty="0"/>
-          </a:p>
-        </p:txBody>
-      </p:sp>
-      <p:sp>
-        <p:nvSpPr>
-          <p:cNvPr id="14" name="Text 12"/>
+              <a:t>NATIONWIDE, REDUNDANT DELIVERY</a:t>
+            </a:r>
+            <a:endParaRPr lang="en-US" sz="1200" dirty="0"/>
+          </a:p>
+        </p:txBody>
+      </p:sp>
+      <p:sp>
+        <p:nvSpPr>
+          <p:cNvPr id="21" name="Text 19"/>
           <p:cNvSpPr txBox="1"/>
           <p:nvPr/>
         </p:nvSpPr>
         <p:spPr>
           <a:xfrm>
-            <a:off x="1143000" y="4389120"/>
-            <a:ext cx="5120640" cy="457200"/>
-          </a:xfrm>
-          <a:prstGeom prst="rect">
-            <a:avLst/>
-          </a:prstGeom>
-          <a:noFill/>
-          <a:ln/>
-        </p:spPr>
-        <p:txBody>
-          <a:bodyPr wrap="square" lIns="0" tIns="0" rIns="0" bIns="0" rtlCol="0" anchor="t"/>
-          <a:lstStyle/>
-          <a:p>
-            <a:pPr indent="0" marL="0">
-              <a:buNone/>
-            </a:pPr>
-            <a:r>
-              <a:rPr lang="en-US" sz="1300" b="1" spc="50" kern="0" dirty="0">
-                <a:solidFill>
-                  <a:srgbClr val="FFFFFF"/>
-                </a:solidFill>
-                <a:latin typeface="Arial" pitchFamily="34" charset="0"/>
-                <a:ea typeface="Arial" pitchFamily="34" charset="-122"/>
-                <a:cs typeface="Arial" pitchFamily="34" charset="-120"/>
-              </a:rPr>
-              <a:t>NATIONWIDE, REDUNDANT DELIVERY</a:t>
-            </a:r>
-            <a:endParaRPr lang="en-US" sz="1300" dirty="0"/>
-          </a:p>
-        </p:txBody>
-      </p:sp>
-      <p:sp>
-        <p:nvSpPr>
-          <p:cNvPr id="15" name="Text 13"/>
-          <p:cNvSpPr txBox="1"/>
-          <p:nvPr/>
-        </p:nvSpPr>
-        <p:spPr>
-          <a:xfrm>
-            <a:off x="1143000" y="4818888"/>
-            <a:ext cx="5120640" cy="777240"/>
+            <a:off x="868680" y="5093208"/>
+            <a:ext cx="5623560" cy="640080"/>
           </a:xfrm>
           <a:prstGeom prst="rect">
             <a:avLst/>
@@ -6933,7 +7723,7 @@
               <a:buNone/>
             </a:pPr>
             <a:r>
-              <a:rPr lang="en-US" sz="1200" dirty="0">
+              <a:rPr lang="en-US" sz="1050" dirty="0">
                 <a:solidFill>
                   <a:srgbClr val="D8D9DB"/>
                 </a:solidFill>
@@ -6943,20 +7733,20 @@
               </a:rPr>
               <a:t>Mobile training teams, instructor redundancy, and controlled courseware across CONUS/OCONUS sites.</a:t>
             </a:r>
-            <a:endParaRPr lang="en-US" sz="1200" dirty="0"/>
-          </a:p>
-        </p:txBody>
-      </p:sp>
-      <p:sp>
-        <p:nvSpPr>
-          <p:cNvPr id="16" name="Shape 14"/>
+            <a:endParaRPr lang="en-US" sz="1050" dirty="0"/>
+          </a:p>
+        </p:txBody>
+      </p:sp>
+      <p:sp>
+        <p:nvSpPr>
+          <p:cNvPr id="22" name="Shape 20"/>
           <p:cNvSpPr/>
           <p:nvPr/>
         </p:nvSpPr>
         <p:spPr>
           <a:xfrm>
-            <a:off x="6720840" y="1783080"/>
-            <a:ext cx="5010912" cy="4160520"/>
+            <a:off x="6720840" y="777240"/>
+            <a:ext cx="5010912" cy="5166360"/>
           </a:xfrm>
           <a:prstGeom prst="rect">
             <a:avLst/>
@@ -6969,14 +7759,14 @@
       </p:sp>
       <p:sp>
         <p:nvSpPr>
-          <p:cNvPr id="17" name="Shape 15"/>
+          <p:cNvPr id="23" name="Shape 21"/>
           <p:cNvSpPr/>
           <p:nvPr/>
         </p:nvSpPr>
         <p:spPr>
           <a:xfrm>
-            <a:off x="6720840" y="1783080"/>
-            <a:ext cx="292608" cy="25603"/>
+            <a:off x="6720840" y="777240"/>
+            <a:ext cx="384048" cy="41148"/>
           </a:xfrm>
           <a:prstGeom prst="rect">
             <a:avLst/>
@@ -6989,14 +7779,14 @@
       </p:sp>
       <p:sp>
         <p:nvSpPr>
-          <p:cNvPr id="18" name="Shape 16"/>
+          <p:cNvPr id="24" name="Shape 22"/>
           <p:cNvSpPr/>
           <p:nvPr/>
         </p:nvSpPr>
         <p:spPr>
           <a:xfrm>
-            <a:off x="6720840" y="1783080"/>
-            <a:ext cx="25603" cy="292608"/>
+            <a:off x="6720840" y="777240"/>
+            <a:ext cx="41148" cy="384048"/>
           </a:xfrm>
           <a:prstGeom prst="rect">
             <a:avLst/>
@@ -7009,14 +7799,14 @@
       </p:sp>
       <p:sp>
         <p:nvSpPr>
-          <p:cNvPr id="19" name="Text 17"/>
+          <p:cNvPr id="25" name="Text 23"/>
           <p:cNvSpPr txBox="1"/>
           <p:nvPr/>
         </p:nvSpPr>
         <p:spPr>
           <a:xfrm>
-            <a:off x="6995160" y="2039112"/>
-            <a:ext cx="4462272" cy="274320"/>
+            <a:off x="7040880" y="1097280"/>
+            <a:ext cx="4370832" cy="274320"/>
           </a:xfrm>
           <a:prstGeom prst="rect">
             <a:avLst/>
@@ -7048,14 +7838,14 @@
       </p:sp>
       <p:sp>
         <p:nvSpPr>
-          <p:cNvPr id="20" name="Text 18"/>
+          <p:cNvPr id="26" name="Text 24"/>
           <p:cNvSpPr txBox="1"/>
           <p:nvPr/>
         </p:nvSpPr>
         <p:spPr>
           <a:xfrm>
-            <a:off x="6995160" y="2331720"/>
-            <a:ext cx="4462272" cy="777240"/>
+            <a:off x="7040880" y="1399032"/>
+            <a:ext cx="4370832" cy="777240"/>
           </a:xfrm>
           <a:prstGeom prst="rect">
             <a:avLst/>
@@ -7130,14 +7920,14 @@
       </p:sp>
       <p:sp>
         <p:nvSpPr>
-          <p:cNvPr id="21" name="Text 19"/>
+          <p:cNvPr id="27" name="Text 25"/>
           <p:cNvSpPr txBox="1"/>
           <p:nvPr/>
         </p:nvSpPr>
         <p:spPr>
           <a:xfrm>
-            <a:off x="6995160" y="3200400"/>
-            <a:ext cx="4462272" cy="274320"/>
+            <a:off x="7040880" y="2286000"/>
+            <a:ext cx="4370832" cy="274320"/>
           </a:xfrm>
           <a:prstGeom prst="rect">
             <a:avLst/>
@@ -7169,14 +7959,14 @@
       </p:sp>
       <p:sp>
         <p:nvSpPr>
-          <p:cNvPr id="22" name="Text 20"/>
+          <p:cNvPr id="28" name="Text 26"/>
           <p:cNvSpPr txBox="1"/>
           <p:nvPr/>
         </p:nvSpPr>
         <p:spPr>
           <a:xfrm>
-            <a:off x="6995160" y="3493008"/>
-            <a:ext cx="4462272" cy="1188720"/>
+            <a:off x="7040880" y="2578608"/>
+            <a:ext cx="4370832" cy="1188720"/>
           </a:xfrm>
           <a:prstGeom prst="rect">
             <a:avLst/>
@@ -7271,14 +8061,37 @@
       </p:sp>
       <p:sp>
         <p:nvSpPr>
-          <p:cNvPr id="23" name="Text 21"/>
+          <p:cNvPr id="29" name="Shape 27"/>
+          <p:cNvSpPr/>
+          <p:nvPr/>
+        </p:nvSpPr>
+        <p:spPr>
+          <a:xfrm>
+            <a:off x="7040880" y="4023360"/>
+            <a:ext cx="4370832" cy="0"/>
+          </a:xfrm>
+          <a:prstGeom prst="line">
+            <a:avLst/>
+          </a:prstGeom>
+          <a:noFill/>
+          <a:ln w="12700">
+            <a:solidFill>
+              <a:srgbClr val="2A2B30"/>
+            </a:solidFill>
+            <a:prstDash val="solid"/>
+          </a:ln>
+        </p:spPr>
+      </p:sp>
+      <p:sp>
+        <p:nvSpPr>
+          <p:cNvPr id="30" name="Text 28"/>
           <p:cNvSpPr txBox="1"/>
           <p:nvPr/>
         </p:nvSpPr>
         <p:spPr>
           <a:xfrm>
-            <a:off x="6995160" y="4846320"/>
-            <a:ext cx="4462272" cy="914400"/>
+            <a:off x="7040880" y="4206240"/>
+            <a:ext cx="4370832" cy="1554480"/>
           </a:xfrm>
           <a:prstGeom prst="rect">
             <a:avLst/>
@@ -7292,12 +8105,12 @@
           <a:p>
             <a:pPr indent="0" marL="0">
               <a:lnSpc>
-                <a:spcPct val="120000"/>
+                <a:spcPct val="125000"/>
               </a:lnSpc>
               <a:buNone/>
             </a:pPr>
             <a:r>
-              <a:rPr lang="en-US" sz="1150" i="1" dirty="0">
+              <a:rPr lang="en-US" sz="1200" i="1" dirty="0">
                 <a:solidFill>
                   <a:srgbClr val="D8D9DB"/>
                 </a:solidFill>
@@ -7307,7 +8120,7 @@
               </a:rPr>
               <a:t>Valletta welcomes continued engagement with OLES and the Interior Business Center as this requirement is refined.</a:t>
             </a:r>
-            <a:endParaRPr lang="en-US" sz="1150" dirty="0"/>
+            <a:endParaRPr lang="en-US" sz="1200" dirty="0"/>
           </a:p>
         </p:txBody>
       </p:sp>

--- a/decks/Valletta_DOI_OSSTP_RFI_Summary.pptx
+++ b/decks/Valletta_DOI_OSSTP_RFI_Summary.pptx
@@ -1260,9 +1260,9 @@
                 <a:solidFill>
                   <a:srgbClr val="141414"/>
                 </a:solidFill>
-                <a:latin typeface="Bookman Old Style" pitchFamily="34" charset="0"/>
-                <a:ea typeface="Bookman Old Style" pitchFamily="34" charset="-122"/>
-                <a:cs typeface="Bookman Old Style" pitchFamily="34" charset="-120"/>
+                <a:latin typeface="Cambria" pitchFamily="34" charset="0"/>
+                <a:ea typeface="Cambria" pitchFamily="34" charset="-122"/>
+                <a:cs typeface="Cambria" pitchFamily="34" charset="-120"/>
               </a:rPr>
               <a:t>01</a:t>
             </a:r>
@@ -1270,16 +1270,118 @@
           </a:p>
         </p:txBody>
       </p:sp>
-      <p:sp>
-        <p:nvSpPr>
-          <p:cNvPr id="3" name="Shape 1"/>
+      <p:pic>
+        <p:nvPicPr>
+          <p:cNvPr id="3" name="Image 0" descr="/home/user/valletta-design-system/assets/logo/valletta-mark.png">    </p:cNvPr>
+          <p:cNvPicPr>
+            <a:picLocks noChangeAspect="1"/>
+          </p:cNvPicPr>
+          <p:nvPr/>
+        </p:nvPicPr>
+        <p:blipFill>
+          <a:blip r:embed="rId1"/>
+          <a:stretch>
+            <a:fillRect/>
+          </a:stretch>
+        </p:blipFill>
+        <p:spPr>
+          <a:xfrm>
+            <a:off x="457200" y="365760"/>
+            <a:ext cx="365760" cy="389284"/>
+          </a:xfrm>
+          <a:prstGeom prst="rect">
+            <a:avLst/>
+          </a:prstGeom>
+        </p:spPr>
+      </p:pic>
+      <p:sp>
+        <p:nvSpPr>
+          <p:cNvPr id="4" name="Text 1"/>
+          <p:cNvSpPr txBox="1"/>
+          <p:nvPr/>
+        </p:nvSpPr>
+        <p:spPr>
+          <a:xfrm>
+            <a:off x="932688" y="329184"/>
+            <a:ext cx="2926080" cy="274320"/>
+          </a:xfrm>
+          <a:prstGeom prst="rect">
+            <a:avLst/>
+          </a:prstGeom>
+          <a:noFill/>
+          <a:ln/>
+        </p:spPr>
+        <p:txBody>
+          <a:bodyPr wrap="square" lIns="0" tIns="0" rIns="0" bIns="0" rtlCol="0" anchor="ctr"/>
+          <a:lstStyle/>
+          <a:p>
+            <a:pPr indent="0" marL="0">
+              <a:buNone/>
+            </a:pPr>
+            <a:r>
+              <a:rPr lang="en-US" sz="1500" spc="200" kern="0" dirty="0">
+                <a:solidFill>
+                  <a:srgbClr val="FFFFFF"/>
+                </a:solidFill>
+                <a:latin typeface="Cambria" pitchFamily="34" charset="0"/>
+                <a:ea typeface="Cambria" pitchFamily="34" charset="-122"/>
+                <a:cs typeface="Cambria" pitchFamily="34" charset="-120"/>
+              </a:rPr>
+              <a:t>VALLETTA</a:t>
+            </a:r>
+            <a:endParaRPr lang="en-US" sz="1500" dirty="0"/>
+          </a:p>
+        </p:txBody>
+      </p:sp>
+      <p:sp>
+        <p:nvSpPr>
+          <p:cNvPr id="5" name="Text 2"/>
+          <p:cNvSpPr txBox="1"/>
+          <p:nvPr/>
+        </p:nvSpPr>
+        <p:spPr>
+          <a:xfrm>
+            <a:off x="932688" y="594360"/>
+            <a:ext cx="2926080" cy="219456"/>
+          </a:xfrm>
+          <a:prstGeom prst="rect">
+            <a:avLst/>
+          </a:prstGeom>
+          <a:noFill/>
+          <a:ln/>
+        </p:spPr>
+        <p:txBody>
+          <a:bodyPr wrap="square" lIns="0" tIns="0" rIns="0" bIns="0" rtlCol="0" anchor="ctr"/>
+          <a:lstStyle/>
+          <a:p>
+            <a:pPr indent="0" marL="0">
+              <a:buNone/>
+            </a:pPr>
+            <a:r>
+              <a:rPr lang="en-US" sz="750" b="1" spc="200" kern="0" dirty="0">
+                <a:solidFill>
+                  <a:srgbClr val="5B5F66"/>
+                </a:solidFill>
+                <a:latin typeface="Arial" pitchFamily="34" charset="0"/>
+                <a:ea typeface="Arial" pitchFamily="34" charset="-122"/>
+                <a:cs typeface="Arial" pitchFamily="34" charset="-120"/>
+              </a:rPr>
+              <a:t>INDUSTRIES, INC.</a:t>
+            </a:r>
+            <a:endParaRPr lang="en-US" sz="750" dirty="0"/>
+          </a:p>
+        </p:txBody>
+      </p:sp>
+      <p:sp>
+        <p:nvSpPr>
+          <p:cNvPr id="6" name="Shape 3"/>
           <p:cNvSpPr/>
           <p:nvPr/>
         </p:nvSpPr>
         <p:spPr>
           <a:xfrm>
-            <a:off x="457200" y="384048"/>
-            <a:ext cx="310896" cy="29261"/>
+            <a:off x="457200" y="1371600"/>
+            <a:ext cx="502920" cy="45720"/>
           </a:xfrm>
           <a:prstGeom prst="rect">
             <a:avLst/>
@@ -1292,14 +1394,14 @@
       </p:sp>
       <p:sp>
         <p:nvSpPr>
-          <p:cNvPr id="4" name="Shape 2"/>
+          <p:cNvPr id="7" name="Shape 4"/>
           <p:cNvSpPr/>
           <p:nvPr/>
         </p:nvSpPr>
         <p:spPr>
           <a:xfrm>
-            <a:off x="457200" y="384048"/>
-            <a:ext cx="29261" cy="310896"/>
+            <a:off x="457200" y="1371600"/>
+            <a:ext cx="45720" cy="502920"/>
           </a:xfrm>
           <a:prstGeom prst="rect">
             <a:avLst/>
@@ -1312,14 +1414,14 @@
       </p:sp>
       <p:sp>
         <p:nvSpPr>
-          <p:cNvPr id="5" name="Text 3"/>
+          <p:cNvPr id="8" name="Text 5"/>
           <p:cNvSpPr txBox="1"/>
           <p:nvPr/>
         </p:nvSpPr>
         <p:spPr>
           <a:xfrm>
-            <a:off x="896112" y="329184"/>
-            <a:ext cx="2926080" cy="292608"/>
+            <a:off x="777240" y="1481328"/>
+            <a:ext cx="10058400" cy="320040"/>
           </a:xfrm>
           <a:prstGeom prst="rect">
             <a:avLst/>
@@ -1331,136 +1433,18 @@
           <a:bodyPr wrap="square" lIns="0" tIns="0" rIns="0" bIns="0" rtlCol="0" anchor="ctr"/>
           <a:lstStyle/>
           <a:p>
-            <a:pPr indent="0" marL="0">
-              <a:buNone/>
-            </a:pPr>
-            <a:r>
-              <a:rPr lang="en-US" sz="1500" b="1" spc="200" kern="0" dirty="0">
-                <a:solidFill>
-                  <a:srgbClr val="FFFFFF"/>
+            <a:pPr algn="l" indent="0" marL="0">
+              <a:buNone/>
+            </a:pPr>
+            <a:r>
+              <a:rPr lang="en-US" sz="1100" b="1" spc="150" kern="0" dirty="0">
+                <a:solidFill>
+                  <a:srgbClr val="D8D9DB"/>
                 </a:solidFill>
                 <a:latin typeface="Arial" pitchFamily="34" charset="0"/>
                 <a:ea typeface="Arial" pitchFamily="34" charset="-122"/>
                 <a:cs typeface="Arial" pitchFamily="34" charset="-120"/>
               </a:rPr>
-              <a:t>VALLETTA</a:t>
-            </a:r>
-            <a:endParaRPr lang="en-US" sz="1500" dirty="0"/>
-          </a:p>
-        </p:txBody>
-      </p:sp>
-      <p:sp>
-        <p:nvSpPr>
-          <p:cNvPr id="6" name="Text 4"/>
-          <p:cNvSpPr txBox="1"/>
-          <p:nvPr/>
-        </p:nvSpPr>
-        <p:spPr>
-          <a:xfrm>
-            <a:off x="896112" y="603504"/>
-            <a:ext cx="2926080" cy="219456"/>
-          </a:xfrm>
-          <a:prstGeom prst="rect">
-            <a:avLst/>
-          </a:prstGeom>
-          <a:noFill/>
-          <a:ln/>
-        </p:spPr>
-        <p:txBody>
-          <a:bodyPr wrap="square" lIns="0" tIns="0" rIns="0" bIns="0" rtlCol="0" anchor="ctr"/>
-          <a:lstStyle/>
-          <a:p>
-            <a:pPr indent="0" marL="0">
-              <a:buNone/>
-            </a:pPr>
-            <a:r>
-              <a:rPr lang="en-US" sz="750" b="1" spc="200" kern="0" dirty="0">
-                <a:solidFill>
-                  <a:srgbClr val="5B5F66"/>
-                </a:solidFill>
-                <a:latin typeface="Arial" pitchFamily="34" charset="0"/>
-                <a:ea typeface="Arial" pitchFamily="34" charset="-122"/>
-                <a:cs typeface="Arial" pitchFamily="34" charset="-120"/>
-              </a:rPr>
-              <a:t>INDUSTRIES, INC.</a:t>
-            </a:r>
-            <a:endParaRPr lang="en-US" sz="750" dirty="0"/>
-          </a:p>
-        </p:txBody>
-      </p:sp>
-      <p:sp>
-        <p:nvSpPr>
-          <p:cNvPr id="7" name="Shape 5"/>
-          <p:cNvSpPr/>
-          <p:nvPr/>
-        </p:nvSpPr>
-        <p:spPr>
-          <a:xfrm>
-            <a:off x="457200" y="1371600"/>
-            <a:ext cx="502920" cy="45720"/>
-          </a:xfrm>
-          <a:prstGeom prst="rect">
-            <a:avLst/>
-          </a:prstGeom>
-          <a:solidFill>
-            <a:srgbClr val="FF002B"/>
-          </a:solidFill>
-          <a:ln/>
-        </p:spPr>
-      </p:sp>
-      <p:sp>
-        <p:nvSpPr>
-          <p:cNvPr id="8" name="Shape 6"/>
-          <p:cNvSpPr/>
-          <p:nvPr/>
-        </p:nvSpPr>
-        <p:spPr>
-          <a:xfrm>
-            <a:off x="457200" y="1371600"/>
-            <a:ext cx="45720" cy="502920"/>
-          </a:xfrm>
-          <a:prstGeom prst="rect">
-            <a:avLst/>
-          </a:prstGeom>
-          <a:solidFill>
-            <a:srgbClr val="FF002B"/>
-          </a:solidFill>
-          <a:ln/>
-        </p:spPr>
-      </p:sp>
-      <p:sp>
-        <p:nvSpPr>
-          <p:cNvPr id="9" name="Text 7"/>
-          <p:cNvSpPr txBox="1"/>
-          <p:nvPr/>
-        </p:nvSpPr>
-        <p:spPr>
-          <a:xfrm>
-            <a:off x="777240" y="1481328"/>
-            <a:ext cx="10058400" cy="320040"/>
-          </a:xfrm>
-          <a:prstGeom prst="rect">
-            <a:avLst/>
-          </a:prstGeom>
-          <a:noFill/>
-          <a:ln/>
-        </p:spPr>
-        <p:txBody>
-          <a:bodyPr wrap="square" lIns="0" tIns="0" rIns="0" bIns="0" rtlCol="0" anchor="ctr"/>
-          <a:lstStyle/>
-          <a:p>
-            <a:pPr algn="l" indent="0" marL="0">
-              <a:buNone/>
-            </a:pPr>
-            <a:r>
-              <a:rPr lang="en-US" sz="1100" b="1" spc="150" kern="0" dirty="0">
-                <a:solidFill>
-                  <a:srgbClr val="D8D9DB"/>
-                </a:solidFill>
-                <a:latin typeface="Arial" pitchFamily="34" charset="0"/>
-                <a:ea typeface="Arial" pitchFamily="34" charset="-122"/>
-                <a:cs typeface="Arial" pitchFamily="34" charset="-120"/>
-              </a:rPr>
               <a:t>RESPONSE TO REQUEST FOR INFORMATION</a:t>
             </a:r>
             <a:endParaRPr lang="en-US" sz="1100" dirty="0"/>
@@ -1469,7 +1453,7 @@
       </p:sp>
       <p:sp>
         <p:nvSpPr>
-          <p:cNvPr id="10" name="Text 8"/>
+          <p:cNvPr id="9" name="Text 6"/>
           <p:cNvSpPr txBox="1"/>
           <p:nvPr/>
         </p:nvSpPr>
@@ -1499,9 +1483,9 @@
                 <a:solidFill>
                   <a:srgbClr val="FFFFFF"/>
                 </a:solidFill>
-                <a:latin typeface="Bookman Old Style" pitchFamily="34" charset="0"/>
-                <a:ea typeface="Bookman Old Style" pitchFamily="34" charset="-122"/>
-                <a:cs typeface="Bookman Old Style" pitchFamily="34" charset="-120"/>
+                <a:latin typeface="Cambria" pitchFamily="34" charset="0"/>
+                <a:ea typeface="Cambria" pitchFamily="34" charset="-122"/>
+                <a:cs typeface="Cambria" pitchFamily="34" charset="-120"/>
               </a:rPr>
               <a:t>OFFICER SAFETY AND SURVIVAL</a:t>
             </a:r>
@@ -1519,9 +1503,9 @@
                 <a:solidFill>
                   <a:srgbClr val="FFFFFF"/>
                 </a:solidFill>
-                <a:latin typeface="Bookman Old Style" pitchFamily="34" charset="0"/>
-                <a:ea typeface="Bookman Old Style" pitchFamily="34" charset="-122"/>
-                <a:cs typeface="Bookman Old Style" pitchFamily="34" charset="-120"/>
+                <a:latin typeface="Cambria" pitchFamily="34" charset="0"/>
+                <a:ea typeface="Cambria" pitchFamily="34" charset="-122"/>
+                <a:cs typeface="Cambria" pitchFamily="34" charset="-120"/>
               </a:rPr>
               <a:t>TRAINING PROGRAM (OSSTP)</a:t>
             </a:r>
@@ -1531,7 +1515,7 @@
       </p:sp>
       <p:sp>
         <p:nvSpPr>
-          <p:cNvPr id="11" name="Text 9"/>
+          <p:cNvPr id="10" name="Text 7"/>
           <p:cNvSpPr txBox="1"/>
           <p:nvPr/>
         </p:nvSpPr>
@@ -1570,7 +1554,7 @@
       </p:sp>
       <p:sp>
         <p:nvSpPr>
-          <p:cNvPr id="12" name="Text 10"/>
+          <p:cNvPr id="11" name="Text 8"/>
           <p:cNvSpPr txBox="1"/>
           <p:nvPr/>
         </p:nvSpPr>
@@ -1597,9 +1581,9 @@
                 <a:solidFill>
                   <a:srgbClr val="FFFFFF"/>
                 </a:solidFill>
-                <a:latin typeface="Bookman Old Style" pitchFamily="34" charset="0"/>
-                <a:ea typeface="Bookman Old Style" pitchFamily="34" charset="-122"/>
-                <a:cs typeface="Bookman Old Style" pitchFamily="34" charset="-120"/>
+                <a:latin typeface="Cambria" pitchFamily="34" charset="0"/>
+                <a:ea typeface="Cambria" pitchFamily="34" charset="-122"/>
+                <a:cs typeface="Cambria" pitchFamily="34" charset="-120"/>
               </a:rPr>
               <a:t>BUILT BY OPERATORS.</a:t>
             </a:r>
@@ -1609,7 +1593,7 @@
       </p:sp>
       <p:sp>
         <p:nvSpPr>
-          <p:cNvPr id="13" name="Text 11"/>
+          <p:cNvPr id="12" name="Text 9"/>
           <p:cNvSpPr txBox="1"/>
           <p:nvPr/>
         </p:nvSpPr>
@@ -1648,7 +1632,7 @@
       </p:sp>
       <p:sp>
         <p:nvSpPr>
-          <p:cNvPr id="14" name="Shape 12"/>
+          <p:cNvPr id="13" name="Shape 10"/>
           <p:cNvSpPr/>
           <p:nvPr/>
         </p:nvSpPr>
@@ -1671,7 +1655,7 @@
       </p:sp>
       <p:sp>
         <p:nvSpPr>
-          <p:cNvPr id="15" name="Text 13"/>
+          <p:cNvPr id="14" name="Text 11"/>
           <p:cNvSpPr txBox="1"/>
           <p:nvPr/>
         </p:nvSpPr>
@@ -1710,7 +1694,7 @@
       </p:sp>
       <p:sp>
         <p:nvSpPr>
-          <p:cNvPr id="16" name="Text 14"/>
+          <p:cNvPr id="15" name="Text 12"/>
           <p:cNvSpPr txBox="1"/>
           <p:nvPr/>
         </p:nvSpPr>
@@ -1812,7 +1796,7 @@
       </p:sp>
       <p:sp>
         <p:nvSpPr>
-          <p:cNvPr id="17" name="Text 15"/>
+          <p:cNvPr id="16" name="Text 13"/>
           <p:cNvSpPr txBox="1"/>
           <p:nvPr/>
         </p:nvSpPr>
@@ -1851,7 +1835,7 @@
       </p:sp>
       <p:sp>
         <p:nvSpPr>
-          <p:cNvPr id="18" name="Text 16"/>
+          <p:cNvPr id="17" name="Text 14"/>
           <p:cNvSpPr txBox="1"/>
           <p:nvPr/>
         </p:nvSpPr>
@@ -2012,9 +1996,9 @@
                 <a:solidFill>
                   <a:srgbClr val="EBEBE9"/>
                 </a:solidFill>
-                <a:latin typeface="Bookman Old Style" pitchFamily="34" charset="0"/>
-                <a:ea typeface="Bookman Old Style" pitchFamily="34" charset="-122"/>
-                <a:cs typeface="Bookman Old Style" pitchFamily="34" charset="-120"/>
+                <a:latin typeface="Cambria" pitchFamily="34" charset="0"/>
+                <a:ea typeface="Cambria" pitchFamily="34" charset="-122"/>
+                <a:cs typeface="Cambria" pitchFamily="34" charset="-120"/>
               </a:rPr>
               <a:t>02</a:t>
             </a:r>
@@ -2022,16 +2006,138 @@
           </a:p>
         </p:txBody>
       </p:sp>
-      <p:sp>
-        <p:nvSpPr>
-          <p:cNvPr id="3" name="Shape 1"/>
+      <p:pic>
+        <p:nvPicPr>
+          <p:cNvPr id="3" name="Image 0" descr="/home/user/valletta-design-system/assets/logo/valletta-lockup.png">    </p:cNvPr>
+          <p:cNvPicPr>
+            <a:picLocks noChangeAspect="1"/>
+          </p:cNvPicPr>
+          <p:nvPr/>
+        </p:nvPicPr>
+        <p:blipFill>
+          <a:blip r:embed="rId1"/>
+          <a:stretch>
+            <a:fillRect/>
+          </a:stretch>
+        </p:blipFill>
+        <p:spPr>
+          <a:xfrm>
+            <a:off x="457200" y="365760"/>
+            <a:ext cx="1828800" cy="384048"/>
+          </a:xfrm>
+          <a:prstGeom prst="rect">
+            <a:avLst/>
+          </a:prstGeom>
+        </p:spPr>
+      </p:pic>
+      <p:sp>
+        <p:nvSpPr>
+          <p:cNvPr id="4" name="Text 1"/>
+          <p:cNvSpPr txBox="1"/>
+          <p:nvPr/>
+        </p:nvSpPr>
+        <p:spPr>
+          <a:xfrm>
+            <a:off x="457200" y="777240"/>
+            <a:ext cx="7315200" cy="320040"/>
+          </a:xfrm>
+          <a:prstGeom prst="rect">
+            <a:avLst/>
+          </a:prstGeom>
+          <a:noFill/>
+          <a:ln/>
+        </p:spPr>
+        <p:txBody>
+          <a:bodyPr wrap="square" lIns="0" tIns="0" rIns="0" bIns="0" rtlCol="0" anchor="ctr"/>
+          <a:lstStyle/>
+          <a:p>
+            <a:pPr algn="l" indent="0" marL="0">
+              <a:buNone/>
+            </a:pPr>
+            <a:r>
+              <a:rPr lang="en-US" sz="1100" b="1" spc="150" kern="0" dirty="0">
+                <a:solidFill>
+                  <a:srgbClr val="FF002B"/>
+                </a:solidFill>
+                <a:latin typeface="Arial" pitchFamily="34" charset="0"/>
+                <a:ea typeface="Arial" pitchFamily="34" charset="-122"/>
+                <a:cs typeface="Arial" pitchFamily="34" charset="-120"/>
+              </a:rPr>
+              <a:t>RFI RESPONSE — SECTIONS 1–3</a:t>
+            </a:r>
+            <a:endParaRPr lang="en-US" sz="1100" dirty="0"/>
+          </a:p>
+        </p:txBody>
+      </p:sp>
+      <p:sp>
+        <p:nvSpPr>
+          <p:cNvPr id="5" name="Text 2"/>
+          <p:cNvSpPr txBox="1"/>
+          <p:nvPr/>
+        </p:nvSpPr>
+        <p:spPr>
+          <a:xfrm>
+            <a:off x="457200" y="1097280"/>
+            <a:ext cx="11274552" cy="731520"/>
+          </a:xfrm>
+          <a:prstGeom prst="rect">
+            <a:avLst/>
+          </a:prstGeom>
+          <a:noFill/>
+          <a:ln/>
+        </p:spPr>
+        <p:txBody>
+          <a:bodyPr wrap="square" lIns="0" tIns="0" rIns="0" bIns="0" rtlCol="0" anchor="ctr"/>
+          <a:lstStyle/>
+          <a:p>
+            <a:pPr indent="0" marL="0">
+              <a:buNone/>
+            </a:pPr>
+            <a:r>
+              <a:rPr lang="en-US" sz="2700" b="1" dirty="0">
+                <a:solidFill>
+                  <a:srgbClr val="0A0A0A"/>
+                </a:solidFill>
+                <a:latin typeface="Cambria" pitchFamily="34" charset="0"/>
+                <a:ea typeface="Cambria" pitchFamily="34" charset="-122"/>
+                <a:cs typeface="Cambria" pitchFamily="34" charset="-120"/>
+              </a:rPr>
+              <a:t>Right-Fit Acquisition Path &amp; a Repeatable Curriculum Lifecycle</a:t>
+            </a:r>
+            <a:endParaRPr lang="en-US" sz="2700" dirty="0"/>
+          </a:p>
+        </p:txBody>
+      </p:sp>
+      <p:sp>
+        <p:nvSpPr>
+          <p:cNvPr id="6" name="Shape 3"/>
           <p:cNvSpPr/>
           <p:nvPr/>
         </p:nvSpPr>
         <p:spPr>
           <a:xfrm>
-            <a:off x="457200" y="384048"/>
-            <a:ext cx="310896" cy="29261"/>
+            <a:off x="457200" y="1965960"/>
+            <a:ext cx="3200400" cy="1280160"/>
+          </a:xfrm>
+          <a:prstGeom prst="rect">
+            <a:avLst/>
+          </a:prstGeom>
+          <a:solidFill>
+            <a:srgbClr val="0A0A0A"/>
+          </a:solidFill>
+          <a:ln/>
+        </p:spPr>
+      </p:sp>
+      <p:sp>
+        <p:nvSpPr>
+          <p:cNvPr id="7" name="Shape 4"/>
+          <p:cNvSpPr/>
+          <p:nvPr/>
+        </p:nvSpPr>
+        <p:spPr>
+          <a:xfrm>
+            <a:off x="457200" y="1965960"/>
+            <a:ext cx="274320" cy="29261"/>
           </a:xfrm>
           <a:prstGeom prst="rect">
             <a:avLst/>
@@ -2044,14 +2150,14 @@
       </p:sp>
       <p:sp>
         <p:nvSpPr>
-          <p:cNvPr id="4" name="Shape 2"/>
+          <p:cNvPr id="8" name="Shape 5"/>
           <p:cNvSpPr/>
           <p:nvPr/>
         </p:nvSpPr>
         <p:spPr>
           <a:xfrm>
-            <a:off x="457200" y="384048"/>
-            <a:ext cx="29261" cy="310896"/>
+            <a:off x="457200" y="1965960"/>
+            <a:ext cx="29261" cy="274320"/>
           </a:xfrm>
           <a:prstGeom prst="rect">
             <a:avLst/>
@@ -2064,14 +2170,14 @@
       </p:sp>
       <p:sp>
         <p:nvSpPr>
-          <p:cNvPr id="5" name="Text 3"/>
+          <p:cNvPr id="9" name="Text 6"/>
           <p:cNvSpPr txBox="1"/>
           <p:nvPr/>
         </p:nvSpPr>
         <p:spPr>
           <a:xfrm>
-            <a:off x="896112" y="329184"/>
-            <a:ext cx="2926080" cy="292608"/>
+            <a:off x="685800" y="2112264"/>
+            <a:ext cx="2743200" cy="274320"/>
           </a:xfrm>
           <a:prstGeom prst="rect">
             <a:avLst/>
@@ -2087,30 +2193,30 @@
               <a:buNone/>
             </a:pPr>
             <a:r>
-              <a:rPr lang="en-US" sz="1500" b="1" spc="200" kern="0" dirty="0">
-                <a:solidFill>
-                  <a:srgbClr val="0A0A0A"/>
+              <a:rPr lang="en-US" sz="1000" b="1" spc="100" kern="0" dirty="0">
+                <a:solidFill>
+                  <a:srgbClr val="FF002B"/>
                 </a:solidFill>
                 <a:latin typeface="Arial" pitchFamily="34" charset="0"/>
                 <a:ea typeface="Arial" pitchFamily="34" charset="-122"/>
                 <a:cs typeface="Arial" pitchFamily="34" charset="-120"/>
               </a:rPr>
-              <a:t>VALLETTA</a:t>
-            </a:r>
-            <a:endParaRPr lang="en-US" sz="1500" dirty="0"/>
-          </a:p>
-        </p:txBody>
-      </p:sp>
-      <p:sp>
-        <p:nvSpPr>
-          <p:cNvPr id="6" name="Text 4"/>
+              <a:t>RECOMMENDED NAICS</a:t>
+            </a:r>
+            <a:endParaRPr lang="en-US" sz="1000" dirty="0"/>
+          </a:p>
+        </p:txBody>
+      </p:sp>
+      <p:sp>
+        <p:nvSpPr>
+          <p:cNvPr id="10" name="Text 7"/>
           <p:cNvSpPr txBox="1"/>
           <p:nvPr/>
         </p:nvSpPr>
         <p:spPr>
           <a:xfrm>
-            <a:off x="896112" y="603504"/>
-            <a:ext cx="2926080" cy="219456"/>
+            <a:off x="685800" y="2368296"/>
+            <a:ext cx="2743200" cy="475488"/>
           </a:xfrm>
           <a:prstGeom prst="rect">
             <a:avLst/>
@@ -2126,30 +2232,168 @@
               <a:buNone/>
             </a:pPr>
             <a:r>
-              <a:rPr lang="en-US" sz="750" b="1" spc="200" kern="0" dirty="0">
-                <a:solidFill>
-                  <a:srgbClr val="5B5F66"/>
+              <a:rPr lang="en-US" sz="2400" b="1" dirty="0">
+                <a:solidFill>
+                  <a:srgbClr val="FFFFFF"/>
+                </a:solidFill>
+                <a:latin typeface="Cambria" pitchFamily="34" charset="0"/>
+                <a:ea typeface="Cambria" pitchFamily="34" charset="-122"/>
+                <a:cs typeface="Cambria" pitchFamily="34" charset="-120"/>
+              </a:rPr>
+              <a:t>611430</a:t>
+            </a:r>
+            <a:endParaRPr lang="en-US" sz="2400" dirty="0"/>
+          </a:p>
+        </p:txBody>
+      </p:sp>
+      <p:sp>
+        <p:nvSpPr>
+          <p:cNvPr id="11" name="Text 8"/>
+          <p:cNvSpPr txBox="1"/>
+          <p:nvPr/>
+        </p:nvSpPr>
+        <p:spPr>
+          <a:xfrm>
+            <a:off x="685800" y="2843784"/>
+            <a:ext cx="2743200" cy="365760"/>
+          </a:xfrm>
+          <a:prstGeom prst="rect">
+            <a:avLst/>
+          </a:prstGeom>
+          <a:noFill/>
+          <a:ln/>
+        </p:spPr>
+        <p:txBody>
+          <a:bodyPr wrap="square" lIns="0" tIns="0" rIns="0" bIns="0" rtlCol="0" anchor="ctr"/>
+          <a:lstStyle/>
+          <a:p>
+            <a:pPr indent="0" marL="0">
+              <a:buNone/>
+            </a:pPr>
+            <a:r>
+              <a:rPr lang="en-US" sz="1050" dirty="0">
+                <a:solidFill>
+                  <a:srgbClr val="D8D9DB"/>
+                </a:solidFill>
+                <a:latin typeface="Calibri" pitchFamily="34" charset="0"/>
+                <a:ea typeface="Calibri" pitchFamily="34" charset="-122"/>
+                <a:cs typeface="Calibri" pitchFamily="34" charset="-120"/>
+              </a:rPr>
+              <a:t>Professional &amp; Management Development Training</a:t>
+            </a:r>
+            <a:endParaRPr lang="en-US" sz="1050" dirty="0"/>
+          </a:p>
+        </p:txBody>
+      </p:sp>
+      <p:sp>
+        <p:nvSpPr>
+          <p:cNvPr id="12" name="Shape 9"/>
+          <p:cNvSpPr/>
+          <p:nvPr/>
+        </p:nvSpPr>
+        <p:spPr>
+          <a:xfrm>
+            <a:off x="3794760" y="1965960"/>
+            <a:ext cx="3200400" cy="1280160"/>
+          </a:xfrm>
+          <a:prstGeom prst="rect">
+            <a:avLst/>
+          </a:prstGeom>
+          <a:solidFill>
+            <a:srgbClr val="0A0A0A"/>
+          </a:solidFill>
+          <a:ln/>
+        </p:spPr>
+      </p:sp>
+      <p:sp>
+        <p:nvSpPr>
+          <p:cNvPr id="13" name="Shape 10"/>
+          <p:cNvSpPr/>
+          <p:nvPr/>
+        </p:nvSpPr>
+        <p:spPr>
+          <a:xfrm>
+            <a:off x="3794760" y="1965960"/>
+            <a:ext cx="274320" cy="29261"/>
+          </a:xfrm>
+          <a:prstGeom prst="rect">
+            <a:avLst/>
+          </a:prstGeom>
+          <a:solidFill>
+            <a:srgbClr val="FF002B"/>
+          </a:solidFill>
+          <a:ln/>
+        </p:spPr>
+      </p:sp>
+      <p:sp>
+        <p:nvSpPr>
+          <p:cNvPr id="14" name="Shape 11"/>
+          <p:cNvSpPr/>
+          <p:nvPr/>
+        </p:nvSpPr>
+        <p:spPr>
+          <a:xfrm>
+            <a:off x="3794760" y="1965960"/>
+            <a:ext cx="29261" cy="274320"/>
+          </a:xfrm>
+          <a:prstGeom prst="rect">
+            <a:avLst/>
+          </a:prstGeom>
+          <a:solidFill>
+            <a:srgbClr val="FF002B"/>
+          </a:solidFill>
+          <a:ln/>
+        </p:spPr>
+      </p:sp>
+      <p:sp>
+        <p:nvSpPr>
+          <p:cNvPr id="15" name="Text 12"/>
+          <p:cNvSpPr txBox="1"/>
+          <p:nvPr/>
+        </p:nvSpPr>
+        <p:spPr>
+          <a:xfrm>
+            <a:off x="4023360" y="2112264"/>
+            <a:ext cx="2743200" cy="274320"/>
+          </a:xfrm>
+          <a:prstGeom prst="rect">
+            <a:avLst/>
+          </a:prstGeom>
+          <a:noFill/>
+          <a:ln/>
+        </p:spPr>
+        <p:txBody>
+          <a:bodyPr wrap="square" lIns="0" tIns="0" rIns="0" bIns="0" rtlCol="0" anchor="ctr"/>
+          <a:lstStyle/>
+          <a:p>
+            <a:pPr indent="0" marL="0">
+              <a:buNone/>
+            </a:pPr>
+            <a:r>
+              <a:rPr lang="en-US" sz="1000" b="1" spc="100" kern="0" dirty="0">
+                <a:solidFill>
+                  <a:srgbClr val="FF002B"/>
                 </a:solidFill>
                 <a:latin typeface="Arial" pitchFamily="34" charset="0"/>
                 <a:ea typeface="Arial" pitchFamily="34" charset="-122"/>
                 <a:cs typeface="Arial" pitchFamily="34" charset="-120"/>
               </a:rPr>
-              <a:t>INDUSTRIES, INC.</a:t>
-            </a:r>
-            <a:endParaRPr lang="en-US" sz="750" dirty="0"/>
-          </a:p>
-        </p:txBody>
-      </p:sp>
-      <p:sp>
-        <p:nvSpPr>
-          <p:cNvPr id="7" name="Text 5"/>
+              <a:t>RECOMMENDED PSC</a:t>
+            </a:r>
+            <a:endParaRPr lang="en-US" sz="1000" dirty="0"/>
+          </a:p>
+        </p:txBody>
+      </p:sp>
+      <p:sp>
+        <p:nvSpPr>
+          <p:cNvPr id="16" name="Text 13"/>
           <p:cNvSpPr txBox="1"/>
           <p:nvPr/>
         </p:nvSpPr>
         <p:spPr>
           <a:xfrm>
-            <a:off x="457200" y="777240"/>
-            <a:ext cx="7315200" cy="320040"/>
+            <a:off x="4023360" y="2368296"/>
+            <a:ext cx="2743200" cy="475488"/>
           </a:xfrm>
           <a:prstGeom prst="rect">
             <a:avLst/>
@@ -2161,11 +2405,89 @@
           <a:bodyPr wrap="square" lIns="0" tIns="0" rIns="0" bIns="0" rtlCol="0" anchor="ctr"/>
           <a:lstStyle/>
           <a:p>
-            <a:pPr algn="l" indent="0" marL="0">
-              <a:buNone/>
-            </a:pPr>
-            <a:r>
-              <a:rPr lang="en-US" sz="1100" b="1" spc="150" kern="0" dirty="0">
+            <a:pPr indent="0" marL="0">
+              <a:buNone/>
+            </a:pPr>
+            <a:r>
+              <a:rPr lang="en-US" sz="2400" b="1" dirty="0">
+                <a:solidFill>
+                  <a:srgbClr val="FFFFFF"/>
+                </a:solidFill>
+                <a:latin typeface="Cambria" pitchFamily="34" charset="0"/>
+                <a:ea typeface="Cambria" pitchFamily="34" charset="-122"/>
+                <a:cs typeface="Cambria" pitchFamily="34" charset="-120"/>
+              </a:rPr>
+              <a:t>U008</a:t>
+            </a:r>
+            <a:endParaRPr lang="en-US" sz="2400" dirty="0"/>
+          </a:p>
+        </p:txBody>
+      </p:sp>
+      <p:sp>
+        <p:nvSpPr>
+          <p:cNvPr id="17" name="Text 14"/>
+          <p:cNvSpPr txBox="1"/>
+          <p:nvPr/>
+        </p:nvSpPr>
+        <p:spPr>
+          <a:xfrm>
+            <a:off x="4023360" y="2843784"/>
+            <a:ext cx="2743200" cy="365760"/>
+          </a:xfrm>
+          <a:prstGeom prst="rect">
+            <a:avLst/>
+          </a:prstGeom>
+          <a:noFill/>
+          <a:ln/>
+        </p:spPr>
+        <p:txBody>
+          <a:bodyPr wrap="square" lIns="0" tIns="0" rIns="0" bIns="0" rtlCol="0" anchor="ctr"/>
+          <a:lstStyle/>
+          <a:p>
+            <a:pPr indent="0" marL="0">
+              <a:buNone/>
+            </a:pPr>
+            <a:r>
+              <a:rPr lang="en-US" sz="1050" dirty="0">
+                <a:solidFill>
+                  <a:srgbClr val="D8D9DB"/>
+                </a:solidFill>
+                <a:latin typeface="Calibri" pitchFamily="34" charset="0"/>
+                <a:ea typeface="Calibri" pitchFamily="34" charset="-122"/>
+                <a:cs typeface="Calibri" pitchFamily="34" charset="-120"/>
+              </a:rPr>
+              <a:t>Education/Training — Training/Curriculum Development</a:t>
+            </a:r>
+            <a:endParaRPr lang="en-US" sz="1050" dirty="0"/>
+          </a:p>
+        </p:txBody>
+      </p:sp>
+      <p:sp>
+        <p:nvSpPr>
+          <p:cNvPr id="18" name="Text 15"/>
+          <p:cNvSpPr txBox="1"/>
+          <p:nvPr/>
+        </p:nvSpPr>
+        <p:spPr>
+          <a:xfrm>
+            <a:off x="7178040" y="1965960"/>
+            <a:ext cx="4553712" cy="274320"/>
+          </a:xfrm>
+          <a:prstGeom prst="rect">
+            <a:avLst/>
+          </a:prstGeom>
+          <a:noFill/>
+          <a:ln/>
+        </p:spPr>
+        <p:txBody>
+          <a:bodyPr wrap="square" lIns="0" tIns="0" rIns="0" bIns="0" rtlCol="0" anchor="ctr"/>
+          <a:lstStyle/>
+          <a:p>
+            <a:pPr indent="0" marL="0">
+              <a:buNone/>
+            </a:pPr>
+            <a:r>
+              <a:rPr lang="en-US" sz="1000" b="1" spc="100" kern="0" dirty="0">
                 <a:solidFill>
                   <a:srgbClr val="FF002B"/>
                 </a:solidFill>
@@ -2173,145 +2495,7 @@
                 <a:ea typeface="Arial" pitchFamily="34" charset="-122"/>
                 <a:cs typeface="Arial" pitchFamily="34" charset="-120"/>
               </a:rPr>
-              <a:t>RFI RESPONSE — SECTIONS 1–3</a:t>
-            </a:r>
-            <a:endParaRPr lang="en-US" sz="1100" dirty="0"/>
-          </a:p>
-        </p:txBody>
-      </p:sp>
-      <p:sp>
-        <p:nvSpPr>
-          <p:cNvPr id="8" name="Text 6"/>
-          <p:cNvSpPr txBox="1"/>
-          <p:nvPr/>
-        </p:nvSpPr>
-        <p:spPr>
-          <a:xfrm>
-            <a:off x="457200" y="1097280"/>
-            <a:ext cx="11274552" cy="731520"/>
-          </a:xfrm>
-          <a:prstGeom prst="rect">
-            <a:avLst/>
-          </a:prstGeom>
-          <a:noFill/>
-          <a:ln/>
-        </p:spPr>
-        <p:txBody>
-          <a:bodyPr wrap="square" lIns="0" tIns="0" rIns="0" bIns="0" rtlCol="0" anchor="ctr"/>
-          <a:lstStyle/>
-          <a:p>
-            <a:pPr indent="0" marL="0">
-              <a:buNone/>
-            </a:pPr>
-            <a:r>
-              <a:rPr lang="en-US" sz="2700" b="1" dirty="0">
-                <a:solidFill>
-                  <a:srgbClr val="0A0A0A"/>
-                </a:solidFill>
-                <a:latin typeface="Bookman Old Style" pitchFamily="34" charset="0"/>
-                <a:ea typeface="Bookman Old Style" pitchFamily="34" charset="-122"/>
-                <a:cs typeface="Bookman Old Style" pitchFamily="34" charset="-120"/>
-              </a:rPr>
-              <a:t>Right-Fit Acquisition Path &amp; a Repeatable Curriculum Lifecycle</a:t>
-            </a:r>
-            <a:endParaRPr lang="en-US" sz="2700" dirty="0"/>
-          </a:p>
-        </p:txBody>
-      </p:sp>
-      <p:sp>
-        <p:nvSpPr>
-          <p:cNvPr id="9" name="Shape 7"/>
-          <p:cNvSpPr/>
-          <p:nvPr/>
-        </p:nvSpPr>
-        <p:spPr>
-          <a:xfrm>
-            <a:off x="457200" y="1965960"/>
-            <a:ext cx="3200400" cy="1280160"/>
-          </a:xfrm>
-          <a:prstGeom prst="rect">
-            <a:avLst/>
-          </a:prstGeom>
-          <a:solidFill>
-            <a:srgbClr val="0A0A0A"/>
-          </a:solidFill>
-          <a:ln/>
-        </p:spPr>
-      </p:sp>
-      <p:sp>
-        <p:nvSpPr>
-          <p:cNvPr id="10" name="Shape 8"/>
-          <p:cNvSpPr/>
-          <p:nvPr/>
-        </p:nvSpPr>
-        <p:spPr>
-          <a:xfrm>
-            <a:off x="457200" y="1965960"/>
-            <a:ext cx="274320" cy="29261"/>
-          </a:xfrm>
-          <a:prstGeom prst="rect">
-            <a:avLst/>
-          </a:prstGeom>
-          <a:solidFill>
-            <a:srgbClr val="FF002B"/>
-          </a:solidFill>
-          <a:ln/>
-        </p:spPr>
-      </p:sp>
-      <p:sp>
-        <p:nvSpPr>
-          <p:cNvPr id="11" name="Shape 9"/>
-          <p:cNvSpPr/>
-          <p:nvPr/>
-        </p:nvSpPr>
-        <p:spPr>
-          <a:xfrm>
-            <a:off x="457200" y="1965960"/>
-            <a:ext cx="29261" cy="274320"/>
-          </a:xfrm>
-          <a:prstGeom prst="rect">
-            <a:avLst/>
-          </a:prstGeom>
-          <a:solidFill>
-            <a:srgbClr val="FF002B"/>
-          </a:solidFill>
-          <a:ln/>
-        </p:spPr>
-      </p:sp>
-      <p:sp>
-        <p:nvSpPr>
-          <p:cNvPr id="12" name="Text 10"/>
-          <p:cNvSpPr txBox="1"/>
-          <p:nvPr/>
-        </p:nvSpPr>
-        <p:spPr>
-          <a:xfrm>
-            <a:off x="685800" y="2112264"/>
-            <a:ext cx="2743200" cy="274320"/>
-          </a:xfrm>
-          <a:prstGeom prst="rect">
-            <a:avLst/>
-          </a:prstGeom>
-          <a:noFill/>
-          <a:ln/>
-        </p:spPr>
-        <p:txBody>
-          <a:bodyPr wrap="square" lIns="0" tIns="0" rIns="0" bIns="0" rtlCol="0" anchor="ctr"/>
-          <a:lstStyle/>
-          <a:p>
-            <a:pPr indent="0" marL="0">
-              <a:buNone/>
-            </a:pPr>
-            <a:r>
-              <a:rPr lang="en-US" sz="1000" b="1" spc="100" kern="0" dirty="0">
-                <a:solidFill>
-                  <a:srgbClr val="FF002B"/>
-                </a:solidFill>
-                <a:latin typeface="Arial" pitchFamily="34" charset="0"/>
-                <a:ea typeface="Arial" pitchFamily="34" charset="-122"/>
-                <a:cs typeface="Arial" pitchFamily="34" charset="-120"/>
-              </a:rPr>
-              <a:t>RECOMMENDED NAICS</a:t>
+              <a:t>WHY THIS APPROACH FITS</a:t>
             </a:r>
             <a:endParaRPr lang="en-US" sz="1000" dirty="0"/>
           </a:p>
@@ -2319,301 +2503,7 @@
       </p:sp>
       <p:sp>
         <p:nvSpPr>
-          <p:cNvPr id="13" name="Text 11"/>
-          <p:cNvSpPr txBox="1"/>
-          <p:nvPr/>
-        </p:nvSpPr>
-        <p:spPr>
-          <a:xfrm>
-            <a:off x="685800" y="2368296"/>
-            <a:ext cx="2743200" cy="475488"/>
-          </a:xfrm>
-          <a:prstGeom prst="rect">
-            <a:avLst/>
-          </a:prstGeom>
-          <a:noFill/>
-          <a:ln/>
-        </p:spPr>
-        <p:txBody>
-          <a:bodyPr wrap="square" lIns="0" tIns="0" rIns="0" bIns="0" rtlCol="0" anchor="ctr"/>
-          <a:lstStyle/>
-          <a:p>
-            <a:pPr indent="0" marL="0">
-              <a:buNone/>
-            </a:pPr>
-            <a:r>
-              <a:rPr lang="en-US" sz="2400" b="1" dirty="0">
-                <a:solidFill>
-                  <a:srgbClr val="FFFFFF"/>
-                </a:solidFill>
-                <a:latin typeface="Bookman Old Style" pitchFamily="34" charset="0"/>
-                <a:ea typeface="Bookman Old Style" pitchFamily="34" charset="-122"/>
-                <a:cs typeface="Bookman Old Style" pitchFamily="34" charset="-120"/>
-              </a:rPr>
-              <a:t>611430</a:t>
-            </a:r>
-            <a:endParaRPr lang="en-US" sz="2400" dirty="0"/>
-          </a:p>
-        </p:txBody>
-      </p:sp>
-      <p:sp>
-        <p:nvSpPr>
-          <p:cNvPr id="14" name="Text 12"/>
-          <p:cNvSpPr txBox="1"/>
-          <p:nvPr/>
-        </p:nvSpPr>
-        <p:spPr>
-          <a:xfrm>
-            <a:off x="685800" y="2843784"/>
-            <a:ext cx="2743200" cy="365760"/>
-          </a:xfrm>
-          <a:prstGeom prst="rect">
-            <a:avLst/>
-          </a:prstGeom>
-          <a:noFill/>
-          <a:ln/>
-        </p:spPr>
-        <p:txBody>
-          <a:bodyPr wrap="square" lIns="0" tIns="0" rIns="0" bIns="0" rtlCol="0" anchor="ctr"/>
-          <a:lstStyle/>
-          <a:p>
-            <a:pPr indent="0" marL="0">
-              <a:buNone/>
-            </a:pPr>
-            <a:r>
-              <a:rPr lang="en-US" sz="1050" dirty="0">
-                <a:solidFill>
-                  <a:srgbClr val="D8D9DB"/>
-                </a:solidFill>
-                <a:latin typeface="Calibri" pitchFamily="34" charset="0"/>
-                <a:ea typeface="Calibri" pitchFamily="34" charset="-122"/>
-                <a:cs typeface="Calibri" pitchFamily="34" charset="-120"/>
-              </a:rPr>
-              <a:t>Professional &amp; Management Development Training</a:t>
-            </a:r>
-            <a:endParaRPr lang="en-US" sz="1050" dirty="0"/>
-          </a:p>
-        </p:txBody>
-      </p:sp>
-      <p:sp>
-        <p:nvSpPr>
-          <p:cNvPr id="15" name="Shape 13"/>
-          <p:cNvSpPr/>
-          <p:nvPr/>
-        </p:nvSpPr>
-        <p:spPr>
-          <a:xfrm>
-            <a:off x="3794760" y="1965960"/>
-            <a:ext cx="3200400" cy="1280160"/>
-          </a:xfrm>
-          <a:prstGeom prst="rect">
-            <a:avLst/>
-          </a:prstGeom>
-          <a:solidFill>
-            <a:srgbClr val="0A0A0A"/>
-          </a:solidFill>
-          <a:ln/>
-        </p:spPr>
-      </p:sp>
-      <p:sp>
-        <p:nvSpPr>
-          <p:cNvPr id="16" name="Shape 14"/>
-          <p:cNvSpPr/>
-          <p:nvPr/>
-        </p:nvSpPr>
-        <p:spPr>
-          <a:xfrm>
-            <a:off x="3794760" y="1965960"/>
-            <a:ext cx="274320" cy="29261"/>
-          </a:xfrm>
-          <a:prstGeom prst="rect">
-            <a:avLst/>
-          </a:prstGeom>
-          <a:solidFill>
-            <a:srgbClr val="FF002B"/>
-          </a:solidFill>
-          <a:ln/>
-        </p:spPr>
-      </p:sp>
-      <p:sp>
-        <p:nvSpPr>
-          <p:cNvPr id="17" name="Shape 15"/>
-          <p:cNvSpPr/>
-          <p:nvPr/>
-        </p:nvSpPr>
-        <p:spPr>
-          <a:xfrm>
-            <a:off x="3794760" y="1965960"/>
-            <a:ext cx="29261" cy="274320"/>
-          </a:xfrm>
-          <a:prstGeom prst="rect">
-            <a:avLst/>
-          </a:prstGeom>
-          <a:solidFill>
-            <a:srgbClr val="FF002B"/>
-          </a:solidFill>
-          <a:ln/>
-        </p:spPr>
-      </p:sp>
-      <p:sp>
-        <p:nvSpPr>
-          <p:cNvPr id="18" name="Text 16"/>
-          <p:cNvSpPr txBox="1"/>
-          <p:nvPr/>
-        </p:nvSpPr>
-        <p:spPr>
-          <a:xfrm>
-            <a:off x="4023360" y="2112264"/>
-            <a:ext cx="2743200" cy="274320"/>
-          </a:xfrm>
-          <a:prstGeom prst="rect">
-            <a:avLst/>
-          </a:prstGeom>
-          <a:noFill/>
-          <a:ln/>
-        </p:spPr>
-        <p:txBody>
-          <a:bodyPr wrap="square" lIns="0" tIns="0" rIns="0" bIns="0" rtlCol="0" anchor="ctr"/>
-          <a:lstStyle/>
-          <a:p>
-            <a:pPr indent="0" marL="0">
-              <a:buNone/>
-            </a:pPr>
-            <a:r>
-              <a:rPr lang="en-US" sz="1000" b="1" spc="100" kern="0" dirty="0">
-                <a:solidFill>
-                  <a:srgbClr val="FF002B"/>
-                </a:solidFill>
-                <a:latin typeface="Arial" pitchFamily="34" charset="0"/>
-                <a:ea typeface="Arial" pitchFamily="34" charset="-122"/>
-                <a:cs typeface="Arial" pitchFamily="34" charset="-120"/>
-              </a:rPr>
-              <a:t>RECOMMENDED PSC</a:t>
-            </a:r>
-            <a:endParaRPr lang="en-US" sz="1000" dirty="0"/>
-          </a:p>
-        </p:txBody>
-      </p:sp>
-      <p:sp>
-        <p:nvSpPr>
-          <p:cNvPr id="19" name="Text 17"/>
-          <p:cNvSpPr txBox="1"/>
-          <p:nvPr/>
-        </p:nvSpPr>
-        <p:spPr>
-          <a:xfrm>
-            <a:off x="4023360" y="2368296"/>
-            <a:ext cx="2743200" cy="475488"/>
-          </a:xfrm>
-          <a:prstGeom prst="rect">
-            <a:avLst/>
-          </a:prstGeom>
-          <a:noFill/>
-          <a:ln/>
-        </p:spPr>
-        <p:txBody>
-          <a:bodyPr wrap="square" lIns="0" tIns="0" rIns="0" bIns="0" rtlCol="0" anchor="ctr"/>
-          <a:lstStyle/>
-          <a:p>
-            <a:pPr indent="0" marL="0">
-              <a:buNone/>
-            </a:pPr>
-            <a:r>
-              <a:rPr lang="en-US" sz="2400" b="1" dirty="0">
-                <a:solidFill>
-                  <a:srgbClr val="FFFFFF"/>
-                </a:solidFill>
-                <a:latin typeface="Bookman Old Style" pitchFamily="34" charset="0"/>
-                <a:ea typeface="Bookman Old Style" pitchFamily="34" charset="-122"/>
-                <a:cs typeface="Bookman Old Style" pitchFamily="34" charset="-120"/>
-              </a:rPr>
-              <a:t>U008</a:t>
-            </a:r>
-            <a:endParaRPr lang="en-US" sz="2400" dirty="0"/>
-          </a:p>
-        </p:txBody>
-      </p:sp>
-      <p:sp>
-        <p:nvSpPr>
-          <p:cNvPr id="20" name="Text 18"/>
-          <p:cNvSpPr txBox="1"/>
-          <p:nvPr/>
-        </p:nvSpPr>
-        <p:spPr>
-          <a:xfrm>
-            <a:off x="4023360" y="2843784"/>
-            <a:ext cx="2743200" cy="365760"/>
-          </a:xfrm>
-          <a:prstGeom prst="rect">
-            <a:avLst/>
-          </a:prstGeom>
-          <a:noFill/>
-          <a:ln/>
-        </p:spPr>
-        <p:txBody>
-          <a:bodyPr wrap="square" lIns="0" tIns="0" rIns="0" bIns="0" rtlCol="0" anchor="ctr"/>
-          <a:lstStyle/>
-          <a:p>
-            <a:pPr indent="0" marL="0">
-              <a:buNone/>
-            </a:pPr>
-            <a:r>
-              <a:rPr lang="en-US" sz="1050" dirty="0">
-                <a:solidFill>
-                  <a:srgbClr val="D8D9DB"/>
-                </a:solidFill>
-                <a:latin typeface="Calibri" pitchFamily="34" charset="0"/>
-                <a:ea typeface="Calibri" pitchFamily="34" charset="-122"/>
-                <a:cs typeface="Calibri" pitchFamily="34" charset="-120"/>
-              </a:rPr>
-              <a:t>Education/Training — Training/Curriculum Development</a:t>
-            </a:r>
-            <a:endParaRPr lang="en-US" sz="1050" dirty="0"/>
-          </a:p>
-        </p:txBody>
-      </p:sp>
-      <p:sp>
-        <p:nvSpPr>
-          <p:cNvPr id="21" name="Text 19"/>
-          <p:cNvSpPr txBox="1"/>
-          <p:nvPr/>
-        </p:nvSpPr>
-        <p:spPr>
-          <a:xfrm>
-            <a:off x="7178040" y="1965960"/>
-            <a:ext cx="4553712" cy="274320"/>
-          </a:xfrm>
-          <a:prstGeom prst="rect">
-            <a:avLst/>
-          </a:prstGeom>
-          <a:noFill/>
-          <a:ln/>
-        </p:spPr>
-        <p:txBody>
-          <a:bodyPr wrap="square" lIns="0" tIns="0" rIns="0" bIns="0" rtlCol="0" anchor="ctr"/>
-          <a:lstStyle/>
-          <a:p>
-            <a:pPr indent="0" marL="0">
-              <a:buNone/>
-            </a:pPr>
-            <a:r>
-              <a:rPr lang="en-US" sz="1000" b="1" spc="100" kern="0" dirty="0">
-                <a:solidFill>
-                  <a:srgbClr val="FF002B"/>
-                </a:solidFill>
-                <a:latin typeface="Arial" pitchFamily="34" charset="0"/>
-                <a:ea typeface="Arial" pitchFamily="34" charset="-122"/>
-                <a:cs typeface="Arial" pitchFamily="34" charset="-120"/>
-              </a:rPr>
-              <a:t>WHY THIS APPROACH FITS</a:t>
-            </a:r>
-            <a:endParaRPr lang="en-US" sz="1000" dirty="0"/>
-          </a:p>
-        </p:txBody>
-      </p:sp>
-      <p:sp>
-        <p:nvSpPr>
-          <p:cNvPr id="22" name="Text 20"/>
+          <p:cNvPr id="19" name="Text 16"/>
           <p:cNvSpPr txBox="1"/>
           <p:nvPr/>
         </p:nvSpPr>
@@ -2683,7 +2573,7 @@
       </p:sp>
       <p:sp>
         <p:nvSpPr>
-          <p:cNvPr id="23" name="Text 21"/>
+          <p:cNvPr id="20" name="Text 17"/>
           <p:cNvSpPr txBox="1"/>
           <p:nvPr/>
         </p:nvSpPr>
@@ -2722,7 +2612,7 @@
       </p:sp>
       <p:sp>
         <p:nvSpPr>
-          <p:cNvPr id="24" name="Shape 22"/>
+          <p:cNvPr id="21" name="Shape 18"/>
           <p:cNvSpPr/>
           <p:nvPr/>
         </p:nvSpPr>
@@ -2747,7 +2637,7 @@
       </p:sp>
       <p:sp>
         <p:nvSpPr>
-          <p:cNvPr id="25" name="Shape 23"/>
+          <p:cNvPr id="22" name="Shape 19"/>
           <p:cNvSpPr/>
           <p:nvPr/>
         </p:nvSpPr>
@@ -2767,7 +2657,7 @@
       </p:sp>
       <p:sp>
         <p:nvSpPr>
-          <p:cNvPr id="26" name="Text 24"/>
+          <p:cNvPr id="23" name="Text 20"/>
           <p:cNvSpPr txBox="1"/>
           <p:nvPr/>
         </p:nvSpPr>
@@ -2806,7 +2696,7 @@
       </p:sp>
       <p:sp>
         <p:nvSpPr>
-          <p:cNvPr id="27" name="Text 25"/>
+          <p:cNvPr id="24" name="Text 21"/>
           <p:cNvSpPr txBox="1"/>
           <p:nvPr/>
         </p:nvSpPr>
@@ -2848,7 +2738,7 @@
       </p:sp>
       <p:sp>
         <p:nvSpPr>
-          <p:cNvPr id="28" name="Shape 26"/>
+          <p:cNvPr id="25" name="Shape 22"/>
           <p:cNvSpPr/>
           <p:nvPr/>
         </p:nvSpPr>
@@ -2873,7 +2763,7 @@
       </p:sp>
       <p:sp>
         <p:nvSpPr>
-          <p:cNvPr id="29" name="Shape 27"/>
+          <p:cNvPr id="26" name="Shape 23"/>
           <p:cNvSpPr/>
           <p:nvPr/>
         </p:nvSpPr>
@@ -2893,7 +2783,7 @@
       </p:sp>
       <p:sp>
         <p:nvSpPr>
-          <p:cNvPr id="30" name="Text 28"/>
+          <p:cNvPr id="27" name="Text 24"/>
           <p:cNvSpPr txBox="1"/>
           <p:nvPr/>
         </p:nvSpPr>
@@ -2932,7 +2822,7 @@
       </p:sp>
       <p:sp>
         <p:nvSpPr>
-          <p:cNvPr id="31" name="Text 29"/>
+          <p:cNvPr id="28" name="Text 25"/>
           <p:cNvSpPr txBox="1"/>
           <p:nvPr/>
         </p:nvSpPr>
@@ -2974,7 +2864,7 @@
       </p:sp>
       <p:sp>
         <p:nvSpPr>
-          <p:cNvPr id="32" name="Shape 30"/>
+          <p:cNvPr id="29" name="Shape 26"/>
           <p:cNvSpPr/>
           <p:nvPr/>
         </p:nvSpPr>
@@ -2999,7 +2889,7 @@
       </p:sp>
       <p:sp>
         <p:nvSpPr>
-          <p:cNvPr id="33" name="Shape 31"/>
+          <p:cNvPr id="30" name="Shape 27"/>
           <p:cNvSpPr/>
           <p:nvPr/>
         </p:nvSpPr>
@@ -3019,7 +2909,7 @@
       </p:sp>
       <p:sp>
         <p:nvSpPr>
-          <p:cNvPr id="34" name="Text 32"/>
+          <p:cNvPr id="31" name="Text 28"/>
           <p:cNvSpPr txBox="1"/>
           <p:nvPr/>
         </p:nvSpPr>
@@ -3058,7 +2948,7 @@
       </p:sp>
       <p:sp>
         <p:nvSpPr>
-          <p:cNvPr id="35" name="Text 33"/>
+          <p:cNvPr id="32" name="Text 29"/>
           <p:cNvSpPr txBox="1"/>
           <p:nvPr/>
         </p:nvSpPr>
@@ -3100,7 +2990,7 @@
       </p:sp>
       <p:sp>
         <p:nvSpPr>
-          <p:cNvPr id="36" name="Shape 34"/>
+          <p:cNvPr id="33" name="Shape 30"/>
           <p:cNvSpPr/>
           <p:nvPr/>
         </p:nvSpPr>
@@ -3125,7 +3015,7 @@
       </p:sp>
       <p:sp>
         <p:nvSpPr>
-          <p:cNvPr id="37" name="Shape 35"/>
+          <p:cNvPr id="34" name="Shape 31"/>
           <p:cNvSpPr/>
           <p:nvPr/>
         </p:nvSpPr>
@@ -3145,7 +3035,7 @@
       </p:sp>
       <p:sp>
         <p:nvSpPr>
-          <p:cNvPr id="38" name="Text 36"/>
+          <p:cNvPr id="35" name="Text 32"/>
           <p:cNvSpPr txBox="1"/>
           <p:nvPr/>
         </p:nvSpPr>
@@ -3184,7 +3074,7 @@
       </p:sp>
       <p:sp>
         <p:nvSpPr>
-          <p:cNvPr id="39" name="Text 37"/>
+          <p:cNvPr id="36" name="Text 33"/>
           <p:cNvSpPr txBox="1"/>
           <p:nvPr/>
         </p:nvSpPr>
@@ -3226,7 +3116,7 @@
       </p:sp>
       <p:sp>
         <p:nvSpPr>
-          <p:cNvPr id="40" name="Shape 38"/>
+          <p:cNvPr id="37" name="Shape 34"/>
           <p:cNvSpPr/>
           <p:nvPr/>
         </p:nvSpPr>
@@ -3251,7 +3141,7 @@
       </p:sp>
       <p:sp>
         <p:nvSpPr>
-          <p:cNvPr id="41" name="Shape 39"/>
+          <p:cNvPr id="38" name="Shape 35"/>
           <p:cNvSpPr/>
           <p:nvPr/>
         </p:nvSpPr>
@@ -3271,7 +3161,7 @@
       </p:sp>
       <p:sp>
         <p:nvSpPr>
-          <p:cNvPr id="42" name="Text 40"/>
+          <p:cNvPr id="39" name="Text 36"/>
           <p:cNvSpPr txBox="1"/>
           <p:nvPr/>
         </p:nvSpPr>
@@ -3310,7 +3200,7 @@
       </p:sp>
       <p:sp>
         <p:nvSpPr>
-          <p:cNvPr id="43" name="Text 41"/>
+          <p:cNvPr id="40" name="Text 37"/>
           <p:cNvSpPr txBox="1"/>
           <p:nvPr/>
         </p:nvSpPr>
@@ -3352,7 +3242,7 @@
       </p:sp>
       <p:sp>
         <p:nvSpPr>
-          <p:cNvPr id="44" name="Shape 42"/>
+          <p:cNvPr id="41" name="Shape 38"/>
           <p:cNvSpPr/>
           <p:nvPr/>
         </p:nvSpPr>
@@ -3377,7 +3267,7 @@
       </p:sp>
       <p:sp>
         <p:nvSpPr>
-          <p:cNvPr id="45" name="Shape 43"/>
+          <p:cNvPr id="42" name="Shape 39"/>
           <p:cNvSpPr/>
           <p:nvPr/>
         </p:nvSpPr>
@@ -3397,7 +3287,7 @@
       </p:sp>
       <p:sp>
         <p:nvSpPr>
-          <p:cNvPr id="46" name="Text 44"/>
+          <p:cNvPr id="43" name="Text 40"/>
           <p:cNvSpPr txBox="1"/>
           <p:nvPr/>
         </p:nvSpPr>
@@ -3436,7 +3326,7 @@
       </p:sp>
       <p:sp>
         <p:nvSpPr>
-          <p:cNvPr id="47" name="Text 45"/>
+          <p:cNvPr id="44" name="Text 41"/>
           <p:cNvSpPr txBox="1"/>
           <p:nvPr/>
         </p:nvSpPr>
@@ -3478,7 +3368,7 @@
       </p:sp>
       <p:sp>
         <p:nvSpPr>
-          <p:cNvPr id="48" name="Shape 46"/>
+          <p:cNvPr id="45" name="Shape 42"/>
           <p:cNvSpPr/>
           <p:nvPr/>
         </p:nvSpPr>
@@ -3503,7 +3393,7 @@
       </p:sp>
       <p:sp>
         <p:nvSpPr>
-          <p:cNvPr id="49" name="Shape 47"/>
+          <p:cNvPr id="46" name="Shape 43"/>
           <p:cNvSpPr/>
           <p:nvPr/>
         </p:nvSpPr>
@@ -3523,7 +3413,7 @@
       </p:sp>
       <p:sp>
         <p:nvSpPr>
-          <p:cNvPr id="50" name="Text 48"/>
+          <p:cNvPr id="47" name="Text 44"/>
           <p:cNvSpPr txBox="1"/>
           <p:nvPr/>
         </p:nvSpPr>
@@ -3562,7 +3452,7 @@
       </p:sp>
       <p:sp>
         <p:nvSpPr>
-          <p:cNvPr id="51" name="Text 49"/>
+          <p:cNvPr id="48" name="Text 45"/>
           <p:cNvSpPr txBox="1"/>
           <p:nvPr/>
         </p:nvSpPr>
@@ -3604,7 +3494,7 @@
       </p:sp>
       <p:sp>
         <p:nvSpPr>
-          <p:cNvPr id="52" name="Shape 50"/>
+          <p:cNvPr id="49" name="Shape 46"/>
           <p:cNvSpPr/>
           <p:nvPr/>
         </p:nvSpPr>
@@ -3629,7 +3519,7 @@
       </p:sp>
       <p:sp>
         <p:nvSpPr>
-          <p:cNvPr id="53" name="Shape 51"/>
+          <p:cNvPr id="50" name="Shape 47"/>
           <p:cNvSpPr/>
           <p:nvPr/>
         </p:nvSpPr>
@@ -3649,7 +3539,7 @@
       </p:sp>
       <p:sp>
         <p:nvSpPr>
-          <p:cNvPr id="54" name="Text 52"/>
+          <p:cNvPr id="51" name="Text 48"/>
           <p:cNvSpPr txBox="1"/>
           <p:nvPr/>
         </p:nvSpPr>
@@ -3688,7 +3578,7 @@
       </p:sp>
       <p:sp>
         <p:nvSpPr>
-          <p:cNvPr id="55" name="Text 53"/>
+          <p:cNvPr id="52" name="Text 49"/>
           <p:cNvSpPr txBox="1"/>
           <p:nvPr/>
         </p:nvSpPr>
@@ -3730,7 +3620,7 @@
       </p:sp>
       <p:sp>
         <p:nvSpPr>
-          <p:cNvPr id="56" name="Text 54"/>
+          <p:cNvPr id="53" name="Text 50"/>
           <p:cNvSpPr/>
           <p:nvPr/>
         </p:nvSpPr>
@@ -3828,9 +3718,9 @@
                 <a:solidFill>
                   <a:srgbClr val="141414"/>
                 </a:solidFill>
-                <a:latin typeface="Bookman Old Style" pitchFamily="34" charset="0"/>
-                <a:ea typeface="Bookman Old Style" pitchFamily="34" charset="-122"/>
-                <a:cs typeface="Bookman Old Style" pitchFamily="34" charset="-120"/>
+                <a:latin typeface="Cambria" pitchFamily="34" charset="0"/>
+                <a:ea typeface="Cambria" pitchFamily="34" charset="-122"/>
+                <a:cs typeface="Cambria" pitchFamily="34" charset="-120"/>
               </a:rPr>
               <a:t>03</a:t>
             </a:r>
@@ -3838,16 +3728,196 @@
           </a:p>
         </p:txBody>
       </p:sp>
-      <p:sp>
-        <p:nvSpPr>
-          <p:cNvPr id="3" name="Shape 1"/>
+      <p:pic>
+        <p:nvPicPr>
+          <p:cNvPr id="3" name="Image 0" descr="/home/user/valletta-design-system/assets/logo/valletta-mark.png">    </p:cNvPr>
+          <p:cNvPicPr>
+            <a:picLocks noChangeAspect="1"/>
+          </p:cNvPicPr>
+          <p:nvPr/>
+        </p:nvPicPr>
+        <p:blipFill>
+          <a:blip r:embed="rId1"/>
+          <a:stretch>
+            <a:fillRect/>
+          </a:stretch>
+        </p:blipFill>
+        <p:spPr>
+          <a:xfrm>
+            <a:off x="457200" y="365760"/>
+            <a:ext cx="365760" cy="389284"/>
+          </a:xfrm>
+          <a:prstGeom prst="rect">
+            <a:avLst/>
+          </a:prstGeom>
+        </p:spPr>
+      </p:pic>
+      <p:sp>
+        <p:nvSpPr>
+          <p:cNvPr id="4" name="Text 1"/>
+          <p:cNvSpPr txBox="1"/>
+          <p:nvPr/>
+        </p:nvSpPr>
+        <p:spPr>
+          <a:xfrm>
+            <a:off x="932688" y="329184"/>
+            <a:ext cx="2926080" cy="274320"/>
+          </a:xfrm>
+          <a:prstGeom prst="rect">
+            <a:avLst/>
+          </a:prstGeom>
+          <a:noFill/>
+          <a:ln/>
+        </p:spPr>
+        <p:txBody>
+          <a:bodyPr wrap="square" lIns="0" tIns="0" rIns="0" bIns="0" rtlCol="0" anchor="ctr"/>
+          <a:lstStyle/>
+          <a:p>
+            <a:pPr indent="0" marL="0">
+              <a:buNone/>
+            </a:pPr>
+            <a:r>
+              <a:rPr lang="en-US" sz="1500" spc="200" kern="0" dirty="0">
+                <a:solidFill>
+                  <a:srgbClr val="FFFFFF"/>
+                </a:solidFill>
+                <a:latin typeface="Cambria" pitchFamily="34" charset="0"/>
+                <a:ea typeface="Cambria" pitchFamily="34" charset="-122"/>
+                <a:cs typeface="Cambria" pitchFamily="34" charset="-120"/>
+              </a:rPr>
+              <a:t>VALLETTA</a:t>
+            </a:r>
+            <a:endParaRPr lang="en-US" sz="1500" dirty="0"/>
+          </a:p>
+        </p:txBody>
+      </p:sp>
+      <p:sp>
+        <p:nvSpPr>
+          <p:cNvPr id="5" name="Text 2"/>
+          <p:cNvSpPr txBox="1"/>
+          <p:nvPr/>
+        </p:nvSpPr>
+        <p:spPr>
+          <a:xfrm>
+            <a:off x="932688" y="594360"/>
+            <a:ext cx="2926080" cy="219456"/>
+          </a:xfrm>
+          <a:prstGeom prst="rect">
+            <a:avLst/>
+          </a:prstGeom>
+          <a:noFill/>
+          <a:ln/>
+        </p:spPr>
+        <p:txBody>
+          <a:bodyPr wrap="square" lIns="0" tIns="0" rIns="0" bIns="0" rtlCol="0" anchor="ctr"/>
+          <a:lstStyle/>
+          <a:p>
+            <a:pPr indent="0" marL="0">
+              <a:buNone/>
+            </a:pPr>
+            <a:r>
+              <a:rPr lang="en-US" sz="750" b="1" spc="200" kern="0" dirty="0">
+                <a:solidFill>
+                  <a:srgbClr val="5B5F66"/>
+                </a:solidFill>
+                <a:latin typeface="Arial" pitchFamily="34" charset="0"/>
+                <a:ea typeface="Arial" pitchFamily="34" charset="-122"/>
+                <a:cs typeface="Arial" pitchFamily="34" charset="-120"/>
+              </a:rPr>
+              <a:t>INDUSTRIES, INC.</a:t>
+            </a:r>
+            <a:endParaRPr lang="en-US" sz="750" dirty="0"/>
+          </a:p>
+        </p:txBody>
+      </p:sp>
+      <p:sp>
+        <p:nvSpPr>
+          <p:cNvPr id="6" name="Text 3"/>
+          <p:cNvSpPr txBox="1"/>
+          <p:nvPr/>
+        </p:nvSpPr>
+        <p:spPr>
+          <a:xfrm>
+            <a:off x="457200" y="777240"/>
+            <a:ext cx="9144000" cy="320040"/>
+          </a:xfrm>
+          <a:prstGeom prst="rect">
+            <a:avLst/>
+          </a:prstGeom>
+          <a:noFill/>
+          <a:ln/>
+        </p:spPr>
+        <p:txBody>
+          <a:bodyPr wrap="square" lIns="0" tIns="0" rIns="0" bIns="0" rtlCol="0" anchor="ctr"/>
+          <a:lstStyle/>
+          <a:p>
+            <a:pPr algn="l" indent="0" marL="0">
+              <a:buNone/>
+            </a:pPr>
+            <a:r>
+              <a:rPr lang="en-US" sz="1100" b="1" spc="150" kern="0" dirty="0">
+                <a:solidFill>
+                  <a:srgbClr val="FF002B"/>
+                </a:solidFill>
+                <a:latin typeface="Arial" pitchFamily="34" charset="0"/>
+                <a:ea typeface="Arial" pitchFamily="34" charset="-122"/>
+                <a:cs typeface="Arial" pitchFamily="34" charset="-120"/>
+              </a:rPr>
+              <a:t>SECTIONS 3.2 &amp; 6 — REPRESENTATIVE EXPERIENCE</a:t>
+            </a:r>
+            <a:endParaRPr lang="en-US" sz="1100" dirty="0"/>
+          </a:p>
+        </p:txBody>
+      </p:sp>
+      <p:sp>
+        <p:nvSpPr>
+          <p:cNvPr id="7" name="Text 4"/>
+          <p:cNvSpPr txBox="1"/>
+          <p:nvPr/>
+        </p:nvSpPr>
+        <p:spPr>
+          <a:xfrm>
+            <a:off x="457200" y="1097280"/>
+            <a:ext cx="11274552" cy="685800"/>
+          </a:xfrm>
+          <a:prstGeom prst="rect">
+            <a:avLst/>
+          </a:prstGeom>
+          <a:noFill/>
+          <a:ln/>
+        </p:spPr>
+        <p:txBody>
+          <a:bodyPr wrap="square" lIns="0" tIns="0" rIns="0" bIns="0" rtlCol="0" anchor="ctr"/>
+          <a:lstStyle/>
+          <a:p>
+            <a:pPr indent="0" marL="0">
+              <a:buNone/>
+            </a:pPr>
+            <a:r>
+              <a:rPr lang="en-US" sz="2400" b="1" dirty="0">
+                <a:solidFill>
+                  <a:srgbClr val="FFFFFF"/>
+                </a:solidFill>
+                <a:latin typeface="Cambria" pitchFamily="34" charset="0"/>
+                <a:ea typeface="Cambria" pitchFamily="34" charset="-122"/>
+                <a:cs typeface="Cambria" pitchFamily="34" charset="-120"/>
+              </a:rPr>
+              <a:t>Federal Law-Enforcement &amp; Force-Protection Training Track Record</a:t>
+            </a:r>
+            <a:endParaRPr lang="en-US" sz="2400" dirty="0"/>
+          </a:p>
+        </p:txBody>
+      </p:sp>
+      <p:sp>
+        <p:nvSpPr>
+          <p:cNvPr id="8" name="Shape 5"/>
           <p:cNvSpPr/>
           <p:nvPr/>
         </p:nvSpPr>
         <p:spPr>
           <a:xfrm>
-            <a:off x="457200" y="384048"/>
-            <a:ext cx="310896" cy="29261"/>
+            <a:off x="457200" y="1965960"/>
+            <a:ext cx="274320" cy="29261"/>
           </a:xfrm>
           <a:prstGeom prst="rect">
             <a:avLst/>
@@ -3860,14 +3930,14 @@
       </p:sp>
       <p:sp>
         <p:nvSpPr>
-          <p:cNvPr id="4" name="Shape 2"/>
+          <p:cNvPr id="9" name="Shape 6"/>
           <p:cNvSpPr/>
           <p:nvPr/>
         </p:nvSpPr>
         <p:spPr>
           <a:xfrm>
-            <a:off x="457200" y="384048"/>
-            <a:ext cx="29261" cy="310896"/>
+            <a:off x="457200" y="1965960"/>
+            <a:ext cx="29261" cy="274320"/>
           </a:xfrm>
           <a:prstGeom prst="rect">
             <a:avLst/>
@@ -3880,203 +3950,7 @@
       </p:sp>
       <p:sp>
         <p:nvSpPr>
-          <p:cNvPr id="5" name="Text 3"/>
-          <p:cNvSpPr txBox="1"/>
-          <p:nvPr/>
-        </p:nvSpPr>
-        <p:spPr>
-          <a:xfrm>
-            <a:off x="896112" y="329184"/>
-            <a:ext cx="2926080" cy="292608"/>
-          </a:xfrm>
-          <a:prstGeom prst="rect">
-            <a:avLst/>
-          </a:prstGeom>
-          <a:noFill/>
-          <a:ln/>
-        </p:spPr>
-        <p:txBody>
-          <a:bodyPr wrap="square" lIns="0" tIns="0" rIns="0" bIns="0" rtlCol="0" anchor="ctr"/>
-          <a:lstStyle/>
-          <a:p>
-            <a:pPr indent="0" marL="0">
-              <a:buNone/>
-            </a:pPr>
-            <a:r>
-              <a:rPr lang="en-US" sz="1500" b="1" spc="200" kern="0" dirty="0">
-                <a:solidFill>
-                  <a:srgbClr val="FFFFFF"/>
-                </a:solidFill>
-                <a:latin typeface="Arial" pitchFamily="34" charset="0"/>
-                <a:ea typeface="Arial" pitchFamily="34" charset="-122"/>
-                <a:cs typeface="Arial" pitchFamily="34" charset="-120"/>
-              </a:rPr>
-              <a:t>VALLETTA</a:t>
-            </a:r>
-            <a:endParaRPr lang="en-US" sz="1500" dirty="0"/>
-          </a:p>
-        </p:txBody>
-      </p:sp>
-      <p:sp>
-        <p:nvSpPr>
-          <p:cNvPr id="6" name="Text 4"/>
-          <p:cNvSpPr txBox="1"/>
-          <p:nvPr/>
-        </p:nvSpPr>
-        <p:spPr>
-          <a:xfrm>
-            <a:off x="896112" y="603504"/>
-            <a:ext cx="2926080" cy="219456"/>
-          </a:xfrm>
-          <a:prstGeom prst="rect">
-            <a:avLst/>
-          </a:prstGeom>
-          <a:noFill/>
-          <a:ln/>
-        </p:spPr>
-        <p:txBody>
-          <a:bodyPr wrap="square" lIns="0" tIns="0" rIns="0" bIns="0" rtlCol="0" anchor="ctr"/>
-          <a:lstStyle/>
-          <a:p>
-            <a:pPr indent="0" marL="0">
-              <a:buNone/>
-            </a:pPr>
-            <a:r>
-              <a:rPr lang="en-US" sz="750" b="1" spc="200" kern="0" dirty="0">
-                <a:solidFill>
-                  <a:srgbClr val="5B5F66"/>
-                </a:solidFill>
-                <a:latin typeface="Arial" pitchFamily="34" charset="0"/>
-                <a:ea typeface="Arial" pitchFamily="34" charset="-122"/>
-                <a:cs typeface="Arial" pitchFamily="34" charset="-120"/>
-              </a:rPr>
-              <a:t>INDUSTRIES, INC.</a:t>
-            </a:r>
-            <a:endParaRPr lang="en-US" sz="750" dirty="0"/>
-          </a:p>
-        </p:txBody>
-      </p:sp>
-      <p:sp>
-        <p:nvSpPr>
-          <p:cNvPr id="7" name="Text 5"/>
-          <p:cNvSpPr txBox="1"/>
-          <p:nvPr/>
-        </p:nvSpPr>
-        <p:spPr>
-          <a:xfrm>
-            <a:off x="457200" y="777240"/>
-            <a:ext cx="9144000" cy="320040"/>
-          </a:xfrm>
-          <a:prstGeom prst="rect">
-            <a:avLst/>
-          </a:prstGeom>
-          <a:noFill/>
-          <a:ln/>
-        </p:spPr>
-        <p:txBody>
-          <a:bodyPr wrap="square" lIns="0" tIns="0" rIns="0" bIns="0" rtlCol="0" anchor="ctr"/>
-          <a:lstStyle/>
-          <a:p>
-            <a:pPr algn="l" indent="0" marL="0">
-              <a:buNone/>
-            </a:pPr>
-            <a:r>
-              <a:rPr lang="en-US" sz="1100" b="1" spc="150" kern="0" dirty="0">
-                <a:solidFill>
-                  <a:srgbClr val="FF002B"/>
-                </a:solidFill>
-                <a:latin typeface="Arial" pitchFamily="34" charset="0"/>
-                <a:ea typeface="Arial" pitchFamily="34" charset="-122"/>
-                <a:cs typeface="Arial" pitchFamily="34" charset="-120"/>
-              </a:rPr>
-              <a:t>SECTIONS 3.2 &amp; 6 — REPRESENTATIVE EXPERIENCE</a:t>
-            </a:r>
-            <a:endParaRPr lang="en-US" sz="1100" dirty="0"/>
-          </a:p>
-        </p:txBody>
-      </p:sp>
-      <p:sp>
-        <p:nvSpPr>
-          <p:cNvPr id="8" name="Text 6"/>
-          <p:cNvSpPr txBox="1"/>
-          <p:nvPr/>
-        </p:nvSpPr>
-        <p:spPr>
-          <a:xfrm>
-            <a:off x="457200" y="1097280"/>
-            <a:ext cx="11274552" cy="685800"/>
-          </a:xfrm>
-          <a:prstGeom prst="rect">
-            <a:avLst/>
-          </a:prstGeom>
-          <a:noFill/>
-          <a:ln/>
-        </p:spPr>
-        <p:txBody>
-          <a:bodyPr wrap="square" lIns="0" tIns="0" rIns="0" bIns="0" rtlCol="0" anchor="ctr"/>
-          <a:lstStyle/>
-          <a:p>
-            <a:pPr indent="0" marL="0">
-              <a:buNone/>
-            </a:pPr>
-            <a:r>
-              <a:rPr lang="en-US" sz="2400" b="1" dirty="0">
-                <a:solidFill>
-                  <a:srgbClr val="FFFFFF"/>
-                </a:solidFill>
-                <a:latin typeface="Bookman Old Style" pitchFamily="34" charset="0"/>
-                <a:ea typeface="Bookman Old Style" pitchFamily="34" charset="-122"/>
-                <a:cs typeface="Bookman Old Style" pitchFamily="34" charset="-120"/>
-              </a:rPr>
-              <a:t>Federal Law-Enforcement &amp; Force-Protection Training Track Record</a:t>
-            </a:r>
-            <a:endParaRPr lang="en-US" sz="2400" dirty="0"/>
-          </a:p>
-        </p:txBody>
-      </p:sp>
-      <p:sp>
-        <p:nvSpPr>
-          <p:cNvPr id="9" name="Shape 7"/>
-          <p:cNvSpPr/>
-          <p:nvPr/>
-        </p:nvSpPr>
-        <p:spPr>
-          <a:xfrm>
-            <a:off x="457200" y="1965960"/>
-            <a:ext cx="274320" cy="29261"/>
-          </a:xfrm>
-          <a:prstGeom prst="rect">
-            <a:avLst/>
-          </a:prstGeom>
-          <a:solidFill>
-            <a:srgbClr val="FF002B"/>
-          </a:solidFill>
-          <a:ln/>
-        </p:spPr>
-      </p:sp>
-      <p:sp>
-        <p:nvSpPr>
-          <p:cNvPr id="10" name="Shape 8"/>
-          <p:cNvSpPr/>
-          <p:nvPr/>
-        </p:nvSpPr>
-        <p:spPr>
-          <a:xfrm>
-            <a:off x="457200" y="1965960"/>
-            <a:ext cx="29261" cy="274320"/>
-          </a:xfrm>
-          <a:prstGeom prst="rect">
-            <a:avLst/>
-          </a:prstGeom>
-          <a:solidFill>
-            <a:srgbClr val="FF002B"/>
-          </a:solidFill>
-          <a:ln/>
-        </p:spPr>
-      </p:sp>
-      <p:sp>
-        <p:nvSpPr>
-          <p:cNvPr id="11" name="Text 9"/>
+          <p:cNvPr id="10" name="Text 7"/>
           <p:cNvSpPr txBox="1"/>
           <p:nvPr/>
         </p:nvSpPr>
@@ -4103,9 +3977,9 @@
                 <a:solidFill>
                   <a:srgbClr val="FF002B"/>
                 </a:solidFill>
-                <a:latin typeface="Bookman Old Style" pitchFamily="34" charset="0"/>
-                <a:ea typeface="Bookman Old Style" pitchFamily="34" charset="-122"/>
-                <a:cs typeface="Bookman Old Style" pitchFamily="34" charset="-120"/>
+                <a:latin typeface="Cambria" pitchFamily="34" charset="0"/>
+                <a:ea typeface="Cambria" pitchFamily="34" charset="-122"/>
+                <a:cs typeface="Cambria" pitchFamily="34" charset="-120"/>
               </a:rPr>
               <a:t>$3.4M+</a:t>
             </a:r>
@@ -4115,7 +3989,7 @@
       </p:sp>
       <p:sp>
         <p:nvSpPr>
-          <p:cNvPr id="12" name="Text 10"/>
+          <p:cNvPr id="11" name="Text 8"/>
           <p:cNvSpPr txBox="1"/>
           <p:nvPr/>
         </p:nvSpPr>
@@ -4157,7 +4031,7 @@
       </p:sp>
       <p:sp>
         <p:nvSpPr>
-          <p:cNvPr id="13" name="Shape 11"/>
+          <p:cNvPr id="12" name="Shape 9"/>
           <p:cNvSpPr/>
           <p:nvPr/>
         </p:nvSpPr>
@@ -4177,7 +4051,7 @@
       </p:sp>
       <p:sp>
         <p:nvSpPr>
-          <p:cNvPr id="14" name="Shape 12"/>
+          <p:cNvPr id="13" name="Shape 10"/>
           <p:cNvSpPr/>
           <p:nvPr/>
         </p:nvSpPr>
@@ -4197,7 +4071,7 @@
       </p:sp>
       <p:sp>
         <p:nvSpPr>
-          <p:cNvPr id="15" name="Text 13"/>
+          <p:cNvPr id="14" name="Text 11"/>
           <p:cNvSpPr txBox="1"/>
           <p:nvPr/>
         </p:nvSpPr>
@@ -4224,9 +4098,9 @@
                 <a:solidFill>
                   <a:srgbClr val="FFFFFF"/>
                 </a:solidFill>
-                <a:latin typeface="Bookman Old Style" pitchFamily="34" charset="0"/>
-                <a:ea typeface="Bookman Old Style" pitchFamily="34" charset="-122"/>
-                <a:cs typeface="Bookman Old Style" pitchFamily="34" charset="-120"/>
+                <a:latin typeface="Cambria" pitchFamily="34" charset="0"/>
+                <a:ea typeface="Cambria" pitchFamily="34" charset="-122"/>
+                <a:cs typeface="Cambria" pitchFamily="34" charset="-120"/>
               </a:rPr>
               <a:t>674</a:t>
             </a:r>
@@ -4236,7 +4110,7 @@
       </p:sp>
       <p:sp>
         <p:nvSpPr>
-          <p:cNvPr id="16" name="Text 14"/>
+          <p:cNvPr id="15" name="Text 12"/>
           <p:cNvSpPr txBox="1"/>
           <p:nvPr/>
         </p:nvSpPr>
@@ -4278,7 +4152,7 @@
       </p:sp>
       <p:sp>
         <p:nvSpPr>
-          <p:cNvPr id="17" name="Shape 15"/>
+          <p:cNvPr id="16" name="Shape 13"/>
           <p:cNvSpPr/>
           <p:nvPr/>
         </p:nvSpPr>
@@ -4298,7 +4172,7 @@
       </p:sp>
       <p:sp>
         <p:nvSpPr>
-          <p:cNvPr id="18" name="Shape 16"/>
+          <p:cNvPr id="17" name="Shape 14"/>
           <p:cNvSpPr/>
           <p:nvPr/>
         </p:nvSpPr>
@@ -4318,7 +4192,7 @@
       </p:sp>
       <p:sp>
         <p:nvSpPr>
-          <p:cNvPr id="19" name="Text 17"/>
+          <p:cNvPr id="18" name="Text 15"/>
           <p:cNvSpPr txBox="1"/>
           <p:nvPr/>
         </p:nvSpPr>
@@ -4345,9 +4219,9 @@
                 <a:solidFill>
                   <a:srgbClr val="FFFFFF"/>
                 </a:solidFill>
-                <a:latin typeface="Bookman Old Style" pitchFamily="34" charset="0"/>
-                <a:ea typeface="Bookman Old Style" pitchFamily="34" charset="-122"/>
-                <a:cs typeface="Bookman Old Style" pitchFamily="34" charset="-120"/>
+                <a:latin typeface="Cambria" pitchFamily="34" charset="0"/>
+                <a:ea typeface="Cambria" pitchFamily="34" charset="-122"/>
+                <a:cs typeface="Cambria" pitchFamily="34" charset="-120"/>
               </a:rPr>
               <a:t>6</a:t>
             </a:r>
@@ -4357,7 +4231,7 @@
       </p:sp>
       <p:sp>
         <p:nvSpPr>
-          <p:cNvPr id="20" name="Text 18"/>
+          <p:cNvPr id="19" name="Text 16"/>
           <p:cNvSpPr txBox="1"/>
           <p:nvPr/>
         </p:nvSpPr>
@@ -4399,7 +4273,7 @@
       </p:sp>
       <p:sp>
         <p:nvSpPr>
-          <p:cNvPr id="21" name="Shape 19"/>
+          <p:cNvPr id="20" name="Shape 17"/>
           <p:cNvSpPr/>
           <p:nvPr/>
         </p:nvSpPr>
@@ -4419,7 +4293,7 @@
       </p:sp>
       <p:sp>
         <p:nvSpPr>
-          <p:cNvPr id="22" name="Shape 20"/>
+          <p:cNvPr id="21" name="Shape 18"/>
           <p:cNvSpPr/>
           <p:nvPr/>
         </p:nvSpPr>
@@ -4439,7 +4313,7 @@
       </p:sp>
       <p:sp>
         <p:nvSpPr>
-          <p:cNvPr id="23" name="Text 21"/>
+          <p:cNvPr id="22" name="Text 19"/>
           <p:cNvSpPr txBox="1"/>
           <p:nvPr/>
         </p:nvSpPr>
@@ -4466,9 +4340,9 @@
                 <a:solidFill>
                   <a:srgbClr val="FFFFFF"/>
                 </a:solidFill>
-                <a:latin typeface="Bookman Old Style" pitchFamily="34" charset="0"/>
-                <a:ea typeface="Bookman Old Style" pitchFamily="34" charset="-122"/>
-                <a:cs typeface="Bookman Old Style" pitchFamily="34" charset="-120"/>
+                <a:latin typeface="Cambria" pitchFamily="34" charset="0"/>
+                <a:ea typeface="Cambria" pitchFamily="34" charset="-122"/>
+                <a:cs typeface="Cambria" pitchFamily="34" charset="-120"/>
               </a:rPr>
               <a:t>CONUS /</a:t>
             </a:r>
@@ -4483,9 +4357,9 @@
                 <a:solidFill>
                   <a:srgbClr val="FFFFFF"/>
                 </a:solidFill>
-                <a:latin typeface="Bookman Old Style" pitchFamily="34" charset="0"/>
-                <a:ea typeface="Bookman Old Style" pitchFamily="34" charset="-122"/>
-                <a:cs typeface="Bookman Old Style" pitchFamily="34" charset="-120"/>
+                <a:latin typeface="Cambria" pitchFamily="34" charset="0"/>
+                <a:ea typeface="Cambria" pitchFamily="34" charset="-122"/>
+                <a:cs typeface="Cambria" pitchFamily="34" charset="-120"/>
               </a:rPr>
               <a:t>OCONUS</a:t>
             </a:r>
@@ -4495,7 +4369,7 @@
       </p:sp>
       <p:sp>
         <p:nvSpPr>
-          <p:cNvPr id="24" name="Text 22"/>
+          <p:cNvPr id="23" name="Text 20"/>
           <p:cNvSpPr txBox="1"/>
           <p:nvPr/>
         </p:nvSpPr>
@@ -5922,9 +5796,9 @@
                 <a:solidFill>
                   <a:srgbClr val="EBEBE9"/>
                 </a:solidFill>
-                <a:latin typeface="Bookman Old Style" pitchFamily="34" charset="0"/>
-                <a:ea typeface="Bookman Old Style" pitchFamily="34" charset="-122"/>
-                <a:cs typeface="Bookman Old Style" pitchFamily="34" charset="-120"/>
+                <a:latin typeface="Cambria" pitchFamily="34" charset="0"/>
+                <a:ea typeface="Cambria" pitchFamily="34" charset="-122"/>
+                <a:cs typeface="Cambria" pitchFamily="34" charset="-120"/>
               </a:rPr>
               <a:t>04</a:t>
             </a:r>
@@ -5932,56 +5806,40 @@
           </a:p>
         </p:txBody>
       </p:sp>
-      <p:sp>
-        <p:nvSpPr>
-          <p:cNvPr id="3" name="Shape 1"/>
-          <p:cNvSpPr/>
-          <p:nvPr/>
-        </p:nvSpPr>
-        <p:spPr>
-          <a:xfrm>
-            <a:off x="457200" y="384048"/>
-            <a:ext cx="310896" cy="29261"/>
-          </a:xfrm>
-          <a:prstGeom prst="rect">
-            <a:avLst/>
-          </a:prstGeom>
-          <a:solidFill>
-            <a:srgbClr val="FF002B"/>
-          </a:solidFill>
-          <a:ln/>
-        </p:spPr>
-      </p:sp>
-      <p:sp>
-        <p:nvSpPr>
-          <p:cNvPr id="4" name="Shape 2"/>
-          <p:cNvSpPr/>
-          <p:nvPr/>
-        </p:nvSpPr>
-        <p:spPr>
-          <a:xfrm>
-            <a:off x="457200" y="384048"/>
-            <a:ext cx="29261" cy="310896"/>
-          </a:xfrm>
-          <a:prstGeom prst="rect">
-            <a:avLst/>
-          </a:prstGeom>
-          <a:solidFill>
-            <a:srgbClr val="FF002B"/>
-          </a:solidFill>
-          <a:ln/>
-        </p:spPr>
-      </p:sp>
-      <p:sp>
-        <p:nvSpPr>
-          <p:cNvPr id="5" name="Text 3"/>
+      <p:pic>
+        <p:nvPicPr>
+          <p:cNvPr id="3" name="Image 0" descr="/home/user/valletta-design-system/assets/logo/valletta-lockup.png">    </p:cNvPr>
+          <p:cNvPicPr>
+            <a:picLocks noChangeAspect="1"/>
+          </p:cNvPicPr>
+          <p:nvPr/>
+        </p:nvPicPr>
+        <p:blipFill>
+          <a:blip r:embed="rId1"/>
+          <a:stretch>
+            <a:fillRect/>
+          </a:stretch>
+        </p:blipFill>
+        <p:spPr>
+          <a:xfrm>
+            <a:off x="457200" y="365760"/>
+            <a:ext cx="1828800" cy="384048"/>
+          </a:xfrm>
+          <a:prstGeom prst="rect">
+            <a:avLst/>
+          </a:prstGeom>
+        </p:spPr>
+      </p:pic>
+      <p:sp>
+        <p:nvSpPr>
+          <p:cNvPr id="4" name="Text 1"/>
           <p:cNvSpPr txBox="1"/>
           <p:nvPr/>
         </p:nvSpPr>
         <p:spPr>
           <a:xfrm>
-            <a:off x="896112" y="329184"/>
-            <a:ext cx="2926080" cy="292608"/>
+            <a:off x="457200" y="777240"/>
+            <a:ext cx="9144000" cy="320040"/>
           </a:xfrm>
           <a:prstGeom prst="rect">
             <a:avLst/>
@@ -5993,96 +5851,18 @@
           <a:bodyPr wrap="square" lIns="0" tIns="0" rIns="0" bIns="0" rtlCol="0" anchor="ctr"/>
           <a:lstStyle/>
           <a:p>
-            <a:pPr indent="0" marL="0">
-              <a:buNone/>
-            </a:pPr>
-            <a:r>
-              <a:rPr lang="en-US" sz="1500" b="1" spc="200" kern="0" dirty="0">
-                <a:solidFill>
-                  <a:srgbClr val="0A0A0A"/>
+            <a:pPr algn="l" indent="0" marL="0">
+              <a:buNone/>
+            </a:pPr>
+            <a:r>
+              <a:rPr lang="en-US" sz="1100" b="1" spc="150" kern="0" dirty="0">
+                <a:solidFill>
+                  <a:srgbClr val="FF002B"/>
                 </a:solidFill>
                 <a:latin typeface="Arial" pitchFamily="34" charset="0"/>
                 <a:ea typeface="Arial" pitchFamily="34" charset="-122"/>
                 <a:cs typeface="Arial" pitchFamily="34" charset="-120"/>
               </a:rPr>
-              <a:t>VALLETTA</a:t>
-            </a:r>
-            <a:endParaRPr lang="en-US" sz="1500" dirty="0"/>
-          </a:p>
-        </p:txBody>
-      </p:sp>
-      <p:sp>
-        <p:nvSpPr>
-          <p:cNvPr id="6" name="Text 4"/>
-          <p:cNvSpPr txBox="1"/>
-          <p:nvPr/>
-        </p:nvSpPr>
-        <p:spPr>
-          <a:xfrm>
-            <a:off x="896112" y="603504"/>
-            <a:ext cx="2926080" cy="219456"/>
-          </a:xfrm>
-          <a:prstGeom prst="rect">
-            <a:avLst/>
-          </a:prstGeom>
-          <a:noFill/>
-          <a:ln/>
-        </p:spPr>
-        <p:txBody>
-          <a:bodyPr wrap="square" lIns="0" tIns="0" rIns="0" bIns="0" rtlCol="0" anchor="ctr"/>
-          <a:lstStyle/>
-          <a:p>
-            <a:pPr indent="0" marL="0">
-              <a:buNone/>
-            </a:pPr>
-            <a:r>
-              <a:rPr lang="en-US" sz="750" b="1" spc="200" kern="0" dirty="0">
-                <a:solidFill>
-                  <a:srgbClr val="5B5F66"/>
-                </a:solidFill>
-                <a:latin typeface="Arial" pitchFamily="34" charset="0"/>
-                <a:ea typeface="Arial" pitchFamily="34" charset="-122"/>
-                <a:cs typeface="Arial" pitchFamily="34" charset="-120"/>
-              </a:rPr>
-              <a:t>INDUSTRIES, INC.</a:t>
-            </a:r>
-            <a:endParaRPr lang="en-US" sz="750" dirty="0"/>
-          </a:p>
-        </p:txBody>
-      </p:sp>
-      <p:sp>
-        <p:nvSpPr>
-          <p:cNvPr id="7" name="Text 5"/>
-          <p:cNvSpPr txBox="1"/>
-          <p:nvPr/>
-        </p:nvSpPr>
-        <p:spPr>
-          <a:xfrm>
-            <a:off x="457200" y="777240"/>
-            <a:ext cx="9144000" cy="320040"/>
-          </a:xfrm>
-          <a:prstGeom prst="rect">
-            <a:avLst/>
-          </a:prstGeom>
-          <a:noFill/>
-          <a:ln/>
-        </p:spPr>
-        <p:txBody>
-          <a:bodyPr wrap="square" lIns="0" tIns="0" rIns="0" bIns="0" rtlCol="0" anchor="ctr"/>
-          <a:lstStyle/>
-          <a:p>
-            <a:pPr algn="l" indent="0" marL="0">
-              <a:buNone/>
-            </a:pPr>
-            <a:r>
-              <a:rPr lang="en-US" sz="1100" b="1" spc="150" kern="0" dirty="0">
-                <a:solidFill>
-                  <a:srgbClr val="FF002B"/>
-                </a:solidFill>
-                <a:latin typeface="Arial" pitchFamily="34" charset="0"/>
-                <a:ea typeface="Arial" pitchFamily="34" charset="-122"/>
-                <a:cs typeface="Arial" pitchFamily="34" charset="-120"/>
-              </a:rPr>
               <a:t>SECTION 7 — RECOMMENDATIONS</a:t>
             </a:r>
             <a:endParaRPr lang="en-US" sz="1100" dirty="0"/>
@@ -6091,7 +5871,7 @@
       </p:sp>
       <p:sp>
         <p:nvSpPr>
-          <p:cNvPr id="8" name="Text 6"/>
+          <p:cNvPr id="5" name="Text 2"/>
           <p:cNvSpPr txBox="1"/>
           <p:nvPr/>
         </p:nvSpPr>
@@ -6121,9 +5901,9 @@
                 <a:solidFill>
                   <a:srgbClr val="0A0A0A"/>
                 </a:solidFill>
-                <a:latin typeface="Bookman Old Style" pitchFamily="34" charset="0"/>
-                <a:ea typeface="Bookman Old Style" pitchFamily="34" charset="-122"/>
-                <a:cs typeface="Bookman Old Style" pitchFamily="34" charset="-120"/>
+                <a:latin typeface="Cambria" pitchFamily="34" charset="0"/>
+                <a:ea typeface="Cambria" pitchFamily="34" charset="-122"/>
+                <a:cs typeface="Cambria" pitchFamily="34" charset="-120"/>
               </a:rPr>
               <a:t>Refinements That Deliver a Durable Training System — Not a One-Time Course</a:t>
             </a:r>
@@ -7031,7 +6811,7 @@
       </p:graphicFrame>
       <p:sp>
         <p:nvSpPr>
-          <p:cNvPr id="10" name="Text 7"/>
+          <p:cNvPr id="7" name="Text 3"/>
           <p:cNvSpPr/>
           <p:nvPr/>
         </p:nvSpPr>
@@ -7129,9 +6909,9 @@
                 <a:solidFill>
                   <a:srgbClr val="141414"/>
                 </a:solidFill>
-                <a:latin typeface="Bookman Old Style" pitchFamily="34" charset="0"/>
-                <a:ea typeface="Bookman Old Style" pitchFamily="34" charset="-122"/>
-                <a:cs typeface="Bookman Old Style" pitchFamily="34" charset="-120"/>
+                <a:latin typeface="Cambria" pitchFamily="34" charset="0"/>
+                <a:ea typeface="Cambria" pitchFamily="34" charset="-122"/>
+                <a:cs typeface="Cambria" pitchFamily="34" charset="-120"/>
               </a:rPr>
               <a:t>05</a:t>
             </a:r>
@@ -7139,16 +6919,235 @@
           </a:p>
         </p:txBody>
       </p:sp>
-      <p:sp>
-        <p:nvSpPr>
-          <p:cNvPr id="3" name="Shape 1"/>
+      <p:pic>
+        <p:nvPicPr>
+          <p:cNvPr id="3" name="Image 0" descr="/home/user/valletta-design-system/assets/logo/valletta-mark.png">    </p:cNvPr>
+          <p:cNvPicPr>
+            <a:picLocks noChangeAspect="1"/>
+          </p:cNvPicPr>
+          <p:nvPr/>
+        </p:nvPicPr>
+        <p:blipFill>
+          <a:blip r:embed="rId1"/>
+          <a:stretch>
+            <a:fillRect/>
+          </a:stretch>
+        </p:blipFill>
+        <p:spPr>
+          <a:xfrm>
+            <a:off x="457200" y="365760"/>
+            <a:ext cx="365760" cy="389284"/>
+          </a:xfrm>
+          <a:prstGeom prst="rect">
+            <a:avLst/>
+          </a:prstGeom>
+        </p:spPr>
+      </p:pic>
+      <p:sp>
+        <p:nvSpPr>
+          <p:cNvPr id="4" name="Text 1"/>
+          <p:cNvSpPr txBox="1"/>
+          <p:nvPr/>
+        </p:nvSpPr>
+        <p:spPr>
+          <a:xfrm>
+            <a:off x="932688" y="329184"/>
+            <a:ext cx="2926080" cy="274320"/>
+          </a:xfrm>
+          <a:prstGeom prst="rect">
+            <a:avLst/>
+          </a:prstGeom>
+          <a:noFill/>
+          <a:ln/>
+        </p:spPr>
+        <p:txBody>
+          <a:bodyPr wrap="square" lIns="0" tIns="0" rIns="0" bIns="0" rtlCol="0" anchor="ctr"/>
+          <a:lstStyle/>
+          <a:p>
+            <a:pPr indent="0" marL="0">
+              <a:buNone/>
+            </a:pPr>
+            <a:r>
+              <a:rPr lang="en-US" sz="1500" spc="200" kern="0" dirty="0">
+                <a:solidFill>
+                  <a:srgbClr val="FFFFFF"/>
+                </a:solidFill>
+                <a:latin typeface="Cambria" pitchFamily="34" charset="0"/>
+                <a:ea typeface="Cambria" pitchFamily="34" charset="-122"/>
+                <a:cs typeface="Cambria" pitchFamily="34" charset="-120"/>
+              </a:rPr>
+              <a:t>VALLETTA</a:t>
+            </a:r>
+            <a:endParaRPr lang="en-US" sz="1500" dirty="0"/>
+          </a:p>
+        </p:txBody>
+      </p:sp>
+      <p:sp>
+        <p:nvSpPr>
+          <p:cNvPr id="5" name="Text 2"/>
+          <p:cNvSpPr txBox="1"/>
+          <p:nvPr/>
+        </p:nvSpPr>
+        <p:spPr>
+          <a:xfrm>
+            <a:off x="932688" y="594360"/>
+            <a:ext cx="2926080" cy="219456"/>
+          </a:xfrm>
+          <a:prstGeom prst="rect">
+            <a:avLst/>
+          </a:prstGeom>
+          <a:noFill/>
+          <a:ln/>
+        </p:spPr>
+        <p:txBody>
+          <a:bodyPr wrap="square" lIns="0" tIns="0" rIns="0" bIns="0" rtlCol="0" anchor="ctr"/>
+          <a:lstStyle/>
+          <a:p>
+            <a:pPr indent="0" marL="0">
+              <a:buNone/>
+            </a:pPr>
+            <a:r>
+              <a:rPr lang="en-US" sz="750" b="1" spc="200" kern="0" dirty="0">
+                <a:solidFill>
+                  <a:srgbClr val="5B5F66"/>
+                </a:solidFill>
+                <a:latin typeface="Arial" pitchFamily="34" charset="0"/>
+                <a:ea typeface="Arial" pitchFamily="34" charset="-122"/>
+                <a:cs typeface="Arial" pitchFamily="34" charset="-120"/>
+              </a:rPr>
+              <a:t>INDUSTRIES, INC.</a:t>
+            </a:r>
+            <a:endParaRPr lang="en-US" sz="750" dirty="0"/>
+          </a:p>
+        </p:txBody>
+      </p:sp>
+      <p:sp>
+        <p:nvSpPr>
+          <p:cNvPr id="6" name="Text 3"/>
+          <p:cNvSpPr txBox="1"/>
+          <p:nvPr/>
+        </p:nvSpPr>
+        <p:spPr>
+          <a:xfrm>
+            <a:off x="457200" y="777240"/>
+            <a:ext cx="5486400" cy="320040"/>
+          </a:xfrm>
+          <a:prstGeom prst="rect">
+            <a:avLst/>
+          </a:prstGeom>
+          <a:noFill/>
+          <a:ln/>
+        </p:spPr>
+        <p:txBody>
+          <a:bodyPr wrap="square" lIns="0" tIns="0" rIns="0" bIns="0" rtlCol="0" anchor="ctr"/>
+          <a:lstStyle/>
+          <a:p>
+            <a:pPr algn="l" indent="0" marL="0">
+              <a:buNone/>
+            </a:pPr>
+            <a:r>
+              <a:rPr lang="en-US" sz="1100" b="1" spc="150" kern="0" dirty="0">
+                <a:solidFill>
+                  <a:srgbClr val="FF002B"/>
+                </a:solidFill>
+                <a:latin typeface="Arial" pitchFamily="34" charset="0"/>
+                <a:ea typeface="Arial" pitchFamily="34" charset="-122"/>
+                <a:cs typeface="Arial" pitchFamily="34" charset="-120"/>
+              </a:rPr>
+              <a:t>CLOSING</a:t>
+            </a:r>
+            <a:endParaRPr lang="en-US" sz="1100" dirty="0"/>
+          </a:p>
+        </p:txBody>
+      </p:sp>
+      <p:sp>
+        <p:nvSpPr>
+          <p:cNvPr id="7" name="Text 4"/>
+          <p:cNvSpPr txBox="1"/>
+          <p:nvPr/>
+        </p:nvSpPr>
+        <p:spPr>
+          <a:xfrm>
+            <a:off x="457200" y="1097280"/>
+            <a:ext cx="6675120" cy="685800"/>
+          </a:xfrm>
+          <a:prstGeom prst="rect">
+            <a:avLst/>
+          </a:prstGeom>
+          <a:noFill/>
+          <a:ln/>
+        </p:spPr>
+        <p:txBody>
+          <a:bodyPr wrap="square" lIns="0" tIns="0" rIns="0" bIns="0" rtlCol="0" anchor="ctr"/>
+          <a:lstStyle/>
+          <a:p>
+            <a:pPr indent="0" marL="0">
+              <a:buNone/>
+            </a:pPr>
+            <a:r>
+              <a:rPr lang="en-US" sz="3400" b="1" dirty="0">
+                <a:solidFill>
+                  <a:srgbClr val="FFFFFF"/>
+                </a:solidFill>
+                <a:latin typeface="Cambria" pitchFamily="34" charset="0"/>
+                <a:ea typeface="Cambria" pitchFamily="34" charset="-122"/>
+                <a:cs typeface="Cambria" pitchFamily="34" charset="-120"/>
+              </a:rPr>
+              <a:t>BUILT BY OPERATORS.</a:t>
+            </a:r>
+            <a:endParaRPr lang="en-US" sz="3400" dirty="0"/>
+          </a:p>
+        </p:txBody>
+      </p:sp>
+      <p:sp>
+        <p:nvSpPr>
+          <p:cNvPr id="8" name="Text 5"/>
+          <p:cNvSpPr txBox="1"/>
+          <p:nvPr/>
+        </p:nvSpPr>
+        <p:spPr>
+          <a:xfrm>
+            <a:off x="457200" y="1783080"/>
+            <a:ext cx="6675120" cy="457200"/>
+          </a:xfrm>
+          <a:prstGeom prst="rect">
+            <a:avLst/>
+          </a:prstGeom>
+          <a:noFill/>
+          <a:ln/>
+        </p:spPr>
+        <p:txBody>
+          <a:bodyPr wrap="square" lIns="0" tIns="0" rIns="0" bIns="0" rtlCol="0" anchor="ctr"/>
+          <a:lstStyle/>
+          <a:p>
+            <a:pPr indent="0" marL="0">
+              <a:buNone/>
+            </a:pPr>
+            <a:r>
+              <a:rPr lang="en-US" sz="1400" i="1" dirty="0">
+                <a:solidFill>
+                  <a:srgbClr val="D8D9DB"/>
+                </a:solidFill>
+                <a:latin typeface="Calibri" pitchFamily="34" charset="0"/>
+                <a:ea typeface="Calibri" pitchFamily="34" charset="-122"/>
+                <a:cs typeface="Calibri" pitchFamily="34" charset="-120"/>
+              </a:rPr>
+              <a:t>A proven partner to stand up DOI's own OSSTP.</a:t>
+            </a:r>
+            <a:endParaRPr lang="en-US" sz="1400" dirty="0"/>
+          </a:p>
+        </p:txBody>
+      </p:sp>
+      <p:sp>
+        <p:nvSpPr>
+          <p:cNvPr id="9" name="Shape 6"/>
           <p:cNvSpPr/>
           <p:nvPr/>
         </p:nvSpPr>
         <p:spPr>
           <a:xfrm>
-            <a:off x="457200" y="384048"/>
-            <a:ext cx="310896" cy="29261"/>
+            <a:off x="457200" y="2606040"/>
+            <a:ext cx="256032" cy="32004"/>
           </a:xfrm>
           <a:prstGeom prst="rect">
             <a:avLst/>
@@ -7161,14 +7160,14 @@
       </p:sp>
       <p:sp>
         <p:nvSpPr>
-          <p:cNvPr id="4" name="Shape 2"/>
+          <p:cNvPr id="10" name="Shape 7"/>
           <p:cNvSpPr/>
           <p:nvPr/>
         </p:nvSpPr>
         <p:spPr>
           <a:xfrm>
-            <a:off x="457200" y="384048"/>
-            <a:ext cx="29261" cy="310896"/>
+            <a:off x="457200" y="2606040"/>
+            <a:ext cx="32004" cy="256032"/>
           </a:xfrm>
           <a:prstGeom prst="rect">
             <a:avLst/>
@@ -7181,14 +7180,14 @@
       </p:sp>
       <p:sp>
         <p:nvSpPr>
-          <p:cNvPr id="5" name="Text 3"/>
+          <p:cNvPr id="11" name="Text 8"/>
           <p:cNvSpPr txBox="1"/>
           <p:nvPr/>
         </p:nvSpPr>
         <p:spPr>
           <a:xfrm>
-            <a:off x="896112" y="329184"/>
-            <a:ext cx="2926080" cy="292608"/>
+            <a:off x="868680" y="2569464"/>
+            <a:ext cx="5623560" cy="384048"/>
           </a:xfrm>
           <a:prstGeom prst="rect">
             <a:avLst/>
@@ -7197,14 +7196,14 @@
           <a:ln/>
         </p:spPr>
         <p:txBody>
-          <a:bodyPr wrap="square" lIns="0" tIns="0" rIns="0" bIns="0" rtlCol="0" anchor="ctr"/>
+          <a:bodyPr wrap="square" lIns="0" tIns="0" rIns="0" bIns="0" rtlCol="0" anchor="t"/>
           <a:lstStyle/>
           <a:p>
             <a:pPr indent="0" marL="0">
               <a:buNone/>
             </a:pPr>
             <a:r>
-              <a:rPr lang="en-US" sz="1500" b="1" spc="200" kern="0" dirty="0">
+              <a:rPr lang="en-US" sz="1200" b="1" spc="50" kern="0" dirty="0">
                 <a:solidFill>
                   <a:srgbClr val="FFFFFF"/>
                 </a:solidFill>
@@ -7212,241 +7211,6 @@
                 <a:ea typeface="Arial" pitchFamily="34" charset="-122"/>
                 <a:cs typeface="Arial" pitchFamily="34" charset="-120"/>
               </a:rPr>
-              <a:t>VALLETTA</a:t>
-            </a:r>
-            <a:endParaRPr lang="en-US" sz="1500" dirty="0"/>
-          </a:p>
-        </p:txBody>
-      </p:sp>
-      <p:sp>
-        <p:nvSpPr>
-          <p:cNvPr id="6" name="Text 4"/>
-          <p:cNvSpPr txBox="1"/>
-          <p:nvPr/>
-        </p:nvSpPr>
-        <p:spPr>
-          <a:xfrm>
-            <a:off x="896112" y="603504"/>
-            <a:ext cx="2926080" cy="219456"/>
-          </a:xfrm>
-          <a:prstGeom prst="rect">
-            <a:avLst/>
-          </a:prstGeom>
-          <a:noFill/>
-          <a:ln/>
-        </p:spPr>
-        <p:txBody>
-          <a:bodyPr wrap="square" lIns="0" tIns="0" rIns="0" bIns="0" rtlCol="0" anchor="ctr"/>
-          <a:lstStyle/>
-          <a:p>
-            <a:pPr indent="0" marL="0">
-              <a:buNone/>
-            </a:pPr>
-            <a:r>
-              <a:rPr lang="en-US" sz="750" b="1" spc="200" kern="0" dirty="0">
-                <a:solidFill>
-                  <a:srgbClr val="5B5F66"/>
-                </a:solidFill>
-                <a:latin typeface="Arial" pitchFamily="34" charset="0"/>
-                <a:ea typeface="Arial" pitchFamily="34" charset="-122"/>
-                <a:cs typeface="Arial" pitchFamily="34" charset="-120"/>
-              </a:rPr>
-              <a:t>INDUSTRIES, INC.</a:t>
-            </a:r>
-            <a:endParaRPr lang="en-US" sz="750" dirty="0"/>
-          </a:p>
-        </p:txBody>
-      </p:sp>
-      <p:sp>
-        <p:nvSpPr>
-          <p:cNvPr id="7" name="Text 5"/>
-          <p:cNvSpPr txBox="1"/>
-          <p:nvPr/>
-        </p:nvSpPr>
-        <p:spPr>
-          <a:xfrm>
-            <a:off x="457200" y="777240"/>
-            <a:ext cx="5486400" cy="320040"/>
-          </a:xfrm>
-          <a:prstGeom prst="rect">
-            <a:avLst/>
-          </a:prstGeom>
-          <a:noFill/>
-          <a:ln/>
-        </p:spPr>
-        <p:txBody>
-          <a:bodyPr wrap="square" lIns="0" tIns="0" rIns="0" bIns="0" rtlCol="0" anchor="ctr"/>
-          <a:lstStyle/>
-          <a:p>
-            <a:pPr algn="l" indent="0" marL="0">
-              <a:buNone/>
-            </a:pPr>
-            <a:r>
-              <a:rPr lang="en-US" sz="1100" b="1" spc="150" kern="0" dirty="0">
-                <a:solidFill>
-                  <a:srgbClr val="FF002B"/>
-                </a:solidFill>
-                <a:latin typeface="Arial" pitchFamily="34" charset="0"/>
-                <a:ea typeface="Arial" pitchFamily="34" charset="-122"/>
-                <a:cs typeface="Arial" pitchFamily="34" charset="-120"/>
-              </a:rPr>
-              <a:t>CLOSING</a:t>
-            </a:r>
-            <a:endParaRPr lang="en-US" sz="1100" dirty="0"/>
-          </a:p>
-        </p:txBody>
-      </p:sp>
-      <p:sp>
-        <p:nvSpPr>
-          <p:cNvPr id="8" name="Text 6"/>
-          <p:cNvSpPr txBox="1"/>
-          <p:nvPr/>
-        </p:nvSpPr>
-        <p:spPr>
-          <a:xfrm>
-            <a:off x="457200" y="1097280"/>
-            <a:ext cx="6675120" cy="685800"/>
-          </a:xfrm>
-          <a:prstGeom prst="rect">
-            <a:avLst/>
-          </a:prstGeom>
-          <a:noFill/>
-          <a:ln/>
-        </p:spPr>
-        <p:txBody>
-          <a:bodyPr wrap="square" lIns="0" tIns="0" rIns="0" bIns="0" rtlCol="0" anchor="ctr"/>
-          <a:lstStyle/>
-          <a:p>
-            <a:pPr indent="0" marL="0">
-              <a:buNone/>
-            </a:pPr>
-            <a:r>
-              <a:rPr lang="en-US" sz="3400" b="1" dirty="0">
-                <a:solidFill>
-                  <a:srgbClr val="FFFFFF"/>
-                </a:solidFill>
-                <a:latin typeface="Bookman Old Style" pitchFamily="34" charset="0"/>
-                <a:ea typeface="Bookman Old Style" pitchFamily="34" charset="-122"/>
-                <a:cs typeface="Bookman Old Style" pitchFamily="34" charset="-120"/>
-              </a:rPr>
-              <a:t>BUILT BY OPERATORS.</a:t>
-            </a:r>
-            <a:endParaRPr lang="en-US" sz="3400" dirty="0"/>
-          </a:p>
-        </p:txBody>
-      </p:sp>
-      <p:sp>
-        <p:nvSpPr>
-          <p:cNvPr id="9" name="Text 7"/>
-          <p:cNvSpPr txBox="1"/>
-          <p:nvPr/>
-        </p:nvSpPr>
-        <p:spPr>
-          <a:xfrm>
-            <a:off x="457200" y="1783080"/>
-            <a:ext cx="6675120" cy="457200"/>
-          </a:xfrm>
-          <a:prstGeom prst="rect">
-            <a:avLst/>
-          </a:prstGeom>
-          <a:noFill/>
-          <a:ln/>
-        </p:spPr>
-        <p:txBody>
-          <a:bodyPr wrap="square" lIns="0" tIns="0" rIns="0" bIns="0" rtlCol="0" anchor="ctr"/>
-          <a:lstStyle/>
-          <a:p>
-            <a:pPr indent="0" marL="0">
-              <a:buNone/>
-            </a:pPr>
-            <a:r>
-              <a:rPr lang="en-US" sz="1400" i="1" dirty="0">
-                <a:solidFill>
-                  <a:srgbClr val="D8D9DB"/>
-                </a:solidFill>
-                <a:latin typeface="Calibri" pitchFamily="34" charset="0"/>
-                <a:ea typeface="Calibri" pitchFamily="34" charset="-122"/>
-                <a:cs typeface="Calibri" pitchFamily="34" charset="-120"/>
-              </a:rPr>
-              <a:t>A proven partner to stand up DOI's own OSSTP.</a:t>
-            </a:r>
-            <a:endParaRPr lang="en-US" sz="1400" dirty="0"/>
-          </a:p>
-        </p:txBody>
-      </p:sp>
-      <p:sp>
-        <p:nvSpPr>
-          <p:cNvPr id="10" name="Shape 8"/>
-          <p:cNvSpPr/>
-          <p:nvPr/>
-        </p:nvSpPr>
-        <p:spPr>
-          <a:xfrm>
-            <a:off x="457200" y="2606040"/>
-            <a:ext cx="256032" cy="32004"/>
-          </a:xfrm>
-          <a:prstGeom prst="rect">
-            <a:avLst/>
-          </a:prstGeom>
-          <a:solidFill>
-            <a:srgbClr val="FF002B"/>
-          </a:solidFill>
-          <a:ln/>
-        </p:spPr>
-      </p:sp>
-      <p:sp>
-        <p:nvSpPr>
-          <p:cNvPr id="11" name="Shape 9"/>
-          <p:cNvSpPr/>
-          <p:nvPr/>
-        </p:nvSpPr>
-        <p:spPr>
-          <a:xfrm>
-            <a:off x="457200" y="2606040"/>
-            <a:ext cx="32004" cy="256032"/>
-          </a:xfrm>
-          <a:prstGeom prst="rect">
-            <a:avLst/>
-          </a:prstGeom>
-          <a:solidFill>
-            <a:srgbClr val="FF002B"/>
-          </a:solidFill>
-          <a:ln/>
-        </p:spPr>
-      </p:sp>
-      <p:sp>
-        <p:nvSpPr>
-          <p:cNvPr id="12" name="Text 10"/>
-          <p:cNvSpPr txBox="1"/>
-          <p:nvPr/>
-        </p:nvSpPr>
-        <p:spPr>
-          <a:xfrm>
-            <a:off x="868680" y="2569464"/>
-            <a:ext cx="5623560" cy="384048"/>
-          </a:xfrm>
-          <a:prstGeom prst="rect">
-            <a:avLst/>
-          </a:prstGeom>
-          <a:noFill/>
-          <a:ln/>
-        </p:spPr>
-        <p:txBody>
-          <a:bodyPr wrap="square" lIns="0" tIns="0" rIns="0" bIns="0" rtlCol="0" anchor="t"/>
-          <a:lstStyle/>
-          <a:p>
-            <a:pPr indent="0" marL="0">
-              <a:buNone/>
-            </a:pPr>
-            <a:r>
-              <a:rPr lang="en-US" sz="1200" b="1" spc="50" kern="0" dirty="0">
-                <a:solidFill>
-                  <a:srgbClr val="FFFFFF"/>
-                </a:solidFill>
-                <a:latin typeface="Arial" pitchFamily="34" charset="0"/>
-                <a:ea typeface="Arial" pitchFamily="34" charset="-122"/>
-                <a:cs typeface="Arial" pitchFamily="34" charset="-120"/>
-              </a:rPr>
               <a:t>CURRENT OPERATOR, NOT JUST AN INSTRUCTOR</a:t>
             </a:r>
             <a:endParaRPr lang="en-US" sz="1200" dirty="0"/>
@@ -7455,7 +7219,7 @@
       </p:sp>
       <p:sp>
         <p:nvSpPr>
-          <p:cNvPr id="13" name="Text 11"/>
+          <p:cNvPr id="12" name="Text 9"/>
           <p:cNvSpPr txBox="1"/>
           <p:nvPr/>
         </p:nvSpPr>
@@ -7497,7 +7261,7 @@
       </p:sp>
       <p:sp>
         <p:nvSpPr>
-          <p:cNvPr id="14" name="Shape 12"/>
+          <p:cNvPr id="13" name="Shape 10"/>
           <p:cNvSpPr/>
           <p:nvPr/>
         </p:nvSpPr>
@@ -7517,7 +7281,7 @@
       </p:sp>
       <p:sp>
         <p:nvSpPr>
-          <p:cNvPr id="15" name="Shape 13"/>
+          <p:cNvPr id="14" name="Shape 11"/>
           <p:cNvSpPr/>
           <p:nvPr/>
         </p:nvSpPr>
@@ -7537,7 +7301,7 @@
       </p:sp>
       <p:sp>
         <p:nvSpPr>
-          <p:cNvPr id="16" name="Text 14"/>
+          <p:cNvPr id="15" name="Text 12"/>
           <p:cNvSpPr txBox="1"/>
           <p:nvPr/>
         </p:nvSpPr>
@@ -7576,7 +7340,7 @@
       </p:sp>
       <p:sp>
         <p:nvSpPr>
-          <p:cNvPr id="17" name="Text 15"/>
+          <p:cNvPr id="16" name="Text 13"/>
           <p:cNvSpPr txBox="1"/>
           <p:nvPr/>
         </p:nvSpPr>
@@ -7618,7 +7382,7 @@
       </p:sp>
       <p:sp>
         <p:nvSpPr>
-          <p:cNvPr id="18" name="Shape 16"/>
+          <p:cNvPr id="17" name="Shape 14"/>
           <p:cNvSpPr/>
           <p:nvPr/>
         </p:nvSpPr>
@@ -7638,7 +7402,7 @@
       </p:sp>
       <p:sp>
         <p:nvSpPr>
-          <p:cNvPr id="19" name="Shape 17"/>
+          <p:cNvPr id="18" name="Shape 15"/>
           <p:cNvSpPr/>
           <p:nvPr/>
         </p:nvSpPr>
@@ -7658,7 +7422,7 @@
       </p:sp>
       <p:sp>
         <p:nvSpPr>
-          <p:cNvPr id="20" name="Text 18"/>
+          <p:cNvPr id="19" name="Text 16"/>
           <p:cNvSpPr txBox="1"/>
           <p:nvPr/>
         </p:nvSpPr>
@@ -7697,7 +7461,7 @@
       </p:sp>
       <p:sp>
         <p:nvSpPr>
-          <p:cNvPr id="21" name="Text 19"/>
+          <p:cNvPr id="20" name="Text 17"/>
           <p:cNvSpPr txBox="1"/>
           <p:nvPr/>
         </p:nvSpPr>
@@ -7739,7 +7503,7 @@
       </p:sp>
       <p:sp>
         <p:nvSpPr>
-          <p:cNvPr id="22" name="Shape 20"/>
+          <p:cNvPr id="21" name="Shape 18"/>
           <p:cNvSpPr/>
           <p:nvPr/>
         </p:nvSpPr>
@@ -7759,7 +7523,7 @@
       </p:sp>
       <p:sp>
         <p:nvSpPr>
-          <p:cNvPr id="23" name="Shape 21"/>
+          <p:cNvPr id="22" name="Shape 19"/>
           <p:cNvSpPr/>
           <p:nvPr/>
         </p:nvSpPr>
@@ -7779,7 +7543,7 @@
       </p:sp>
       <p:sp>
         <p:nvSpPr>
-          <p:cNvPr id="24" name="Shape 22"/>
+          <p:cNvPr id="23" name="Shape 20"/>
           <p:cNvSpPr/>
           <p:nvPr/>
         </p:nvSpPr>
@@ -7799,7 +7563,7 @@
       </p:sp>
       <p:sp>
         <p:nvSpPr>
-          <p:cNvPr id="25" name="Text 23"/>
+          <p:cNvPr id="24" name="Text 21"/>
           <p:cNvSpPr txBox="1"/>
           <p:nvPr/>
         </p:nvSpPr>
@@ -7838,7 +7602,7 @@
       </p:sp>
       <p:sp>
         <p:nvSpPr>
-          <p:cNvPr id="26" name="Text 24"/>
+          <p:cNvPr id="25" name="Text 22"/>
           <p:cNvSpPr txBox="1"/>
           <p:nvPr/>
         </p:nvSpPr>
@@ -7920,7 +7684,7 @@
       </p:sp>
       <p:sp>
         <p:nvSpPr>
-          <p:cNvPr id="27" name="Text 25"/>
+          <p:cNvPr id="26" name="Text 23"/>
           <p:cNvSpPr txBox="1"/>
           <p:nvPr/>
         </p:nvSpPr>
@@ -7959,7 +7723,7 @@
       </p:sp>
       <p:sp>
         <p:nvSpPr>
-          <p:cNvPr id="28" name="Text 26"/>
+          <p:cNvPr id="27" name="Text 24"/>
           <p:cNvSpPr txBox="1"/>
           <p:nvPr/>
         </p:nvSpPr>
@@ -8061,7 +7825,7 @@
       </p:sp>
       <p:sp>
         <p:nvSpPr>
-          <p:cNvPr id="29" name="Shape 27"/>
+          <p:cNvPr id="28" name="Shape 25"/>
           <p:cNvSpPr/>
           <p:nvPr/>
         </p:nvSpPr>
@@ -8084,7 +7848,7 @@
       </p:sp>
       <p:sp>
         <p:nvSpPr>
-          <p:cNvPr id="30" name="Text 28"/>
+          <p:cNvPr id="29" name="Text 26"/>
           <p:cNvSpPr txBox="1"/>
           <p:nvPr/>
         </p:nvSpPr>

--- a/decks/Valletta_DOI_OSSTP_RFI_Summary.pptx
+++ b/decks/Valletta_DOI_OSSTP_RFI_Summary.pptx
@@ -1231,48 +1231,9 @@
           <a:chExt cx="0" cy="0"/>
         </a:xfrm>
       </p:grpSpPr>
-      <p:sp>
-        <p:nvSpPr>
-          <p:cNvPr id="2" name="Text 0"/>
-          <p:cNvSpPr txBox="1"/>
-          <p:nvPr/>
-        </p:nvSpPr>
-        <p:spPr>
-          <a:xfrm>
-            <a:off x="6949440" y="0"/>
-            <a:ext cx="5486400" cy="6858000"/>
-          </a:xfrm>
-          <a:prstGeom prst="rect">
-            <a:avLst/>
-          </a:prstGeom>
-          <a:noFill/>
-          <a:ln/>
-        </p:spPr>
-        <p:txBody>
-          <a:bodyPr wrap="square" lIns="0" tIns="0" rIns="0" bIns="0" rtlCol="0" anchor="t"/>
-          <a:lstStyle/>
-          <a:p>
-            <a:pPr algn="r" indent="0" marL="0">
-              <a:buNone/>
-            </a:pPr>
-            <a:r>
-              <a:rPr lang="en-US" sz="36000" b="1" dirty="0">
-                <a:solidFill>
-                  <a:srgbClr val="141414"/>
-                </a:solidFill>
-                <a:latin typeface="Cambria" pitchFamily="34" charset="0"/>
-                <a:ea typeface="Cambria" pitchFamily="34" charset="-122"/>
-                <a:cs typeface="Cambria" pitchFamily="34" charset="-120"/>
-              </a:rPr>
-              <a:t>01</a:t>
-            </a:r>
-            <a:endParaRPr lang="en-US" sz="36000" dirty="0"/>
-          </a:p>
-        </p:txBody>
-      </p:sp>
       <p:pic>
         <p:nvPicPr>
-          <p:cNvPr id="3" name="Image 0" descr="/home/user/valletta-design-system/assets/logo/valletta-mark.png">    </p:cNvPr>
+          <p:cNvPr id="2" name="Image 0" descr="/home/user/valletta-design-system/assets/logo/valletta-mark-ghost.png">    </p:cNvPr>
           <p:cNvPicPr>
             <a:picLocks noChangeAspect="1"/>
           </p:cNvPicPr>
@@ -1286,8 +1247,32 @@
         </p:blipFill>
         <p:spPr>
           <a:xfrm>
+            <a:off x="7891272" y="502920"/>
+            <a:ext cx="5486400" cy="5839260"/>
+          </a:xfrm>
+          <a:prstGeom prst="rect">
+            <a:avLst/>
+          </a:prstGeom>
+        </p:spPr>
+      </p:pic>
+      <p:pic>
+        <p:nvPicPr>
+          <p:cNvPr id="3" name="Image 1" descr="/home/user/valletta-design-system/assets/logo/valletta-mark.png">    </p:cNvPr>
+          <p:cNvPicPr>
+            <a:picLocks noChangeAspect="1"/>
+          </p:cNvPicPr>
+          <p:nvPr/>
+        </p:nvPicPr>
+        <p:blipFill>
+          <a:blip r:embed="rId2"/>
+          <a:stretch>
+            <a:fillRect/>
+          </a:stretch>
+        </p:blipFill>
+        <p:spPr>
+          <a:xfrm>
             <a:off x="457200" y="365760"/>
-            <a:ext cx="365760" cy="389284"/>
+            <a:ext cx="548640" cy="583926"/>
           </a:xfrm>
           <a:prstGeom prst="rect">
             <a:avLst/>
@@ -1296,14 +1281,14 @@
       </p:pic>
       <p:sp>
         <p:nvSpPr>
-          <p:cNvPr id="4" name="Text 1"/>
+          <p:cNvPr id="4" name="Text 0"/>
           <p:cNvSpPr txBox="1"/>
           <p:nvPr/>
         </p:nvSpPr>
         <p:spPr>
           <a:xfrm>
-            <a:off x="932688" y="329184"/>
-            <a:ext cx="2926080" cy="274320"/>
+            <a:off x="1170432" y="347472"/>
+            <a:ext cx="3291840" cy="402336"/>
           </a:xfrm>
           <a:prstGeom prst="rect">
             <a:avLst/>
@@ -1319,7 +1304,7 @@
               <a:buNone/>
             </a:pPr>
             <a:r>
-              <a:rPr lang="en-US" sz="1500" spc="200" kern="0" dirty="0">
+              <a:rPr lang="en-US" sz="2200" spc="200" kern="0" dirty="0">
                 <a:solidFill>
                   <a:srgbClr val="FFFFFF"/>
                 </a:solidFill>
@@ -1329,20 +1314,20 @@
               </a:rPr>
               <a:t>VALLETTA</a:t>
             </a:r>
-            <a:endParaRPr lang="en-US" sz="1500" dirty="0"/>
-          </a:p>
-        </p:txBody>
-      </p:sp>
-      <p:sp>
-        <p:nvSpPr>
-          <p:cNvPr id="5" name="Text 2"/>
+            <a:endParaRPr lang="en-US" sz="2200" dirty="0"/>
+          </a:p>
+        </p:txBody>
+      </p:sp>
+      <p:sp>
+        <p:nvSpPr>
+          <p:cNvPr id="5" name="Text 1"/>
           <p:cNvSpPr txBox="1"/>
           <p:nvPr/>
         </p:nvSpPr>
         <p:spPr>
           <a:xfrm>
-            <a:off x="932688" y="594360"/>
-            <a:ext cx="2926080" cy="219456"/>
+            <a:off x="1170432" y="731520"/>
+            <a:ext cx="3291840" cy="274320"/>
           </a:xfrm>
           <a:prstGeom prst="rect">
             <a:avLst/>
@@ -1358,7 +1343,7 @@
               <a:buNone/>
             </a:pPr>
             <a:r>
-              <a:rPr lang="en-US" sz="750" b="1" spc="200" kern="0" dirty="0">
+              <a:rPr lang="en-US" sz="1100" b="1" spc="200" kern="0" dirty="0">
                 <a:solidFill>
                   <a:srgbClr val="5B5F66"/>
                 </a:solidFill>
@@ -1368,13 +1353,13 @@
               </a:rPr>
               <a:t>INDUSTRIES, INC.</a:t>
             </a:r>
-            <a:endParaRPr lang="en-US" sz="750" dirty="0"/>
-          </a:p>
-        </p:txBody>
-      </p:sp>
-      <p:sp>
-        <p:nvSpPr>
-          <p:cNvPr id="6" name="Shape 3"/>
+            <a:endParaRPr lang="en-US" sz="1100" dirty="0"/>
+          </a:p>
+        </p:txBody>
+      </p:sp>
+      <p:sp>
+        <p:nvSpPr>
+          <p:cNvPr id="6" name="Shape 2"/>
           <p:cNvSpPr/>
           <p:nvPr/>
         </p:nvSpPr>
@@ -1394,7 +1379,7 @@
       </p:sp>
       <p:sp>
         <p:nvSpPr>
-          <p:cNvPr id="7" name="Shape 4"/>
+          <p:cNvPr id="7" name="Shape 3"/>
           <p:cNvSpPr/>
           <p:nvPr/>
         </p:nvSpPr>
@@ -1414,7 +1399,7 @@
       </p:sp>
       <p:sp>
         <p:nvSpPr>
-          <p:cNvPr id="8" name="Text 5"/>
+          <p:cNvPr id="8" name="Text 4"/>
           <p:cNvSpPr txBox="1"/>
           <p:nvPr/>
         </p:nvSpPr>
@@ -1453,7 +1438,7 @@
       </p:sp>
       <p:sp>
         <p:nvSpPr>
-          <p:cNvPr id="9" name="Text 6"/>
+          <p:cNvPr id="9" name="Text 5"/>
           <p:cNvSpPr txBox="1"/>
           <p:nvPr/>
         </p:nvSpPr>
@@ -1515,7 +1500,7 @@
       </p:sp>
       <p:sp>
         <p:nvSpPr>
-          <p:cNvPr id="10" name="Text 7"/>
+          <p:cNvPr id="10" name="Text 6"/>
           <p:cNvSpPr txBox="1"/>
           <p:nvPr/>
         </p:nvSpPr>
@@ -1554,7 +1539,7 @@
       </p:sp>
       <p:sp>
         <p:nvSpPr>
-          <p:cNvPr id="11" name="Text 8"/>
+          <p:cNvPr id="11" name="Text 7"/>
           <p:cNvSpPr txBox="1"/>
           <p:nvPr/>
         </p:nvSpPr>
@@ -1593,7 +1578,7 @@
       </p:sp>
       <p:sp>
         <p:nvSpPr>
-          <p:cNvPr id="12" name="Text 9"/>
+          <p:cNvPr id="12" name="Text 8"/>
           <p:cNvSpPr txBox="1"/>
           <p:nvPr/>
         </p:nvSpPr>
@@ -1632,7 +1617,7 @@
       </p:sp>
       <p:sp>
         <p:nvSpPr>
-          <p:cNvPr id="13" name="Shape 10"/>
+          <p:cNvPr id="13" name="Shape 9"/>
           <p:cNvSpPr/>
           <p:nvPr/>
         </p:nvSpPr>
@@ -1655,7 +1640,7 @@
       </p:sp>
       <p:sp>
         <p:nvSpPr>
-          <p:cNvPr id="14" name="Text 11"/>
+          <p:cNvPr id="14" name="Text 10"/>
           <p:cNvSpPr txBox="1"/>
           <p:nvPr/>
         </p:nvSpPr>
@@ -1694,7 +1679,7 @@
       </p:sp>
       <p:sp>
         <p:nvSpPr>
-          <p:cNvPr id="15" name="Text 12"/>
+          <p:cNvPr id="15" name="Text 11"/>
           <p:cNvSpPr txBox="1"/>
           <p:nvPr/>
         </p:nvSpPr>
@@ -1796,7 +1781,7 @@
       </p:sp>
       <p:sp>
         <p:nvSpPr>
-          <p:cNvPr id="16" name="Text 13"/>
+          <p:cNvPr id="16" name="Text 12"/>
           <p:cNvSpPr txBox="1"/>
           <p:nvPr/>
         </p:nvSpPr>
@@ -1835,7 +1820,7 @@
       </p:sp>
       <p:sp>
         <p:nvSpPr>
-          <p:cNvPr id="17" name="Text 14"/>
+          <p:cNvPr id="17" name="Text 13"/>
           <p:cNvSpPr txBox="1"/>
           <p:nvPr/>
         </p:nvSpPr>
@@ -1967,48 +1952,9 @@
           <a:chExt cx="0" cy="0"/>
         </a:xfrm>
       </p:grpSpPr>
-      <p:sp>
-        <p:nvSpPr>
-          <p:cNvPr id="2" name="Text 0"/>
-          <p:cNvSpPr txBox="1"/>
-          <p:nvPr/>
-        </p:nvSpPr>
-        <p:spPr>
-          <a:xfrm>
-            <a:off x="6949440" y="0"/>
-            <a:ext cx="5486400" cy="6858000"/>
-          </a:xfrm>
-          <a:prstGeom prst="rect">
-            <a:avLst/>
-          </a:prstGeom>
-          <a:noFill/>
-          <a:ln/>
-        </p:spPr>
-        <p:txBody>
-          <a:bodyPr wrap="square" lIns="0" tIns="0" rIns="0" bIns="0" rtlCol="0" anchor="t"/>
-          <a:lstStyle/>
-          <a:p>
-            <a:pPr algn="r" indent="0" marL="0">
-              <a:buNone/>
-            </a:pPr>
-            <a:r>
-              <a:rPr lang="en-US" sz="36000" b="1" dirty="0">
-                <a:solidFill>
-                  <a:srgbClr val="EBEBE9"/>
-                </a:solidFill>
-                <a:latin typeface="Cambria" pitchFamily="34" charset="0"/>
-                <a:ea typeface="Cambria" pitchFamily="34" charset="-122"/>
-                <a:cs typeface="Cambria" pitchFamily="34" charset="-120"/>
-              </a:rPr>
-              <a:t>02</a:t>
-            </a:r>
-            <a:endParaRPr lang="en-US" sz="36000" dirty="0"/>
-          </a:p>
-        </p:txBody>
-      </p:sp>
       <p:pic>
         <p:nvPicPr>
-          <p:cNvPr id="3" name="Image 0" descr="/home/user/valletta-design-system/assets/logo/valletta-lockup.png">    </p:cNvPr>
+          <p:cNvPr id="2" name="Image 0" descr="/home/user/valletta-design-system/assets/logo/valletta-mark-ghost.png">    </p:cNvPr>
           <p:cNvPicPr>
             <a:picLocks noChangeAspect="1"/>
           </p:cNvPicPr>
@@ -2022,8 +1968,32 @@
         </p:blipFill>
         <p:spPr>
           <a:xfrm>
+            <a:off x="7891272" y="502920"/>
+            <a:ext cx="5486400" cy="5839260"/>
+          </a:xfrm>
+          <a:prstGeom prst="rect">
+            <a:avLst/>
+          </a:prstGeom>
+        </p:spPr>
+      </p:pic>
+      <p:pic>
+        <p:nvPicPr>
+          <p:cNvPr id="3" name="Image 1" descr="/home/user/valletta-design-system/assets/logo/valletta-lockup.png">    </p:cNvPr>
+          <p:cNvPicPr>
+            <a:picLocks noChangeAspect="1"/>
+          </p:cNvPicPr>
+          <p:nvPr/>
+        </p:nvPicPr>
+        <p:blipFill>
+          <a:blip r:embed="rId2"/>
+          <a:stretch>
+            <a:fillRect/>
+          </a:stretch>
+        </p:blipFill>
+        <p:spPr>
+          <a:xfrm>
             <a:off x="457200" y="365760"/>
-            <a:ext cx="1828800" cy="384048"/>
+            <a:ext cx="2743200" cy="576072"/>
           </a:xfrm>
           <a:prstGeom prst="rect">
             <a:avLst/>
@@ -2032,13 +2002,13 @@
       </p:pic>
       <p:sp>
         <p:nvSpPr>
-          <p:cNvPr id="4" name="Text 1"/>
+          <p:cNvPr id="4" name="Text 0"/>
           <p:cNvSpPr txBox="1"/>
           <p:nvPr/>
         </p:nvSpPr>
         <p:spPr>
           <a:xfrm>
-            <a:off x="457200" y="777240"/>
+            <a:off x="457200" y="1005840"/>
             <a:ext cx="7315200" cy="320040"/>
           </a:xfrm>
           <a:prstGeom prst="rect">
@@ -2071,13 +2041,13 @@
       </p:sp>
       <p:sp>
         <p:nvSpPr>
-          <p:cNvPr id="5" name="Text 2"/>
+          <p:cNvPr id="5" name="Text 1"/>
           <p:cNvSpPr txBox="1"/>
           <p:nvPr/>
         </p:nvSpPr>
         <p:spPr>
           <a:xfrm>
-            <a:off x="457200" y="1097280"/>
+            <a:off x="457200" y="1325880"/>
             <a:ext cx="11274552" cy="731520"/>
           </a:xfrm>
           <a:prstGeom prst="rect">
@@ -2110,13 +2080,13 @@
       </p:sp>
       <p:sp>
         <p:nvSpPr>
-          <p:cNvPr id="6" name="Shape 3"/>
+          <p:cNvPr id="6" name="Shape 2"/>
           <p:cNvSpPr/>
           <p:nvPr/>
         </p:nvSpPr>
         <p:spPr>
           <a:xfrm>
-            <a:off x="457200" y="1965960"/>
+            <a:off x="457200" y="2194560"/>
             <a:ext cx="3200400" cy="1280160"/>
           </a:xfrm>
           <a:prstGeom prst="rect">
@@ -2130,13 +2100,13 @@
       </p:sp>
       <p:sp>
         <p:nvSpPr>
-          <p:cNvPr id="7" name="Shape 4"/>
+          <p:cNvPr id="7" name="Shape 3"/>
           <p:cNvSpPr/>
           <p:nvPr/>
         </p:nvSpPr>
         <p:spPr>
           <a:xfrm>
-            <a:off x="457200" y="1965960"/>
+            <a:off x="457200" y="2194560"/>
             <a:ext cx="274320" cy="29261"/>
           </a:xfrm>
           <a:prstGeom prst="rect">
@@ -2150,13 +2120,13 @@
       </p:sp>
       <p:sp>
         <p:nvSpPr>
-          <p:cNvPr id="8" name="Shape 5"/>
+          <p:cNvPr id="8" name="Shape 4"/>
           <p:cNvSpPr/>
           <p:nvPr/>
         </p:nvSpPr>
         <p:spPr>
           <a:xfrm>
-            <a:off x="457200" y="1965960"/>
+            <a:off x="457200" y="2194560"/>
             <a:ext cx="29261" cy="274320"/>
           </a:xfrm>
           <a:prstGeom prst="rect">
@@ -2170,13 +2140,13 @@
       </p:sp>
       <p:sp>
         <p:nvSpPr>
-          <p:cNvPr id="9" name="Text 6"/>
+          <p:cNvPr id="9" name="Text 5"/>
           <p:cNvSpPr txBox="1"/>
           <p:nvPr/>
         </p:nvSpPr>
         <p:spPr>
           <a:xfrm>
-            <a:off x="685800" y="2112264"/>
+            <a:off x="685800" y="2340864"/>
             <a:ext cx="2743200" cy="274320"/>
           </a:xfrm>
           <a:prstGeom prst="rect">
@@ -2209,13 +2179,13 @@
       </p:sp>
       <p:sp>
         <p:nvSpPr>
-          <p:cNvPr id="10" name="Text 7"/>
+          <p:cNvPr id="10" name="Text 6"/>
           <p:cNvSpPr txBox="1"/>
           <p:nvPr/>
         </p:nvSpPr>
         <p:spPr>
           <a:xfrm>
-            <a:off x="685800" y="2368296"/>
+            <a:off x="685800" y="2596896"/>
             <a:ext cx="2743200" cy="475488"/>
           </a:xfrm>
           <a:prstGeom prst="rect">
@@ -2248,13 +2218,13 @@
       </p:sp>
       <p:sp>
         <p:nvSpPr>
-          <p:cNvPr id="11" name="Text 8"/>
+          <p:cNvPr id="11" name="Text 7"/>
           <p:cNvSpPr txBox="1"/>
           <p:nvPr/>
         </p:nvSpPr>
         <p:spPr>
           <a:xfrm>
-            <a:off x="685800" y="2843784"/>
+            <a:off x="685800" y="3072384"/>
             <a:ext cx="2743200" cy="365760"/>
           </a:xfrm>
           <a:prstGeom prst="rect">
@@ -2287,13 +2257,13 @@
       </p:sp>
       <p:sp>
         <p:nvSpPr>
-          <p:cNvPr id="12" name="Shape 9"/>
+          <p:cNvPr id="12" name="Shape 8"/>
           <p:cNvSpPr/>
           <p:nvPr/>
         </p:nvSpPr>
         <p:spPr>
           <a:xfrm>
-            <a:off x="3794760" y="1965960"/>
+            <a:off x="3794760" y="2194560"/>
             <a:ext cx="3200400" cy="1280160"/>
           </a:xfrm>
           <a:prstGeom prst="rect">
@@ -2307,13 +2277,13 @@
       </p:sp>
       <p:sp>
         <p:nvSpPr>
-          <p:cNvPr id="13" name="Shape 10"/>
+          <p:cNvPr id="13" name="Shape 9"/>
           <p:cNvSpPr/>
           <p:nvPr/>
         </p:nvSpPr>
         <p:spPr>
           <a:xfrm>
-            <a:off x="3794760" y="1965960"/>
+            <a:off x="3794760" y="2194560"/>
             <a:ext cx="274320" cy="29261"/>
           </a:xfrm>
           <a:prstGeom prst="rect">
@@ -2327,13 +2297,13 @@
       </p:sp>
       <p:sp>
         <p:nvSpPr>
-          <p:cNvPr id="14" name="Shape 11"/>
+          <p:cNvPr id="14" name="Shape 10"/>
           <p:cNvSpPr/>
           <p:nvPr/>
         </p:nvSpPr>
         <p:spPr>
           <a:xfrm>
-            <a:off x="3794760" y="1965960"/>
+            <a:off x="3794760" y="2194560"/>
             <a:ext cx="29261" cy="274320"/>
           </a:xfrm>
           <a:prstGeom prst="rect">
@@ -2347,13 +2317,13 @@
       </p:sp>
       <p:sp>
         <p:nvSpPr>
-          <p:cNvPr id="15" name="Text 12"/>
+          <p:cNvPr id="15" name="Text 11"/>
           <p:cNvSpPr txBox="1"/>
           <p:nvPr/>
         </p:nvSpPr>
         <p:spPr>
           <a:xfrm>
-            <a:off x="4023360" y="2112264"/>
+            <a:off x="4023360" y="2340864"/>
             <a:ext cx="2743200" cy="274320"/>
           </a:xfrm>
           <a:prstGeom prst="rect">
@@ -2386,13 +2356,13 @@
       </p:sp>
       <p:sp>
         <p:nvSpPr>
-          <p:cNvPr id="16" name="Text 13"/>
+          <p:cNvPr id="16" name="Text 12"/>
           <p:cNvSpPr txBox="1"/>
           <p:nvPr/>
         </p:nvSpPr>
         <p:spPr>
           <a:xfrm>
-            <a:off x="4023360" y="2368296"/>
+            <a:off x="4023360" y="2596896"/>
             <a:ext cx="2743200" cy="475488"/>
           </a:xfrm>
           <a:prstGeom prst="rect">
@@ -2425,13 +2395,13 @@
       </p:sp>
       <p:sp>
         <p:nvSpPr>
-          <p:cNvPr id="17" name="Text 14"/>
+          <p:cNvPr id="17" name="Text 13"/>
           <p:cNvSpPr txBox="1"/>
           <p:nvPr/>
         </p:nvSpPr>
         <p:spPr>
           <a:xfrm>
-            <a:off x="4023360" y="2843784"/>
+            <a:off x="4023360" y="3072384"/>
             <a:ext cx="2743200" cy="365760"/>
           </a:xfrm>
           <a:prstGeom prst="rect">
@@ -2464,13 +2434,13 @@
       </p:sp>
       <p:sp>
         <p:nvSpPr>
-          <p:cNvPr id="18" name="Text 15"/>
+          <p:cNvPr id="18" name="Text 14"/>
           <p:cNvSpPr txBox="1"/>
           <p:nvPr/>
         </p:nvSpPr>
         <p:spPr>
           <a:xfrm>
-            <a:off x="7178040" y="1965960"/>
+            <a:off x="7178040" y="2194560"/>
             <a:ext cx="4553712" cy="274320"/>
           </a:xfrm>
           <a:prstGeom prst="rect">
@@ -2503,13 +2473,13 @@
       </p:sp>
       <p:sp>
         <p:nvSpPr>
-          <p:cNvPr id="19" name="Text 16"/>
+          <p:cNvPr id="19" name="Text 15"/>
           <p:cNvSpPr txBox="1"/>
           <p:nvPr/>
         </p:nvSpPr>
         <p:spPr>
           <a:xfrm>
-            <a:off x="7178040" y="2276856"/>
+            <a:off x="7178040" y="2505456"/>
             <a:ext cx="4553712" cy="969264"/>
           </a:xfrm>
           <a:prstGeom prst="rect">
@@ -2573,13 +2543,13 @@
       </p:sp>
       <p:sp>
         <p:nvSpPr>
-          <p:cNvPr id="20" name="Text 17"/>
+          <p:cNvPr id="20" name="Text 16"/>
           <p:cNvSpPr txBox="1"/>
           <p:nvPr/>
         </p:nvSpPr>
         <p:spPr>
           <a:xfrm>
-            <a:off x="457200" y="3383280"/>
+            <a:off x="457200" y="3611880"/>
             <a:ext cx="11274552" cy="274320"/>
           </a:xfrm>
           <a:prstGeom prst="rect">
@@ -2612,13 +2582,13 @@
       </p:sp>
       <p:sp>
         <p:nvSpPr>
-          <p:cNvPr id="21" name="Shape 18"/>
+          <p:cNvPr id="21" name="Shape 17"/>
           <p:cNvSpPr/>
           <p:nvPr/>
         </p:nvSpPr>
         <p:spPr>
           <a:xfrm>
-            <a:off x="457200" y="3703320"/>
+            <a:off x="457200" y="3931920"/>
             <a:ext cx="2715768" cy="1097280"/>
           </a:xfrm>
           <a:prstGeom prst="rect">
@@ -2637,13 +2607,13 @@
       </p:sp>
       <p:sp>
         <p:nvSpPr>
-          <p:cNvPr id="22" name="Shape 19"/>
+          <p:cNvPr id="22" name="Shape 18"/>
           <p:cNvSpPr/>
           <p:nvPr/>
         </p:nvSpPr>
         <p:spPr>
           <a:xfrm>
-            <a:off x="621792" y="3840480"/>
+            <a:off x="621792" y="4069080"/>
             <a:ext cx="347472" cy="347472"/>
           </a:xfrm>
           <a:prstGeom prst="ellipse">
@@ -2657,13 +2627,13 @@
       </p:sp>
       <p:sp>
         <p:nvSpPr>
-          <p:cNvPr id="23" name="Text 20"/>
+          <p:cNvPr id="23" name="Text 19"/>
           <p:cNvSpPr txBox="1"/>
           <p:nvPr/>
         </p:nvSpPr>
         <p:spPr>
           <a:xfrm>
-            <a:off x="621792" y="3840480"/>
+            <a:off x="621792" y="4069080"/>
             <a:ext cx="347472" cy="347472"/>
           </a:xfrm>
           <a:prstGeom prst="rect">
@@ -2696,13 +2666,13 @@
       </p:sp>
       <p:sp>
         <p:nvSpPr>
-          <p:cNvPr id="24" name="Text 21"/>
+          <p:cNvPr id="24" name="Text 20"/>
           <p:cNvSpPr txBox="1"/>
           <p:nvPr/>
         </p:nvSpPr>
         <p:spPr>
           <a:xfrm>
-            <a:off x="640080" y="4233672"/>
+            <a:off x="640080" y="4462272"/>
             <a:ext cx="2350008" cy="475488"/>
           </a:xfrm>
           <a:prstGeom prst="rect">
@@ -2738,13 +2708,13 @@
       </p:sp>
       <p:sp>
         <p:nvSpPr>
-          <p:cNvPr id="25" name="Shape 22"/>
+          <p:cNvPr id="25" name="Shape 21"/>
           <p:cNvSpPr/>
           <p:nvPr/>
         </p:nvSpPr>
         <p:spPr>
           <a:xfrm>
-            <a:off x="3310128" y="3703320"/>
+            <a:off x="3310128" y="3931920"/>
             <a:ext cx="2715768" cy="1097280"/>
           </a:xfrm>
           <a:prstGeom prst="rect">
@@ -2763,13 +2733,13 @@
       </p:sp>
       <p:sp>
         <p:nvSpPr>
-          <p:cNvPr id="26" name="Shape 23"/>
+          <p:cNvPr id="26" name="Shape 22"/>
           <p:cNvSpPr/>
           <p:nvPr/>
         </p:nvSpPr>
         <p:spPr>
           <a:xfrm>
-            <a:off x="3474720" y="3840480"/>
+            <a:off x="3474720" y="4069080"/>
             <a:ext cx="347472" cy="347472"/>
           </a:xfrm>
           <a:prstGeom prst="ellipse">
@@ -2783,13 +2753,13 @@
       </p:sp>
       <p:sp>
         <p:nvSpPr>
-          <p:cNvPr id="27" name="Text 24"/>
+          <p:cNvPr id="27" name="Text 23"/>
           <p:cNvSpPr txBox="1"/>
           <p:nvPr/>
         </p:nvSpPr>
         <p:spPr>
           <a:xfrm>
-            <a:off x="3474720" y="3840480"/>
+            <a:off x="3474720" y="4069080"/>
             <a:ext cx="347472" cy="347472"/>
           </a:xfrm>
           <a:prstGeom prst="rect">
@@ -2822,13 +2792,13 @@
       </p:sp>
       <p:sp>
         <p:nvSpPr>
-          <p:cNvPr id="28" name="Text 25"/>
+          <p:cNvPr id="28" name="Text 24"/>
           <p:cNvSpPr txBox="1"/>
           <p:nvPr/>
         </p:nvSpPr>
         <p:spPr>
           <a:xfrm>
-            <a:off x="3493008" y="4233672"/>
+            <a:off x="3493008" y="4462272"/>
             <a:ext cx="2350008" cy="475488"/>
           </a:xfrm>
           <a:prstGeom prst="rect">
@@ -2864,13 +2834,13 @@
       </p:sp>
       <p:sp>
         <p:nvSpPr>
-          <p:cNvPr id="29" name="Shape 26"/>
+          <p:cNvPr id="29" name="Shape 25"/>
           <p:cNvSpPr/>
           <p:nvPr/>
         </p:nvSpPr>
         <p:spPr>
           <a:xfrm>
-            <a:off x="6163056" y="3703320"/>
+            <a:off x="6163056" y="3931920"/>
             <a:ext cx="2715768" cy="1097280"/>
           </a:xfrm>
           <a:prstGeom prst="rect">
@@ -2889,13 +2859,13 @@
       </p:sp>
       <p:sp>
         <p:nvSpPr>
-          <p:cNvPr id="30" name="Shape 27"/>
+          <p:cNvPr id="30" name="Shape 26"/>
           <p:cNvSpPr/>
           <p:nvPr/>
         </p:nvSpPr>
         <p:spPr>
           <a:xfrm>
-            <a:off x="6327648" y="3840480"/>
+            <a:off x="6327648" y="4069080"/>
             <a:ext cx="347472" cy="347472"/>
           </a:xfrm>
           <a:prstGeom prst="ellipse">
@@ -2909,13 +2879,13 @@
       </p:sp>
       <p:sp>
         <p:nvSpPr>
-          <p:cNvPr id="31" name="Text 28"/>
+          <p:cNvPr id="31" name="Text 27"/>
           <p:cNvSpPr txBox="1"/>
           <p:nvPr/>
         </p:nvSpPr>
         <p:spPr>
           <a:xfrm>
-            <a:off x="6327648" y="3840480"/>
+            <a:off x="6327648" y="4069080"/>
             <a:ext cx="347472" cy="347472"/>
           </a:xfrm>
           <a:prstGeom prst="rect">
@@ -2948,13 +2918,13 @@
       </p:sp>
       <p:sp>
         <p:nvSpPr>
-          <p:cNvPr id="32" name="Text 29"/>
+          <p:cNvPr id="32" name="Text 28"/>
           <p:cNvSpPr txBox="1"/>
           <p:nvPr/>
         </p:nvSpPr>
         <p:spPr>
           <a:xfrm>
-            <a:off x="6345936" y="4233672"/>
+            <a:off x="6345936" y="4462272"/>
             <a:ext cx="2350008" cy="475488"/>
           </a:xfrm>
           <a:prstGeom prst="rect">
@@ -2990,13 +2960,13 @@
       </p:sp>
       <p:sp>
         <p:nvSpPr>
-          <p:cNvPr id="33" name="Shape 30"/>
+          <p:cNvPr id="33" name="Shape 29"/>
           <p:cNvSpPr/>
           <p:nvPr/>
         </p:nvSpPr>
         <p:spPr>
           <a:xfrm>
-            <a:off x="9015984" y="3703320"/>
+            <a:off x="9015984" y="3931920"/>
             <a:ext cx="2715768" cy="1097280"/>
           </a:xfrm>
           <a:prstGeom prst="rect">
@@ -3015,13 +2985,13 @@
       </p:sp>
       <p:sp>
         <p:nvSpPr>
-          <p:cNvPr id="34" name="Shape 31"/>
+          <p:cNvPr id="34" name="Shape 30"/>
           <p:cNvSpPr/>
           <p:nvPr/>
         </p:nvSpPr>
         <p:spPr>
           <a:xfrm>
-            <a:off x="9180576" y="3840480"/>
+            <a:off x="9180576" y="4069080"/>
             <a:ext cx="347472" cy="347472"/>
           </a:xfrm>
           <a:prstGeom prst="ellipse">
@@ -3035,13 +3005,13 @@
       </p:sp>
       <p:sp>
         <p:nvSpPr>
-          <p:cNvPr id="35" name="Text 32"/>
+          <p:cNvPr id="35" name="Text 31"/>
           <p:cNvSpPr txBox="1"/>
           <p:nvPr/>
         </p:nvSpPr>
         <p:spPr>
           <a:xfrm>
-            <a:off x="9180576" y="3840480"/>
+            <a:off x="9180576" y="4069080"/>
             <a:ext cx="347472" cy="347472"/>
           </a:xfrm>
           <a:prstGeom prst="rect">
@@ -3074,13 +3044,13 @@
       </p:sp>
       <p:sp>
         <p:nvSpPr>
-          <p:cNvPr id="36" name="Text 33"/>
+          <p:cNvPr id="36" name="Text 32"/>
           <p:cNvSpPr txBox="1"/>
           <p:nvPr/>
         </p:nvSpPr>
         <p:spPr>
           <a:xfrm>
-            <a:off x="9198864" y="4233672"/>
+            <a:off x="9198864" y="4462272"/>
             <a:ext cx="2350008" cy="475488"/>
           </a:xfrm>
           <a:prstGeom prst="rect">
@@ -3116,13 +3086,13 @@
       </p:sp>
       <p:sp>
         <p:nvSpPr>
-          <p:cNvPr id="37" name="Shape 34"/>
+          <p:cNvPr id="37" name="Shape 33"/>
           <p:cNvSpPr/>
           <p:nvPr/>
         </p:nvSpPr>
         <p:spPr>
           <a:xfrm>
-            <a:off x="457200" y="4910328"/>
+            <a:off x="457200" y="5138928"/>
             <a:ext cx="2715768" cy="1097280"/>
           </a:xfrm>
           <a:prstGeom prst="rect">
@@ -3141,13 +3111,13 @@
       </p:sp>
       <p:sp>
         <p:nvSpPr>
-          <p:cNvPr id="38" name="Shape 35"/>
+          <p:cNvPr id="38" name="Shape 34"/>
           <p:cNvSpPr/>
           <p:nvPr/>
         </p:nvSpPr>
         <p:spPr>
           <a:xfrm>
-            <a:off x="621792" y="5047488"/>
+            <a:off x="621792" y="5276088"/>
             <a:ext cx="347472" cy="347472"/>
           </a:xfrm>
           <a:prstGeom prst="ellipse">
@@ -3161,13 +3131,13 @@
       </p:sp>
       <p:sp>
         <p:nvSpPr>
-          <p:cNvPr id="39" name="Text 36"/>
+          <p:cNvPr id="39" name="Text 35"/>
           <p:cNvSpPr txBox="1"/>
           <p:nvPr/>
         </p:nvSpPr>
         <p:spPr>
           <a:xfrm>
-            <a:off x="621792" y="5047488"/>
+            <a:off x="621792" y="5276088"/>
             <a:ext cx="347472" cy="347472"/>
           </a:xfrm>
           <a:prstGeom prst="rect">
@@ -3200,13 +3170,13 @@
       </p:sp>
       <p:sp>
         <p:nvSpPr>
-          <p:cNvPr id="40" name="Text 37"/>
+          <p:cNvPr id="40" name="Text 36"/>
           <p:cNvSpPr txBox="1"/>
           <p:nvPr/>
         </p:nvSpPr>
         <p:spPr>
           <a:xfrm>
-            <a:off x="640080" y="5440680"/>
+            <a:off x="640080" y="5669280"/>
             <a:ext cx="2350008" cy="475488"/>
           </a:xfrm>
           <a:prstGeom prst="rect">
@@ -3242,13 +3212,13 @@
       </p:sp>
       <p:sp>
         <p:nvSpPr>
-          <p:cNvPr id="41" name="Shape 38"/>
+          <p:cNvPr id="41" name="Shape 37"/>
           <p:cNvSpPr/>
           <p:nvPr/>
         </p:nvSpPr>
         <p:spPr>
           <a:xfrm>
-            <a:off x="3310128" y="4910328"/>
+            <a:off x="3310128" y="5138928"/>
             <a:ext cx="2715768" cy="1097280"/>
           </a:xfrm>
           <a:prstGeom prst="rect">
@@ -3267,13 +3237,13 @@
       </p:sp>
       <p:sp>
         <p:nvSpPr>
-          <p:cNvPr id="42" name="Shape 39"/>
+          <p:cNvPr id="42" name="Shape 38"/>
           <p:cNvSpPr/>
           <p:nvPr/>
         </p:nvSpPr>
         <p:spPr>
           <a:xfrm>
-            <a:off x="3474720" y="5047488"/>
+            <a:off x="3474720" y="5276088"/>
             <a:ext cx="347472" cy="347472"/>
           </a:xfrm>
           <a:prstGeom prst="ellipse">
@@ -3287,13 +3257,13 @@
       </p:sp>
       <p:sp>
         <p:nvSpPr>
-          <p:cNvPr id="43" name="Text 40"/>
+          <p:cNvPr id="43" name="Text 39"/>
           <p:cNvSpPr txBox="1"/>
           <p:nvPr/>
         </p:nvSpPr>
         <p:spPr>
           <a:xfrm>
-            <a:off x="3474720" y="5047488"/>
+            <a:off x="3474720" y="5276088"/>
             <a:ext cx="347472" cy="347472"/>
           </a:xfrm>
           <a:prstGeom prst="rect">
@@ -3326,13 +3296,13 @@
       </p:sp>
       <p:sp>
         <p:nvSpPr>
-          <p:cNvPr id="44" name="Text 41"/>
+          <p:cNvPr id="44" name="Text 40"/>
           <p:cNvSpPr txBox="1"/>
           <p:nvPr/>
         </p:nvSpPr>
         <p:spPr>
           <a:xfrm>
-            <a:off x="3493008" y="5440680"/>
+            <a:off x="3493008" y="5669280"/>
             <a:ext cx="2350008" cy="475488"/>
           </a:xfrm>
           <a:prstGeom prst="rect">
@@ -3368,13 +3338,13 @@
       </p:sp>
       <p:sp>
         <p:nvSpPr>
-          <p:cNvPr id="45" name="Shape 42"/>
+          <p:cNvPr id="45" name="Shape 41"/>
           <p:cNvSpPr/>
           <p:nvPr/>
         </p:nvSpPr>
         <p:spPr>
           <a:xfrm>
-            <a:off x="6163056" y="4910328"/>
+            <a:off x="6163056" y="5138928"/>
             <a:ext cx="2715768" cy="1097280"/>
           </a:xfrm>
           <a:prstGeom prst="rect">
@@ -3393,13 +3363,13 @@
       </p:sp>
       <p:sp>
         <p:nvSpPr>
-          <p:cNvPr id="46" name="Shape 43"/>
+          <p:cNvPr id="46" name="Shape 42"/>
           <p:cNvSpPr/>
           <p:nvPr/>
         </p:nvSpPr>
         <p:spPr>
           <a:xfrm>
-            <a:off x="6327648" y="5047488"/>
+            <a:off x="6327648" y="5276088"/>
             <a:ext cx="347472" cy="347472"/>
           </a:xfrm>
           <a:prstGeom prst="ellipse">
@@ -3413,13 +3383,13 @@
       </p:sp>
       <p:sp>
         <p:nvSpPr>
-          <p:cNvPr id="47" name="Text 44"/>
+          <p:cNvPr id="47" name="Text 43"/>
           <p:cNvSpPr txBox="1"/>
           <p:nvPr/>
         </p:nvSpPr>
         <p:spPr>
           <a:xfrm>
-            <a:off x="6327648" y="5047488"/>
+            <a:off x="6327648" y="5276088"/>
             <a:ext cx="347472" cy="347472"/>
           </a:xfrm>
           <a:prstGeom prst="rect">
@@ -3452,13 +3422,13 @@
       </p:sp>
       <p:sp>
         <p:nvSpPr>
-          <p:cNvPr id="48" name="Text 45"/>
+          <p:cNvPr id="48" name="Text 44"/>
           <p:cNvSpPr txBox="1"/>
           <p:nvPr/>
         </p:nvSpPr>
         <p:spPr>
           <a:xfrm>
-            <a:off x="6345936" y="5440680"/>
+            <a:off x="6345936" y="5669280"/>
             <a:ext cx="2350008" cy="475488"/>
           </a:xfrm>
           <a:prstGeom prst="rect">
@@ -3494,13 +3464,13 @@
       </p:sp>
       <p:sp>
         <p:nvSpPr>
-          <p:cNvPr id="49" name="Shape 46"/>
+          <p:cNvPr id="49" name="Shape 45"/>
           <p:cNvSpPr/>
           <p:nvPr/>
         </p:nvSpPr>
         <p:spPr>
           <a:xfrm>
-            <a:off x="9015984" y="4910328"/>
+            <a:off x="9015984" y="5138928"/>
             <a:ext cx="2715768" cy="1097280"/>
           </a:xfrm>
           <a:prstGeom prst="rect">
@@ -3519,13 +3489,13 @@
       </p:sp>
       <p:sp>
         <p:nvSpPr>
-          <p:cNvPr id="50" name="Shape 47"/>
+          <p:cNvPr id="50" name="Shape 46"/>
           <p:cNvSpPr/>
           <p:nvPr/>
         </p:nvSpPr>
         <p:spPr>
           <a:xfrm>
-            <a:off x="9180576" y="5047488"/>
+            <a:off x="9180576" y="5276088"/>
             <a:ext cx="347472" cy="347472"/>
           </a:xfrm>
           <a:prstGeom prst="ellipse">
@@ -3539,13 +3509,13 @@
       </p:sp>
       <p:sp>
         <p:nvSpPr>
-          <p:cNvPr id="51" name="Text 48"/>
+          <p:cNvPr id="51" name="Text 47"/>
           <p:cNvSpPr txBox="1"/>
           <p:nvPr/>
         </p:nvSpPr>
         <p:spPr>
           <a:xfrm>
-            <a:off x="9180576" y="5047488"/>
+            <a:off x="9180576" y="5276088"/>
             <a:ext cx="347472" cy="347472"/>
           </a:xfrm>
           <a:prstGeom prst="rect">
@@ -3578,13 +3548,13 @@
       </p:sp>
       <p:sp>
         <p:nvSpPr>
-          <p:cNvPr id="52" name="Text 49"/>
+          <p:cNvPr id="52" name="Text 48"/>
           <p:cNvSpPr txBox="1"/>
           <p:nvPr/>
         </p:nvSpPr>
         <p:spPr>
           <a:xfrm>
-            <a:off x="9198864" y="5440680"/>
+            <a:off x="9198864" y="5669280"/>
             <a:ext cx="2350008" cy="475488"/>
           </a:xfrm>
           <a:prstGeom prst="rect">
@@ -3620,7 +3590,7 @@
       </p:sp>
       <p:sp>
         <p:nvSpPr>
-          <p:cNvPr id="53" name="Text 50"/>
+          <p:cNvPr id="53" name="Text 49"/>
           <p:cNvSpPr/>
           <p:nvPr/>
         </p:nvSpPr>
@@ -3689,48 +3659,9 @@
           <a:chExt cx="0" cy="0"/>
         </a:xfrm>
       </p:grpSpPr>
-      <p:sp>
-        <p:nvSpPr>
-          <p:cNvPr id="2" name="Text 0"/>
-          <p:cNvSpPr txBox="1"/>
-          <p:nvPr/>
-        </p:nvSpPr>
-        <p:spPr>
-          <a:xfrm>
-            <a:off x="6949440" y="0"/>
-            <a:ext cx="5486400" cy="6858000"/>
-          </a:xfrm>
-          <a:prstGeom prst="rect">
-            <a:avLst/>
-          </a:prstGeom>
-          <a:noFill/>
-          <a:ln/>
-        </p:spPr>
-        <p:txBody>
-          <a:bodyPr wrap="square" lIns="0" tIns="0" rIns="0" bIns="0" rtlCol="0" anchor="t"/>
-          <a:lstStyle/>
-          <a:p>
-            <a:pPr algn="r" indent="0" marL="0">
-              <a:buNone/>
-            </a:pPr>
-            <a:r>
-              <a:rPr lang="en-US" sz="36000" b="1" dirty="0">
-                <a:solidFill>
-                  <a:srgbClr val="141414"/>
-                </a:solidFill>
-                <a:latin typeface="Cambria" pitchFamily="34" charset="0"/>
-                <a:ea typeface="Cambria" pitchFamily="34" charset="-122"/>
-                <a:cs typeface="Cambria" pitchFamily="34" charset="-120"/>
-              </a:rPr>
-              <a:t>03</a:t>
-            </a:r>
-            <a:endParaRPr lang="en-US" sz="36000" dirty="0"/>
-          </a:p>
-        </p:txBody>
-      </p:sp>
       <p:pic>
         <p:nvPicPr>
-          <p:cNvPr id="3" name="Image 0" descr="/home/user/valletta-design-system/assets/logo/valletta-mark.png">    </p:cNvPr>
+          <p:cNvPr id="2" name="Image 0" descr="/home/user/valletta-design-system/assets/logo/valletta-mark-ghost.png">    </p:cNvPr>
           <p:cNvPicPr>
             <a:picLocks noChangeAspect="1"/>
           </p:cNvPicPr>
@@ -3744,8 +3675,32 @@
         </p:blipFill>
         <p:spPr>
           <a:xfrm>
+            <a:off x="7891272" y="502920"/>
+            <a:ext cx="5486400" cy="5839260"/>
+          </a:xfrm>
+          <a:prstGeom prst="rect">
+            <a:avLst/>
+          </a:prstGeom>
+        </p:spPr>
+      </p:pic>
+      <p:pic>
+        <p:nvPicPr>
+          <p:cNvPr id="3" name="Image 1" descr="/home/user/valletta-design-system/assets/logo/valletta-mark.png">    </p:cNvPr>
+          <p:cNvPicPr>
+            <a:picLocks noChangeAspect="1"/>
+          </p:cNvPicPr>
+          <p:nvPr/>
+        </p:nvPicPr>
+        <p:blipFill>
+          <a:blip r:embed="rId2"/>
+          <a:stretch>
+            <a:fillRect/>
+          </a:stretch>
+        </p:blipFill>
+        <p:spPr>
+          <a:xfrm>
             <a:off x="457200" y="365760"/>
-            <a:ext cx="365760" cy="389284"/>
+            <a:ext cx="548640" cy="583926"/>
           </a:xfrm>
           <a:prstGeom prst="rect">
             <a:avLst/>
@@ -3754,14 +3709,14 @@
       </p:pic>
       <p:sp>
         <p:nvSpPr>
-          <p:cNvPr id="4" name="Text 1"/>
+          <p:cNvPr id="4" name="Text 0"/>
           <p:cNvSpPr txBox="1"/>
           <p:nvPr/>
         </p:nvSpPr>
         <p:spPr>
           <a:xfrm>
-            <a:off x="932688" y="329184"/>
-            <a:ext cx="2926080" cy="274320"/>
+            <a:off x="1170432" y="347472"/>
+            <a:ext cx="3291840" cy="402336"/>
           </a:xfrm>
           <a:prstGeom prst="rect">
             <a:avLst/>
@@ -3777,7 +3732,7 @@
               <a:buNone/>
             </a:pPr>
             <a:r>
-              <a:rPr lang="en-US" sz="1500" spc="200" kern="0" dirty="0">
+              <a:rPr lang="en-US" sz="2200" spc="200" kern="0" dirty="0">
                 <a:solidFill>
                   <a:srgbClr val="FFFFFF"/>
                 </a:solidFill>
@@ -3787,20 +3742,20 @@
               </a:rPr>
               <a:t>VALLETTA</a:t>
             </a:r>
-            <a:endParaRPr lang="en-US" sz="1500" dirty="0"/>
-          </a:p>
-        </p:txBody>
-      </p:sp>
-      <p:sp>
-        <p:nvSpPr>
-          <p:cNvPr id="5" name="Text 2"/>
+            <a:endParaRPr lang="en-US" sz="2200" dirty="0"/>
+          </a:p>
+        </p:txBody>
+      </p:sp>
+      <p:sp>
+        <p:nvSpPr>
+          <p:cNvPr id="5" name="Text 1"/>
           <p:cNvSpPr txBox="1"/>
           <p:nvPr/>
         </p:nvSpPr>
         <p:spPr>
           <a:xfrm>
-            <a:off x="932688" y="594360"/>
-            <a:ext cx="2926080" cy="219456"/>
+            <a:off x="1170432" y="731520"/>
+            <a:ext cx="3291840" cy="274320"/>
           </a:xfrm>
           <a:prstGeom prst="rect">
             <a:avLst/>
@@ -3816,7 +3771,7 @@
               <a:buNone/>
             </a:pPr>
             <a:r>
-              <a:rPr lang="en-US" sz="750" b="1" spc="200" kern="0" dirty="0">
+              <a:rPr lang="en-US" sz="1100" b="1" spc="200" kern="0" dirty="0">
                 <a:solidFill>
                   <a:srgbClr val="5B5F66"/>
                 </a:solidFill>
@@ -3826,19 +3781,19 @@
               </a:rPr>
               <a:t>INDUSTRIES, INC.</a:t>
             </a:r>
-            <a:endParaRPr lang="en-US" sz="750" dirty="0"/>
-          </a:p>
-        </p:txBody>
-      </p:sp>
-      <p:sp>
-        <p:nvSpPr>
-          <p:cNvPr id="6" name="Text 3"/>
+            <a:endParaRPr lang="en-US" sz="1100" dirty="0"/>
+          </a:p>
+        </p:txBody>
+      </p:sp>
+      <p:sp>
+        <p:nvSpPr>
+          <p:cNvPr id="6" name="Text 2"/>
           <p:cNvSpPr txBox="1"/>
           <p:nvPr/>
         </p:nvSpPr>
         <p:spPr>
           <a:xfrm>
-            <a:off x="457200" y="777240"/>
+            <a:off x="457200" y="1005840"/>
             <a:ext cx="9144000" cy="320040"/>
           </a:xfrm>
           <a:prstGeom prst="rect">
@@ -3871,13 +3826,13 @@
       </p:sp>
       <p:sp>
         <p:nvSpPr>
-          <p:cNvPr id="7" name="Text 4"/>
+          <p:cNvPr id="7" name="Text 3"/>
           <p:cNvSpPr txBox="1"/>
           <p:nvPr/>
         </p:nvSpPr>
         <p:spPr>
           <a:xfrm>
-            <a:off x="457200" y="1097280"/>
+            <a:off x="457200" y="1325880"/>
             <a:ext cx="11274552" cy="685800"/>
           </a:xfrm>
           <a:prstGeom prst="rect">
@@ -3910,13 +3865,13 @@
       </p:sp>
       <p:sp>
         <p:nvSpPr>
-          <p:cNvPr id="8" name="Shape 5"/>
+          <p:cNvPr id="8" name="Shape 4"/>
           <p:cNvSpPr/>
           <p:nvPr/>
         </p:nvSpPr>
         <p:spPr>
           <a:xfrm>
-            <a:off x="457200" y="1965960"/>
+            <a:off x="457200" y="2194560"/>
             <a:ext cx="274320" cy="29261"/>
           </a:xfrm>
           <a:prstGeom prst="rect">
@@ -3930,13 +3885,13 @@
       </p:sp>
       <p:sp>
         <p:nvSpPr>
-          <p:cNvPr id="9" name="Shape 6"/>
+          <p:cNvPr id="9" name="Shape 5"/>
           <p:cNvSpPr/>
           <p:nvPr/>
         </p:nvSpPr>
         <p:spPr>
           <a:xfrm>
-            <a:off x="457200" y="1965960"/>
+            <a:off x="457200" y="2194560"/>
             <a:ext cx="29261" cy="274320"/>
           </a:xfrm>
           <a:prstGeom prst="rect">
@@ -3950,13 +3905,13 @@
       </p:sp>
       <p:sp>
         <p:nvSpPr>
-          <p:cNvPr id="10" name="Text 7"/>
+          <p:cNvPr id="10" name="Text 6"/>
           <p:cNvSpPr txBox="1"/>
           <p:nvPr/>
         </p:nvSpPr>
         <p:spPr>
           <a:xfrm>
-            <a:off x="457200" y="2112264"/>
+            <a:off x="457200" y="2340864"/>
             <a:ext cx="2681478" cy="640080"/>
           </a:xfrm>
           <a:prstGeom prst="rect">
@@ -3989,13 +3944,13 @@
       </p:sp>
       <p:sp>
         <p:nvSpPr>
-          <p:cNvPr id="11" name="Text 8"/>
+          <p:cNvPr id="11" name="Text 7"/>
           <p:cNvSpPr txBox="1"/>
           <p:nvPr/>
         </p:nvSpPr>
         <p:spPr>
           <a:xfrm>
-            <a:off x="457200" y="2770632"/>
+            <a:off x="457200" y="2999232"/>
             <a:ext cx="2544318" cy="457200"/>
           </a:xfrm>
           <a:prstGeom prst="rect">
@@ -4031,13 +3986,13 @@
       </p:sp>
       <p:sp>
         <p:nvSpPr>
-          <p:cNvPr id="12" name="Shape 9"/>
+          <p:cNvPr id="12" name="Shape 8"/>
           <p:cNvSpPr/>
           <p:nvPr/>
         </p:nvSpPr>
         <p:spPr>
           <a:xfrm>
-            <a:off x="3321558" y="1965960"/>
+            <a:off x="3321558" y="2194560"/>
             <a:ext cx="274320" cy="29261"/>
           </a:xfrm>
           <a:prstGeom prst="rect">
@@ -4051,13 +4006,13 @@
       </p:sp>
       <p:sp>
         <p:nvSpPr>
-          <p:cNvPr id="13" name="Shape 10"/>
+          <p:cNvPr id="13" name="Shape 9"/>
           <p:cNvSpPr/>
           <p:nvPr/>
         </p:nvSpPr>
         <p:spPr>
           <a:xfrm>
-            <a:off x="3321558" y="1965960"/>
+            <a:off x="3321558" y="2194560"/>
             <a:ext cx="29261" cy="274320"/>
           </a:xfrm>
           <a:prstGeom prst="rect">
@@ -4071,13 +4026,13 @@
       </p:sp>
       <p:sp>
         <p:nvSpPr>
-          <p:cNvPr id="14" name="Text 11"/>
+          <p:cNvPr id="14" name="Text 10"/>
           <p:cNvSpPr txBox="1"/>
           <p:nvPr/>
         </p:nvSpPr>
         <p:spPr>
           <a:xfrm>
-            <a:off x="3321558" y="2112264"/>
+            <a:off x="3321558" y="2340864"/>
             <a:ext cx="2681478" cy="640080"/>
           </a:xfrm>
           <a:prstGeom prst="rect">
@@ -4110,13 +4065,13 @@
       </p:sp>
       <p:sp>
         <p:nvSpPr>
-          <p:cNvPr id="15" name="Text 12"/>
+          <p:cNvPr id="15" name="Text 11"/>
           <p:cNvSpPr txBox="1"/>
           <p:nvPr/>
         </p:nvSpPr>
         <p:spPr>
           <a:xfrm>
-            <a:off x="3321558" y="2770632"/>
+            <a:off x="3321558" y="2999232"/>
             <a:ext cx="2544318" cy="457200"/>
           </a:xfrm>
           <a:prstGeom prst="rect">
@@ -4152,13 +4107,13 @@
       </p:sp>
       <p:sp>
         <p:nvSpPr>
-          <p:cNvPr id="16" name="Shape 13"/>
+          <p:cNvPr id="16" name="Shape 12"/>
           <p:cNvSpPr/>
           <p:nvPr/>
         </p:nvSpPr>
         <p:spPr>
           <a:xfrm>
-            <a:off x="6185916" y="1965960"/>
+            <a:off x="6185916" y="2194560"/>
             <a:ext cx="274320" cy="29261"/>
           </a:xfrm>
           <a:prstGeom prst="rect">
@@ -4172,13 +4127,13 @@
       </p:sp>
       <p:sp>
         <p:nvSpPr>
-          <p:cNvPr id="17" name="Shape 14"/>
+          <p:cNvPr id="17" name="Shape 13"/>
           <p:cNvSpPr/>
           <p:nvPr/>
         </p:nvSpPr>
         <p:spPr>
           <a:xfrm>
-            <a:off x="6185916" y="1965960"/>
+            <a:off x="6185916" y="2194560"/>
             <a:ext cx="29261" cy="274320"/>
           </a:xfrm>
           <a:prstGeom prst="rect">
@@ -4192,13 +4147,13 @@
       </p:sp>
       <p:sp>
         <p:nvSpPr>
-          <p:cNvPr id="18" name="Text 15"/>
+          <p:cNvPr id="18" name="Text 14"/>
           <p:cNvSpPr txBox="1"/>
           <p:nvPr/>
         </p:nvSpPr>
         <p:spPr>
           <a:xfrm>
-            <a:off x="6185916" y="2112264"/>
+            <a:off x="6185916" y="2340864"/>
             <a:ext cx="2681478" cy="640080"/>
           </a:xfrm>
           <a:prstGeom prst="rect">
@@ -4231,13 +4186,13 @@
       </p:sp>
       <p:sp>
         <p:nvSpPr>
-          <p:cNvPr id="19" name="Text 16"/>
+          <p:cNvPr id="19" name="Text 15"/>
           <p:cNvSpPr txBox="1"/>
           <p:nvPr/>
         </p:nvSpPr>
         <p:spPr>
           <a:xfrm>
-            <a:off x="6185916" y="2770632"/>
+            <a:off x="6185916" y="2999232"/>
             <a:ext cx="2544318" cy="457200"/>
           </a:xfrm>
           <a:prstGeom prst="rect">
@@ -4273,13 +4228,13 @@
       </p:sp>
       <p:sp>
         <p:nvSpPr>
-          <p:cNvPr id="20" name="Shape 17"/>
+          <p:cNvPr id="20" name="Shape 16"/>
           <p:cNvSpPr/>
           <p:nvPr/>
         </p:nvSpPr>
         <p:spPr>
           <a:xfrm>
-            <a:off x="9050274" y="1965960"/>
+            <a:off x="9050274" y="2194560"/>
             <a:ext cx="274320" cy="29261"/>
           </a:xfrm>
           <a:prstGeom prst="rect">
@@ -4293,13 +4248,13 @@
       </p:sp>
       <p:sp>
         <p:nvSpPr>
-          <p:cNvPr id="21" name="Shape 18"/>
+          <p:cNvPr id="21" name="Shape 17"/>
           <p:cNvSpPr/>
           <p:nvPr/>
         </p:nvSpPr>
         <p:spPr>
           <a:xfrm>
-            <a:off x="9050274" y="1965960"/>
+            <a:off x="9050274" y="2194560"/>
             <a:ext cx="29261" cy="274320"/>
           </a:xfrm>
           <a:prstGeom prst="rect">
@@ -4313,13 +4268,13 @@
       </p:sp>
       <p:sp>
         <p:nvSpPr>
-          <p:cNvPr id="22" name="Text 19"/>
+          <p:cNvPr id="22" name="Text 18"/>
           <p:cNvSpPr txBox="1"/>
           <p:nvPr/>
         </p:nvSpPr>
         <p:spPr>
           <a:xfrm>
-            <a:off x="9050274" y="2112264"/>
+            <a:off x="9050274" y="2340864"/>
             <a:ext cx="2681478" cy="640080"/>
           </a:xfrm>
           <a:prstGeom prst="rect">
@@ -4369,13 +4324,13 @@
       </p:sp>
       <p:sp>
         <p:nvSpPr>
-          <p:cNvPr id="23" name="Text 20"/>
+          <p:cNvPr id="23" name="Text 19"/>
           <p:cNvSpPr txBox="1"/>
           <p:nvPr/>
         </p:nvSpPr>
         <p:spPr>
           <a:xfrm>
-            <a:off x="9050274" y="2770632"/>
+            <a:off x="9050274" y="2999232"/>
             <a:ext cx="2544318" cy="457200"/>
           </a:xfrm>
           <a:prstGeom prst="rect">
@@ -4424,8 +4379,8 @@
           </p:nvPr>
         </p:nvGraphicFramePr>
         <p:xfrm>
-          <a:off x="457200" y="3383280"/>
-          <a:ext cx="11274552" cy="2926080"/>
+          <a:off x="457200" y="3611880"/>
+          <a:ext cx="11274552" cy="2697480"/>
         </p:xfrm>
         <a:graphic>
           <a:graphicData uri="http://schemas.openxmlformats.org/drawingml/2006/table">
@@ -4436,7 +4391,7 @@
                 <a:gridCol w="3291840"/>
                 <a:gridCol w="5605272"/>
               </a:tblGrid>
-              <a:tr h="418011">
+              <a:tr h="385354">
                 <a:tc>
                   <a:txBody>
                     <a:bodyPr/>
@@ -4621,7 +4576,7 @@
                   </a:tcPr>
                 </a:tc>
               </a:tr>
-              <a:tr h="418011">
+              <a:tr h="385354">
                 <a:tc>
                   <a:txBody>
                     <a:bodyPr/>
@@ -4806,7 +4761,7 @@
                   </a:tcPr>
                 </a:tc>
               </a:tr>
-              <a:tr h="418011">
+              <a:tr h="385354">
                 <a:tc>
                   <a:txBody>
                     <a:bodyPr/>
@@ -4991,7 +4946,7 @@
                   </a:tcPr>
                 </a:tc>
               </a:tr>
-              <a:tr h="418011">
+              <a:tr h="385354">
                 <a:tc>
                   <a:txBody>
                     <a:bodyPr/>
@@ -5176,7 +5131,7 @@
                   </a:tcPr>
                 </a:tc>
               </a:tr>
-              <a:tr h="418011">
+              <a:tr h="385354">
                 <a:tc>
                   <a:txBody>
                     <a:bodyPr/>
@@ -5361,7 +5316,7 @@
                   </a:tcPr>
                 </a:tc>
               </a:tr>
-              <a:tr h="418011">
+              <a:tr h="385354">
                 <a:tc>
                   <a:txBody>
                     <a:bodyPr/>
@@ -5546,7 +5501,7 @@
                   </a:tcPr>
                 </a:tc>
               </a:tr>
-              <a:tr h="418011">
+              <a:tr h="385354">
                 <a:tc>
                   <a:txBody>
                     <a:bodyPr/>
@@ -5767,48 +5722,9 @@
           <a:chExt cx="0" cy="0"/>
         </a:xfrm>
       </p:grpSpPr>
-      <p:sp>
-        <p:nvSpPr>
-          <p:cNvPr id="2" name="Text 0"/>
-          <p:cNvSpPr txBox="1"/>
-          <p:nvPr/>
-        </p:nvSpPr>
-        <p:spPr>
-          <a:xfrm>
-            <a:off x="6949440" y="0"/>
-            <a:ext cx="5486400" cy="6858000"/>
-          </a:xfrm>
-          <a:prstGeom prst="rect">
-            <a:avLst/>
-          </a:prstGeom>
-          <a:noFill/>
-          <a:ln/>
-        </p:spPr>
-        <p:txBody>
-          <a:bodyPr wrap="square" lIns="0" tIns="0" rIns="0" bIns="0" rtlCol="0" anchor="t"/>
-          <a:lstStyle/>
-          <a:p>
-            <a:pPr algn="r" indent="0" marL="0">
-              <a:buNone/>
-            </a:pPr>
-            <a:r>
-              <a:rPr lang="en-US" sz="36000" b="1" dirty="0">
-                <a:solidFill>
-                  <a:srgbClr val="EBEBE9"/>
-                </a:solidFill>
-                <a:latin typeface="Cambria" pitchFamily="34" charset="0"/>
-                <a:ea typeface="Cambria" pitchFamily="34" charset="-122"/>
-                <a:cs typeface="Cambria" pitchFamily="34" charset="-120"/>
-              </a:rPr>
-              <a:t>04</a:t>
-            </a:r>
-            <a:endParaRPr lang="en-US" sz="36000" dirty="0"/>
-          </a:p>
-        </p:txBody>
-      </p:sp>
       <p:pic>
         <p:nvPicPr>
-          <p:cNvPr id="3" name="Image 0" descr="/home/user/valletta-design-system/assets/logo/valletta-lockup.png">    </p:cNvPr>
+          <p:cNvPr id="2" name="Image 0" descr="/home/user/valletta-design-system/assets/logo/valletta-mark-ghost.png">    </p:cNvPr>
           <p:cNvPicPr>
             <a:picLocks noChangeAspect="1"/>
           </p:cNvPicPr>
@@ -5822,8 +5738,32 @@
         </p:blipFill>
         <p:spPr>
           <a:xfrm>
+            <a:off x="7891272" y="502920"/>
+            <a:ext cx="5486400" cy="5839260"/>
+          </a:xfrm>
+          <a:prstGeom prst="rect">
+            <a:avLst/>
+          </a:prstGeom>
+        </p:spPr>
+      </p:pic>
+      <p:pic>
+        <p:nvPicPr>
+          <p:cNvPr id="3" name="Image 1" descr="/home/user/valletta-design-system/assets/logo/valletta-lockup.png">    </p:cNvPr>
+          <p:cNvPicPr>
+            <a:picLocks noChangeAspect="1"/>
+          </p:cNvPicPr>
+          <p:nvPr/>
+        </p:nvPicPr>
+        <p:blipFill>
+          <a:blip r:embed="rId2"/>
+          <a:stretch>
+            <a:fillRect/>
+          </a:stretch>
+        </p:blipFill>
+        <p:spPr>
+          <a:xfrm>
             <a:off x="457200" y="365760"/>
-            <a:ext cx="1828800" cy="384048"/>
+            <a:ext cx="2743200" cy="576072"/>
           </a:xfrm>
           <a:prstGeom prst="rect">
             <a:avLst/>
@@ -5832,13 +5772,13 @@
       </p:pic>
       <p:sp>
         <p:nvSpPr>
-          <p:cNvPr id="4" name="Text 1"/>
+          <p:cNvPr id="4" name="Text 0"/>
           <p:cNvSpPr txBox="1"/>
           <p:nvPr/>
         </p:nvSpPr>
         <p:spPr>
           <a:xfrm>
-            <a:off x="457200" y="777240"/>
+            <a:off x="457200" y="1005840"/>
             <a:ext cx="9144000" cy="320040"/>
           </a:xfrm>
           <a:prstGeom prst="rect">
@@ -5871,13 +5811,13 @@
       </p:sp>
       <p:sp>
         <p:nvSpPr>
-          <p:cNvPr id="5" name="Text 2"/>
+          <p:cNvPr id="5" name="Text 1"/>
           <p:cNvSpPr txBox="1"/>
           <p:nvPr/>
         </p:nvSpPr>
         <p:spPr>
           <a:xfrm>
-            <a:off x="457200" y="1097280"/>
+            <a:off x="457200" y="1325880"/>
             <a:ext cx="11274552" cy="777240"/>
           </a:xfrm>
           <a:prstGeom prst="rect">
@@ -5926,8 +5866,8 @@
           </p:nvPr>
         </p:nvGraphicFramePr>
         <p:xfrm>
-          <a:off x="457200" y="2011680"/>
-          <a:ext cx="11274552" cy="4343400"/>
+          <a:off x="457200" y="2240280"/>
+          <a:ext cx="11274552" cy="4069080"/>
         </p:xfrm>
         <a:graphic>
           <a:graphicData uri="http://schemas.openxmlformats.org/drawingml/2006/table">
@@ -5937,7 +5877,7 @@
                 <a:gridCol w="4023360"/>
                 <a:gridCol w="7251192"/>
               </a:tblGrid>
-              <a:tr h="620486">
+              <a:tr h="581297">
                 <a:tc>
                   <a:txBody>
                     <a:bodyPr/>
@@ -6061,7 +6001,7 @@
                   </a:tcPr>
                 </a:tc>
               </a:tr>
-              <a:tr h="620486">
+              <a:tr h="581297">
                 <a:tc>
                   <a:txBody>
                     <a:bodyPr/>
@@ -6185,7 +6125,7 @@
                   </a:tcPr>
                 </a:tc>
               </a:tr>
-              <a:tr h="620486">
+              <a:tr h="581297">
                 <a:tc>
                   <a:txBody>
                     <a:bodyPr/>
@@ -6309,7 +6249,7 @@
                   </a:tcPr>
                 </a:tc>
               </a:tr>
-              <a:tr h="620486">
+              <a:tr h="581297">
                 <a:tc>
                   <a:txBody>
                     <a:bodyPr/>
@@ -6433,7 +6373,7 @@
                   </a:tcPr>
                 </a:tc>
               </a:tr>
-              <a:tr h="620486">
+              <a:tr h="581297">
                 <a:tc>
                   <a:txBody>
                     <a:bodyPr/>
@@ -6557,7 +6497,7 @@
                   </a:tcPr>
                 </a:tc>
               </a:tr>
-              <a:tr h="620486">
+              <a:tr h="581297">
                 <a:tc>
                   <a:txBody>
                     <a:bodyPr/>
@@ -6681,7 +6621,7 @@
                   </a:tcPr>
                 </a:tc>
               </a:tr>
-              <a:tr h="620486">
+              <a:tr h="581297">
                 <a:tc>
                   <a:txBody>
                     <a:bodyPr/>
@@ -6811,7 +6751,7 @@
       </p:graphicFrame>
       <p:sp>
         <p:nvSpPr>
-          <p:cNvPr id="7" name="Text 3"/>
+          <p:cNvPr id="7" name="Text 2"/>
           <p:cNvSpPr/>
           <p:nvPr/>
         </p:nvSpPr>
@@ -6880,48 +6820,9 @@
           <a:chExt cx="0" cy="0"/>
         </a:xfrm>
       </p:grpSpPr>
-      <p:sp>
-        <p:nvSpPr>
-          <p:cNvPr id="2" name="Text 0"/>
-          <p:cNvSpPr txBox="1"/>
-          <p:nvPr/>
-        </p:nvSpPr>
-        <p:spPr>
-          <a:xfrm>
-            <a:off x="6949440" y="0"/>
-            <a:ext cx="5486400" cy="6858000"/>
-          </a:xfrm>
-          <a:prstGeom prst="rect">
-            <a:avLst/>
-          </a:prstGeom>
-          <a:noFill/>
-          <a:ln/>
-        </p:spPr>
-        <p:txBody>
-          <a:bodyPr wrap="square" lIns="0" tIns="0" rIns="0" bIns="0" rtlCol="0" anchor="t"/>
-          <a:lstStyle/>
-          <a:p>
-            <a:pPr algn="r" indent="0" marL="0">
-              <a:buNone/>
-            </a:pPr>
-            <a:r>
-              <a:rPr lang="en-US" sz="36000" b="1" dirty="0">
-                <a:solidFill>
-                  <a:srgbClr val="141414"/>
-                </a:solidFill>
-                <a:latin typeface="Cambria" pitchFamily="34" charset="0"/>
-                <a:ea typeface="Cambria" pitchFamily="34" charset="-122"/>
-                <a:cs typeface="Cambria" pitchFamily="34" charset="-120"/>
-              </a:rPr>
-              <a:t>05</a:t>
-            </a:r>
-            <a:endParaRPr lang="en-US" sz="36000" dirty="0"/>
-          </a:p>
-        </p:txBody>
-      </p:sp>
       <p:pic>
         <p:nvPicPr>
-          <p:cNvPr id="3" name="Image 0" descr="/home/user/valletta-design-system/assets/logo/valletta-mark.png">    </p:cNvPr>
+          <p:cNvPr id="2" name="Image 0" descr="/home/user/valletta-design-system/assets/logo/valletta-mark-ghost.png">    </p:cNvPr>
           <p:cNvPicPr>
             <a:picLocks noChangeAspect="1"/>
           </p:cNvPicPr>
@@ -6935,8 +6836,32 @@
         </p:blipFill>
         <p:spPr>
           <a:xfrm>
+            <a:off x="7891272" y="502920"/>
+            <a:ext cx="5486400" cy="5839260"/>
+          </a:xfrm>
+          <a:prstGeom prst="rect">
+            <a:avLst/>
+          </a:prstGeom>
+        </p:spPr>
+      </p:pic>
+      <p:pic>
+        <p:nvPicPr>
+          <p:cNvPr id="3" name="Image 1" descr="/home/user/valletta-design-system/assets/logo/valletta-mark.png">    </p:cNvPr>
+          <p:cNvPicPr>
+            <a:picLocks noChangeAspect="1"/>
+          </p:cNvPicPr>
+          <p:nvPr/>
+        </p:nvPicPr>
+        <p:blipFill>
+          <a:blip r:embed="rId2"/>
+          <a:stretch>
+            <a:fillRect/>
+          </a:stretch>
+        </p:blipFill>
+        <p:spPr>
+          <a:xfrm>
             <a:off x="457200" y="365760"/>
-            <a:ext cx="365760" cy="389284"/>
+            <a:ext cx="548640" cy="583926"/>
           </a:xfrm>
           <a:prstGeom prst="rect">
             <a:avLst/>
@@ -6945,14 +6870,14 @@
       </p:pic>
       <p:sp>
         <p:nvSpPr>
-          <p:cNvPr id="4" name="Text 1"/>
+          <p:cNvPr id="4" name="Text 0"/>
           <p:cNvSpPr txBox="1"/>
           <p:nvPr/>
         </p:nvSpPr>
         <p:spPr>
           <a:xfrm>
-            <a:off x="932688" y="329184"/>
-            <a:ext cx="2926080" cy="274320"/>
+            <a:off x="1170432" y="347472"/>
+            <a:ext cx="3291840" cy="402336"/>
           </a:xfrm>
           <a:prstGeom prst="rect">
             <a:avLst/>
@@ -6968,7 +6893,7 @@
               <a:buNone/>
             </a:pPr>
             <a:r>
-              <a:rPr lang="en-US" sz="1500" spc="200" kern="0" dirty="0">
+              <a:rPr lang="en-US" sz="2200" spc="200" kern="0" dirty="0">
                 <a:solidFill>
                   <a:srgbClr val="FFFFFF"/>
                 </a:solidFill>
@@ -6978,20 +6903,20 @@
               </a:rPr>
               <a:t>VALLETTA</a:t>
             </a:r>
-            <a:endParaRPr lang="en-US" sz="1500" dirty="0"/>
-          </a:p>
-        </p:txBody>
-      </p:sp>
-      <p:sp>
-        <p:nvSpPr>
-          <p:cNvPr id="5" name="Text 2"/>
+            <a:endParaRPr lang="en-US" sz="2200" dirty="0"/>
+          </a:p>
+        </p:txBody>
+      </p:sp>
+      <p:sp>
+        <p:nvSpPr>
+          <p:cNvPr id="5" name="Text 1"/>
           <p:cNvSpPr txBox="1"/>
           <p:nvPr/>
         </p:nvSpPr>
         <p:spPr>
           <a:xfrm>
-            <a:off x="932688" y="594360"/>
-            <a:ext cx="2926080" cy="219456"/>
+            <a:off x="1170432" y="731520"/>
+            <a:ext cx="3291840" cy="274320"/>
           </a:xfrm>
           <a:prstGeom prst="rect">
             <a:avLst/>
@@ -7007,7 +6932,7 @@
               <a:buNone/>
             </a:pPr>
             <a:r>
-              <a:rPr lang="en-US" sz="750" b="1" spc="200" kern="0" dirty="0">
+              <a:rPr lang="en-US" sz="1100" b="1" spc="200" kern="0" dirty="0">
                 <a:solidFill>
                   <a:srgbClr val="5B5F66"/>
                 </a:solidFill>
@@ -7017,19 +6942,19 @@
               </a:rPr>
               <a:t>INDUSTRIES, INC.</a:t>
             </a:r>
-            <a:endParaRPr lang="en-US" sz="750" dirty="0"/>
-          </a:p>
-        </p:txBody>
-      </p:sp>
-      <p:sp>
-        <p:nvSpPr>
-          <p:cNvPr id="6" name="Text 3"/>
+            <a:endParaRPr lang="en-US" sz="1100" dirty="0"/>
+          </a:p>
+        </p:txBody>
+      </p:sp>
+      <p:sp>
+        <p:nvSpPr>
+          <p:cNvPr id="6" name="Text 2"/>
           <p:cNvSpPr txBox="1"/>
           <p:nvPr/>
         </p:nvSpPr>
         <p:spPr>
           <a:xfrm>
-            <a:off x="457200" y="777240"/>
+            <a:off x="457200" y="1005840"/>
             <a:ext cx="5486400" cy="320040"/>
           </a:xfrm>
           <a:prstGeom prst="rect">
@@ -7062,13 +6987,13 @@
       </p:sp>
       <p:sp>
         <p:nvSpPr>
-          <p:cNvPr id="7" name="Text 4"/>
+          <p:cNvPr id="7" name="Text 3"/>
           <p:cNvSpPr txBox="1"/>
           <p:nvPr/>
         </p:nvSpPr>
         <p:spPr>
           <a:xfrm>
-            <a:off x="457200" y="1097280"/>
+            <a:off x="457200" y="1325880"/>
             <a:ext cx="6675120" cy="685800"/>
           </a:xfrm>
           <a:prstGeom prst="rect">
@@ -7101,13 +7026,13 @@
       </p:sp>
       <p:sp>
         <p:nvSpPr>
-          <p:cNvPr id="8" name="Text 5"/>
+          <p:cNvPr id="8" name="Text 4"/>
           <p:cNvSpPr txBox="1"/>
           <p:nvPr/>
         </p:nvSpPr>
         <p:spPr>
           <a:xfrm>
-            <a:off x="457200" y="1783080"/>
+            <a:off x="457200" y="2011680"/>
             <a:ext cx="6675120" cy="457200"/>
           </a:xfrm>
           <a:prstGeom prst="rect">
@@ -7140,13 +7065,13 @@
       </p:sp>
       <p:sp>
         <p:nvSpPr>
-          <p:cNvPr id="9" name="Shape 6"/>
+          <p:cNvPr id="9" name="Shape 5"/>
           <p:cNvSpPr/>
           <p:nvPr/>
         </p:nvSpPr>
         <p:spPr>
           <a:xfrm>
-            <a:off x="457200" y="2606040"/>
+            <a:off x="457200" y="2788920"/>
             <a:ext cx="256032" cy="32004"/>
           </a:xfrm>
           <a:prstGeom prst="rect">
@@ -7160,13 +7085,13 @@
       </p:sp>
       <p:sp>
         <p:nvSpPr>
-          <p:cNvPr id="10" name="Shape 7"/>
+          <p:cNvPr id="10" name="Shape 6"/>
           <p:cNvSpPr/>
           <p:nvPr/>
         </p:nvSpPr>
         <p:spPr>
           <a:xfrm>
-            <a:off x="457200" y="2606040"/>
+            <a:off x="457200" y="2788920"/>
             <a:ext cx="32004" cy="256032"/>
           </a:xfrm>
           <a:prstGeom prst="rect">
@@ -7180,13 +7105,13 @@
       </p:sp>
       <p:sp>
         <p:nvSpPr>
-          <p:cNvPr id="11" name="Text 8"/>
+          <p:cNvPr id="11" name="Text 7"/>
           <p:cNvSpPr txBox="1"/>
           <p:nvPr/>
         </p:nvSpPr>
         <p:spPr>
           <a:xfrm>
-            <a:off x="868680" y="2569464"/>
+            <a:off x="868680" y="2752344"/>
             <a:ext cx="5623560" cy="384048"/>
           </a:xfrm>
           <a:prstGeom prst="rect">
@@ -7219,13 +7144,13 @@
       </p:sp>
       <p:sp>
         <p:nvSpPr>
-          <p:cNvPr id="12" name="Text 9"/>
+          <p:cNvPr id="12" name="Text 8"/>
           <p:cNvSpPr txBox="1"/>
           <p:nvPr/>
         </p:nvSpPr>
         <p:spPr>
           <a:xfrm>
-            <a:off x="868680" y="2935224"/>
+            <a:off x="868680" y="3118104"/>
             <a:ext cx="5623560" cy="640080"/>
           </a:xfrm>
           <a:prstGeom prst="rect">
@@ -7261,13 +7186,13 @@
       </p:sp>
       <p:sp>
         <p:nvSpPr>
-          <p:cNvPr id="13" name="Shape 10"/>
+          <p:cNvPr id="13" name="Shape 9"/>
           <p:cNvSpPr/>
           <p:nvPr/>
         </p:nvSpPr>
         <p:spPr>
           <a:xfrm>
-            <a:off x="457200" y="3685032"/>
+            <a:off x="457200" y="3840480"/>
             <a:ext cx="256032" cy="32004"/>
           </a:xfrm>
           <a:prstGeom prst="rect">
@@ -7281,13 +7206,13 @@
       </p:sp>
       <p:sp>
         <p:nvSpPr>
-          <p:cNvPr id="14" name="Shape 11"/>
+          <p:cNvPr id="14" name="Shape 10"/>
           <p:cNvSpPr/>
           <p:nvPr/>
         </p:nvSpPr>
         <p:spPr>
           <a:xfrm>
-            <a:off x="457200" y="3685032"/>
+            <a:off x="457200" y="3840480"/>
             <a:ext cx="32004" cy="256032"/>
           </a:xfrm>
           <a:prstGeom prst="rect">
@@ -7301,13 +7226,13 @@
       </p:sp>
       <p:sp>
         <p:nvSpPr>
-          <p:cNvPr id="15" name="Text 12"/>
+          <p:cNvPr id="15" name="Text 11"/>
           <p:cNvSpPr txBox="1"/>
           <p:nvPr/>
         </p:nvSpPr>
         <p:spPr>
           <a:xfrm>
-            <a:off x="868680" y="3648456"/>
+            <a:off x="868680" y="3803904"/>
             <a:ext cx="5623560" cy="384048"/>
           </a:xfrm>
           <a:prstGeom prst="rect">
@@ -7340,13 +7265,13 @@
       </p:sp>
       <p:sp>
         <p:nvSpPr>
-          <p:cNvPr id="16" name="Text 13"/>
+          <p:cNvPr id="16" name="Text 12"/>
           <p:cNvSpPr txBox="1"/>
           <p:nvPr/>
         </p:nvSpPr>
         <p:spPr>
           <a:xfrm>
-            <a:off x="868680" y="4014216"/>
+            <a:off x="868680" y="4169664"/>
             <a:ext cx="5623560" cy="640080"/>
           </a:xfrm>
           <a:prstGeom prst="rect">
@@ -7382,13 +7307,13 @@
       </p:sp>
       <p:sp>
         <p:nvSpPr>
-          <p:cNvPr id="17" name="Shape 14"/>
+          <p:cNvPr id="17" name="Shape 13"/>
           <p:cNvSpPr/>
           <p:nvPr/>
         </p:nvSpPr>
         <p:spPr>
           <a:xfrm>
-            <a:off x="457200" y="4764024"/>
+            <a:off x="457200" y="4892040"/>
             <a:ext cx="256032" cy="32004"/>
           </a:xfrm>
           <a:prstGeom prst="rect">
@@ -7402,13 +7327,13 @@
       </p:sp>
       <p:sp>
         <p:nvSpPr>
-          <p:cNvPr id="18" name="Shape 15"/>
+          <p:cNvPr id="18" name="Shape 14"/>
           <p:cNvSpPr/>
           <p:nvPr/>
         </p:nvSpPr>
         <p:spPr>
           <a:xfrm>
-            <a:off x="457200" y="4764024"/>
+            <a:off x="457200" y="4892040"/>
             <a:ext cx="32004" cy="256032"/>
           </a:xfrm>
           <a:prstGeom prst="rect">
@@ -7422,13 +7347,13 @@
       </p:sp>
       <p:sp>
         <p:nvSpPr>
-          <p:cNvPr id="19" name="Text 16"/>
+          <p:cNvPr id="19" name="Text 15"/>
           <p:cNvSpPr txBox="1"/>
           <p:nvPr/>
         </p:nvSpPr>
         <p:spPr>
           <a:xfrm>
-            <a:off x="868680" y="4727448"/>
+            <a:off x="868680" y="4855464"/>
             <a:ext cx="5623560" cy="384048"/>
           </a:xfrm>
           <a:prstGeom prst="rect">
@@ -7461,13 +7386,13 @@
       </p:sp>
       <p:sp>
         <p:nvSpPr>
-          <p:cNvPr id="20" name="Text 17"/>
+          <p:cNvPr id="20" name="Text 16"/>
           <p:cNvSpPr txBox="1"/>
           <p:nvPr/>
         </p:nvSpPr>
         <p:spPr>
           <a:xfrm>
-            <a:off x="868680" y="5093208"/>
+            <a:off x="868680" y="5221224"/>
             <a:ext cx="5623560" cy="640080"/>
           </a:xfrm>
           <a:prstGeom prst="rect">
@@ -7503,7 +7428,7 @@
       </p:sp>
       <p:sp>
         <p:nvSpPr>
-          <p:cNvPr id="21" name="Shape 18"/>
+          <p:cNvPr id="21" name="Shape 17"/>
           <p:cNvSpPr/>
           <p:nvPr/>
         </p:nvSpPr>
@@ -7523,7 +7448,7 @@
       </p:sp>
       <p:sp>
         <p:nvSpPr>
-          <p:cNvPr id="22" name="Shape 19"/>
+          <p:cNvPr id="22" name="Shape 18"/>
           <p:cNvSpPr/>
           <p:nvPr/>
         </p:nvSpPr>
@@ -7543,7 +7468,7 @@
       </p:sp>
       <p:sp>
         <p:nvSpPr>
-          <p:cNvPr id="23" name="Shape 20"/>
+          <p:cNvPr id="23" name="Shape 19"/>
           <p:cNvSpPr/>
           <p:nvPr/>
         </p:nvSpPr>
@@ -7563,7 +7488,7 @@
       </p:sp>
       <p:sp>
         <p:nvSpPr>
-          <p:cNvPr id="24" name="Text 21"/>
+          <p:cNvPr id="24" name="Text 20"/>
           <p:cNvSpPr txBox="1"/>
           <p:nvPr/>
         </p:nvSpPr>
@@ -7602,7 +7527,7 @@
       </p:sp>
       <p:sp>
         <p:nvSpPr>
-          <p:cNvPr id="25" name="Text 22"/>
+          <p:cNvPr id="25" name="Text 21"/>
           <p:cNvSpPr txBox="1"/>
           <p:nvPr/>
         </p:nvSpPr>
@@ -7684,7 +7609,7 @@
       </p:sp>
       <p:sp>
         <p:nvSpPr>
-          <p:cNvPr id="26" name="Text 23"/>
+          <p:cNvPr id="26" name="Text 22"/>
           <p:cNvSpPr txBox="1"/>
           <p:nvPr/>
         </p:nvSpPr>
@@ -7723,7 +7648,7 @@
       </p:sp>
       <p:sp>
         <p:nvSpPr>
-          <p:cNvPr id="27" name="Text 24"/>
+          <p:cNvPr id="27" name="Text 23"/>
           <p:cNvSpPr txBox="1"/>
           <p:nvPr/>
         </p:nvSpPr>
@@ -7825,7 +7750,7 @@
       </p:sp>
       <p:sp>
         <p:nvSpPr>
-          <p:cNvPr id="28" name="Shape 25"/>
+          <p:cNvPr id="28" name="Shape 24"/>
           <p:cNvSpPr/>
           <p:nvPr/>
         </p:nvSpPr>
@@ -7848,7 +7773,7 @@
       </p:sp>
       <p:sp>
         <p:nvSpPr>
-          <p:cNvPr id="29" name="Text 26"/>
+          <p:cNvPr id="29" name="Text 25"/>
           <p:cNvSpPr txBox="1"/>
           <p:nvPr/>
         </p:nvSpPr>
